--- a/mit-liftlab-2026/MIT_LiftLab_2026_Storytelling.pptx
+++ b/mit-liftlab-2026/MIT_LiftLab_2026_Storytelling.pptx
@@ -522,13 +522,13 @@
           </a:p>
           <a:p>
             <a:r>
-              <a:t>Buenas tardes. Somos Fernanda, Alexis y Carlos, estudiantes de Mecatrónica de cuarto semestre del Tec Campus San Luis Potosí.</a:t>
+              <a:t>Buenas tardes. Somos Fernanda, Alexis y Carlos.</a:t>
             </a:r>
           </a:p>
           <a:p/>
           <a:p>
             <a:r>
-              <a:t>Lo que les vamos a contar es la historia de cómo los datos nos obligaron a cambiar de pregunta a la mitad del camino — y de lo que encontramos cuando dejamos que los datos y las personas hablaran.</a:t>
+              <a:t>Esta es la historia de un proyecto que empezó mal — con un modelo estadístico básico que no servía — y de cómo, al darnos cuenta, lo expandimos con datos oficiales, salimos a hablar con cien personas reales, y construimos un plan centrado en ellas.</a:t>
             </a:r>
           </a:p>
           <a:p/>
@@ -615,25 +615,25 @@
           <a:p/>
           <a:p>
             <a:r>
-              <a:t>1,000 estudiantes simulados, 5,000 corridas por escenario, parámetros tomados de meta-análisis publicados — no inventados.</a:t>
+              <a:t>Mil estudiantes simulados, 5,000 corridas por escenario, parámetros tomados de meta-análisis publicados — no inventados.</a:t>
             </a:r>
           </a:p>
           <a:p/>
           <a:p>
             <a:r>
-              <a:t>Escenario central: la intervención ralentiza el crecimiento del IMC en 0.68 kg/m² a cinco años. Aproximadamente seis puntos porcentuales menos en prevalencia de sobrepeso.</a:t>
+              <a:t>Escenario central: la intervención ralentiza el crecimiento del IMC en 0.68 kg/m² a cinco años. Aproximadamente seis puntos porcentuales menos de prevalencia de sobrepeso.</a:t>
             </a:r>
           </a:p>
           <a:p/>
           <a:p>
             <a:r>
-              <a:t>Pero lo más importante está en el escenario nulo. Dice cero. Hay un meta-análisis del 2021 que encontró que las intervenciones escolares de largo plazo en niños no mueven el IMC. Lo incluimos. Si no lo incluyéramos, deberían sospechar de nosotros.</a:t>
+              <a:t>Pero la pieza más importante está en el cuarto escenario. Dice cero. Es el escenario nulo de largo plazo: hay un meta-análisis del 2021 que encontró que intervenciones escolares de largo plazo en niños no mueven el IMC. Lo incluimos. Si no lo incluyéramos, deberían sospechar de nosotros.</a:t>
             </a:r>
           </a:p>
           <a:p/>
           <a:p>
             <a:r>
-              <a:t>La propuesta sigue siendo defendible aunque el IMC no se mueva: el cambio en comportamiento de compra, en el entorno de las tienditas socias, en la agencia crítica del estudiante — esos son medibles en semanas, no en años.</a:t>
+              <a:t>Y aún así, la propuesta sigue siendo defendible: los cambios en comportamiento de compra, en inventario de las tienditas, en la agencia crítica del estudiante — esos son medibles en semanas, no en años.</a:t>
             </a:r>
           </a:p>
         </p:txBody>
@@ -703,12 +703,7 @@
           <a:lstStyle/>
           <a:p>
             <a:r>
-              <a:t>[Alexis presenta]:</a:t>
-            </a:r>
-          </a:p>
-          <a:p>
-            <a:r>
-              <a:t>"Para que nuestra propuesta no se quedara en autopercepción, la sometimos a cinco voces externas. El primero: el Dr. José Manuel Olais Govea, investigador del Tec de Monterrey Campus SLP."</a:t>
+              <a:t>[Alexis]: "Para someter el plan a prueba, lo presentamos a cinco voces externas. El primero: Dr. José Manuel Olais Govea, investigador del Tec Campus SLP."</a:t>
             </a:r>
           </a:p>
           <a:p>
@@ -718,7 +713,7 @@
           </a:p>
           <a:p>
             <a:r>
-              <a:t>[Después]: "Del Dr. Olais retuvimos especialmente [su punto sobre el marco teórico / la viabilidad institucional]." </a:t>
+              <a:t>[Después]: "Del Dr. Olais retuvimos [su punto clave]." </a:t>
             </a:r>
           </a:p>
         </p:txBody>
@@ -788,7 +783,7 @@
           <a:lstStyle/>
           <a:p>
             <a:r>
-              <a:t>[Alexis]: "Triangulamos con un segundo investigador del mismo campus: el Dr. Leopoldo Zúñiga Silva."</a:t>
+              <a:t>[Alexis]: "El segundo investigador, Dr. Leopoldo Zúñiga Silva, también del Tec SLP."</a:t>
             </a:r>
           </a:p>
           <a:p>
@@ -798,7 +793,7 @@
           </a:p>
           <a:p>
             <a:r>
-              <a:t>[Después]: "Su aporte más concreto: [tema que el doctor mencionó]. Eso reforzó nuestra decisión de [ajuste que hicieron]." </a:t>
+              <a:t>[Después]: "Su aporte: [tema central]. Reforzó nuestra decisión de [ajuste]." </a:t>
             </a:r>
           </a:p>
         </p:txBody>
@@ -868,7 +863,7 @@
           <a:lstStyle/>
           <a:p>
             <a:r>
-              <a:t>[Alexis]: "La validación académica no basta. Entrevistamos al director de la Secundaria Técnica 78 de Matehuala — la escuela donde, si esto se pilotea, ocurriría primero."</a:t>
+              <a:t>[Alexis]: "La validación académica no basta. Entrevistamos al director de la Sec. Téc. 78 — donde, si esto se pilotea, ocurriría primero."</a:t>
             </a:r>
           </a:p>
           <a:p>
@@ -878,7 +873,7 @@
           </a:p>
           <a:p>
             <a:r>
-              <a:t>[Después]: "Aquí vino el aprendizaje operativo más importante: [restricción que él levantó]. Por eso incluimos el fallback — si la 3ª hora de EF no cabe, se compacta." </a:t>
+              <a:t>[Después]: "Aprendizaje operativo: [restricción]. Por eso incluimos el fallback." </a:t>
             </a:r>
           </a:p>
         </p:txBody>
@@ -948,7 +943,7 @@
           <a:lstStyle/>
           <a:p>
             <a:r>
-              <a:t>[Alexis]: "Cuarto: un docente de secundaria en activo, además practicante de fitness. Queríamos a alguien que viviera el aula todos los días."</a:t>
+              <a:t>[Alexis]: "Cuarto: un docente de secundaria en activo, además practicante de fitness."</a:t>
             </a:r>
           </a:p>
           <a:p>
@@ -958,7 +953,7 @@
           </a:p>
           <a:p>
             <a:r>
-              <a:t>[Después]: "Lo que dijo y que nosotros no habíamos previsto: [punto inesperado]. Para eso sirve la validación — para encontrar lo que los datos solos no ven." </a:t>
+              <a:t>[Después]: "Lo que dijo y nosotros no habíamos visto: [punto inesperado]. Para eso sirve la validación." </a:t>
             </a:r>
           </a:p>
         </p:txBody>
@@ -1028,7 +1023,7 @@
           <a:lstStyle/>
           <a:p>
             <a:r>
-              <a:t>[Alexis]: "La perspectiva que más fácil se olvida: la voz del estudiante. Una estudiante de licenciatura en Educación con background deportivo."</a:t>
+              <a:t>[Alexis]: "La voz que más fácil se olvida: una estudiante de licenciatura en Educación con background deportivo."</a:t>
             </a:r>
           </a:p>
           <a:p>
@@ -1038,7 +1033,7 @@
           </a:p>
           <a:p>
             <a:r>
-              <a:t>[Después]: "Su frase que nos marcó: '[cita textual]'. Si los estudiantes no le ven sentido, ningún diseño curricular funciona." </a:t>
+              <a:t>[Después]: "Su frase: '[cita]'. Si los estudiantes no le ven sentido, ningún diseño funciona." </a:t>
             </a:r>
           </a:p>
         </p:txBody>
@@ -1108,42 +1103,36 @@
           <a:lstStyle/>
           <a:p>
             <a:r>
-              <a:t>[Fernanda — cierre]</a:t>
+              <a:t>[Fernanda]</a:t>
+            </a:r>
+          </a:p>
+          <a:p>
+            <a:r>
+              <a:t>Esta es una historia donde empezamos mal — con un modelo simple que no servía — y donde, en lugar de esconderlo, lo usamos como punto de partida.</a:t>
             </a:r>
           </a:p>
           <a:p/>
           <a:p>
             <a:r>
-              <a:t>Lo que les contamos es una historia de tres semanas y de tres personas. Una historia donde los datos nos hicieron cambiar de pregunta, donde 98 personas reales nos dieron la respuesta antes de que supiéramos formular el problema bien, y donde cinco expertos nos ayudaron a no engañarnos a nosotros mismos.</a:t>
+              <a:t>Trajimos seis datasets oficiales y subimos el R² de 0.064 a 0.634. Construimos un Random Forest que identificó la actividad física como el predictor número uno. Salimos a hablar con cien personas reales y entendimos que la barrera es el tiempo, no la voluntad. Diseñamos un plan centrado en personas. Lo probamos con Monte Carlo. Lo sometimos a cinco expertos.</a:t>
             </a:r>
           </a:p>
           <a:p/>
           <a:p>
             <a:r>
-              <a:t>Tenemos un R² de 0.634 en la regresión controlada. Un predictor de actividad física con correlación de −0.91. Una encuesta con 80 de 98 personas dispuestas a cambiar si tuvieran las herramientas.</a:t>
+              <a:t>Lo que proponemos no es revolucionario. Es modesto, barato, alineado al NEM, y honesto sobre lo que no sabemos.</a:t>
             </a:r>
           </a:p>
           <a:p/>
           <a:p>
             <a:r>
-              <a:t>Lo que proponemos no es revolucionario. Es modesto, barato, alineado al NEM, y honesto sobre lo que no sabemos.</a:t>
+              <a:t>Pero si funciona aunque sea a medias, le da a México algo que hoy le falta: una manera concreta, presupuestable, evaluable, de meter la salud infantil en el único lugar donde podemos alcanzarla a tiempo — el salón de clases.</a:t>
             </a:r>
           </a:p>
           <a:p/>
           <a:p>
             <a:r>
-              <a:t>Pero si funciona aunque sea a medias, le da a México algo que hoy le falta: una manera concreta, presupuestable, evaluable, de meter la salud infantil en el único lugar donde podemos alcanzarla a tiempo — el salón de clases.</a:t>
-            </a:r>
-          </a:p>
-          <a:p/>
-          <a:p>
-            <a:r>
               <a:t>Gracias.</a:t>
-            </a:r>
-          </a:p>
-          <a:p>
-            <a:r>
-              <a:t>[Q&amp;A]</a:t>
             </a:r>
           </a:p>
         </p:txBody>
@@ -1213,29 +1202,19 @@
           <a:lstStyle/>
           <a:p>
             <a:r>
-              <a:t>[Antes del video]:</a:t>
-            </a:r>
-          </a:p>
-          <a:p>
-            <a:r>
-              <a:t>"Cuando hablamos de obesidad infantil en México, normalmente hablamos de cifras. Hoy queremos empezar diferente. Esta es Doña [Nombre], dueña de una tiendita aquí en San Luis Potosí. Le pedimos que nos contara qué ve todos los días detrás del mostrador."</a:t>
+              <a:t>[Antes]: "Cuando hablamos de obesidad infantil, normalmente hablamos de cifras. Hoy queremos empezar diferente. Esta es Doña [Nombre], dueña de una tiendita en San Luis Potosí. Le pedimos que nos contara qué ve detrás del mostrador todos los días."</a:t>
             </a:r>
           </a:p>
           <a:p/>
           <a:p>
             <a:r>
-              <a:t>[REPRODUCIR VIDEO — 45–60 segundos]</a:t>
+              <a:t>[REPRODUCIR VIDEO — 45–60 seg]</a:t>
             </a:r>
           </a:p>
           <a:p/>
           <a:p>
             <a:r>
-              <a:t>[Después]:</a:t>
-            </a:r>
-          </a:p>
-          <a:p>
-            <a:r>
-              <a:t>"Doña [Nombre] no es el problema. Es testigo del problema. Lo que ella ve todos los días — niños comprando papas y refresco con el dinero que les dan sus papás — es la punta de una crisis que los datos confirman." </a:t>
+              <a:t>[Después]: "Doña [Nombre] no es el problema. Es testigo del problema. Y los datos confirman lo que ella ve." </a:t>
             </a:r>
           </a:p>
         </p:txBody>
@@ -1310,25 +1289,19 @@
           </a:p>
           <a:p>
             <a:r>
-              <a:t>México tiene una de las crisis de obesidad infantil más severas del mundo. No es opinión.</a:t>
+              <a:t>México tiene una de las crisis de obesidad infantil más severas del mundo. No es opinión: tres de cada diez niños de cinco a once años viven con sobrepeso u obesidad. Cuatro de cada diez adolescentes.</a:t>
             </a:r>
           </a:p>
           <a:p/>
           <a:p>
             <a:r>
-              <a:t>Tres de cada diez niños de cinco a once años viven con sobrepeso u obesidad. Cuatro de cada diez adolescentes. Y la tendencia empeora: solo entre 2006 y 2022 la obesidad en varones escolares subió casi seis puntos.</a:t>
+              <a:t>Y la tendencia empeora. Mientras tanto, 1.1 millones de tienditas son el primer punto de acceso a comida en comunidades vulnerables, y la escuela, que antes tenía hasta cinco horas semanales de educación física, hoy tiene dos.</a:t>
             </a:r>
           </a:p>
           <a:p/>
           <a:p>
             <a:r>
-              <a:t>Mientras tanto, 1.1 millones de tienditas son el primer punto de acceso a comida en comunidades vulnerables. Y la escuela, que antes tenía hasta cinco horas semanales de educación física, hoy tiene dos.</a:t>
-            </a:r>
-          </a:p>
-          <a:p/>
-          <a:p>
-            <a:r>
-              <a:t>El sistema lo sabe. La SEP incluyó Vida Saludable en la Nueva Escuela Mexicana. Pero un eje articulador sin horas, sin capacitación y sin evaluación estandarizada es una buena intención sin músculo operativo. Ahí entró nuestro proyecto.</a:t>
+              <a:t>El sistema ya nombró el problema — *Vida Saludable* en la Nueva Escuela Mexicana. Pero un eje articulador sin horas ni capacitación es una buena intención sin músculo. Ahí entró nuestro proyecto.</a:t>
             </a:r>
           </a:p>
         </p:txBody>
@@ -1403,19 +1376,31 @@
           </a:p>
           <a:p>
             <a:r>
-              <a:t>Cinco fases. Cada una existe porque la siguiente la necesita.</a:t>
+              <a:t>Aquí empezó el proyecto, y aquí casi fracasa.</a:t>
             </a:r>
           </a:p>
           <a:p/>
           <a:p>
             <a:r>
-              <a:t>Fases 1 y 2 responden con datos estatales: ¿hay una relación cuantificable entre tienditas y obesidad? Fase 3 sale a campo: ¿qué dice la gente real? Fase 4 diseña la respuesta. Fase 5 la proyecta.</a:t>
+              <a:t>Hipótesis inicial: si las tienditas son el primer punto de acceso a comida ultraprocesada, debe haber una correlación visible entre su densidad y la obesidad infantil. Probamos con la regresión más simple posible: una variable, 32 estados.</a:t>
             </a:r>
           </a:p>
           <a:p/>
           <a:p>
             <a:r>
-              <a:t>Un principio transversal: reportamos absolutamente todos los resultados, incluyendo los que no nos favorecen. Si un coeficiente pierde significancia al controlar, lo decimos. Si el Random Forest tiene baja capacidad predictiva fuera de muestra, lo decimos. Así se distingue una propuesta seria de un argumento de venta.</a:t>
+              <a:t>Los números fueron malos. R² de 0.064 — el modelo explicaba el 6% de la varianza. El coeficiente era negativo, lo opuesto a lo que esperábamos, y ni siquiera era significativo: p de 0.16.</a:t>
+            </a:r>
+          </a:p>
+          <a:p/>
+          <a:p>
+            <a:r>
+              <a:t>En una propuesta seria, ese resultado pide tres reacciones. Primero, honestidad: el modelo es básico y no sirve solo. Segundo, expansión: traer más variables, controlar por factores estructurales. Tercero, complementariedad: si los datos estatales no muestran causas — solo geografía — hay que ir a hablar con las personas.</a:t>
+            </a:r>
+          </a:p>
+          <a:p/>
+          <a:p>
+            <a:r>
+              <a:t>Y eso es lo que hicimos a continuación.</a:t>
             </a:r>
           </a:p>
         </p:txBody>
@@ -1490,31 +1475,37 @@
           </a:p>
           <a:p>
             <a:r>
-              <a:t>Este slide tiene el hallazgo más contraintuitivo del proyecto.</a:t>
+              <a:t>Si el modelo simple falla, no se abandona el proyecto — se expande.</a:t>
             </a:r>
           </a:p>
           <a:p/>
           <a:p>
             <a:r>
-              <a:t>Sin controlar nada, la densidad de tienditas parece proteger contra la obesidad: β negativo. Pero eso es engañoso.</a:t>
+              <a:t>Trajimos seis datasets oficiales: INEGI DENUE para tienditas, ENSANUT Continua para obesidad y comportamiento, ENIGH para gasto en alimentos, CONAPO para marginación, Anuarios de Morbilidad para diabetes en menores.</a:t>
             </a:r>
           </a:p>
           <a:p/>
           <a:p>
             <a:r>
-              <a:t>Los estados con más tienditas por habitante son Guerrero, Oaxaca, Chiapas — estados muy marginados y rurales que también tienen la menor obesidad del país. ¿Por qué? Porque la pobreza extrema, paradójicamente, implica menor acceso a comida ultraprocesada, no más.</a:t>
+              <a:t>Ocurrieron dos cosas, ambas valiosas.</a:t>
             </a:r>
           </a:p>
           <a:p/>
           <a:p>
             <a:r>
-              <a:t>Una vez que controló por esa marginación y por el nivel de urbanización, el efecto real de la densidad de tienditas se revela: es positivo y estadísticamente significativo. El modelo explica el 63% de la varianza estatal en obesidad adolescente.</a:t>
+              <a:t>Primero: la regresión controlada. Al añadir marginación y urbanización, el R² subió de 0.064 a 0.634 — diez veces más varianza explicada. Y el coeficiente de densidad de tienditas SE INVIRTIÓ: pasó de negativo a positivo, ahora con p&lt;0.001. ¿Por qué? Porque los estados con más tienditas son los más pobres y rurales — Guerrero, Oaxaca, Chiapas — que paradójicamente tienen menor obesidad. La pobreza enmascaraba el efecto. Una vez que controlamos por eso, las tienditas sí correlacionan con obesidad.</a:t>
             </a:r>
           </a:p>
           <a:p/>
           <a:p>
             <a:r>
-              <a:t>Esto nos dice que el análisis simple es peligroso. Necesitas controlar. Y la regresión controlada sí apoya nuestra hipótesis.</a:t>
+              <a:t>Segundo: el Random Forest sobre las 8 variables. Y aquí está el hallazgo más útil: el predictor más importante no son las tienditas. Es el cumplimiento de actividad física, con una correlación de menos 0.91 con la obesidad adolescente. Las tienditas quedaron últimas con importancia de 0.004.</a:t>
+            </a:r>
+          </a:p>
+          <a:p/>
+          <a:p>
+            <a:r>
+              <a:t>Eso reorientó toda la propuesta. No se trata de regular comercios. Se trata de mover la variable más modificable: la actividad física en los adolescentes.</a:t>
             </a:r>
           </a:p>
         </p:txBody>
@@ -1584,36 +1575,36 @@
           <a:lstStyle/>
           <a:p>
             <a:r>
-              <a:t>[Carlos]</a:t>
-            </a:r>
-          </a:p>
-          <a:p>
-            <a:r>
-              <a:t>Para la Fase 2 ampliamos el modelo con las 8 variables disponibles: además de densidad de tienditas y marginación, añadimos actividad física, frutas y verduras, bebidas azucaradas, gasto en procesados, y diabetes tipo 2 en menores.</a:t>
+              <a:t>[Alexis]</a:t>
+            </a:r>
+          </a:p>
+          <a:p>
+            <a:r>
+              <a:t>Cuando los modelos cuantitativos terminaron de hablar, nos dimos cuenta de algo importante: nos habían dado el QUÉ y el CUÁNTO, pero no el POR QUÉ.</a:t>
             </a:r>
           </a:p>
           <a:p/>
           <a:p>
             <a:r>
-              <a:t>Entrenamos un Random Forest con 500 árboles. El modelo tiene un R² de 0.929 en la muestra completa — pero con solo 32 estados no podemos hablar de generalización fuera de muestra de forma confiable. Lo reportamos honestamente.</a:t>
+              <a:t>Sabíamos que la actividad física es el predictor más fuerte. Sabíamos que los estados más urbanos tienen más obesidad. Sabíamos que las tienditas, controlando otras variables, sí correlacionan.</a:t>
             </a:r>
           </a:p>
           <a:p/>
           <a:p>
             <a:r>
-              <a:t>Lo que sí es sólido es la importancia relativa de las variables por permutación: la actividad física es el predictor dominante, con una correlación de −0.91 con la obesidad adolescente. Le siguen bebidas azucaradas (+0.89) y frutas y verduras (−0.91).</a:t>
+              <a:t>Pero no sabíamos qué decide una madre o un padre cuando llega a casa a las 8 de la noche y tiene que dar de cenar. No sabíamos qué compran los hijos cuando reciben dinero. No sabíamos si la barrera principal es el tiempo, el dinero, la educación o la voluntad.</a:t>
             </a:r>
           </a:p>
           <a:p/>
           <a:p>
             <a:r>
-              <a:t>Y la densidad de tienditas queda en último lugar con importancia 0.004. Esto no quiere decir que las tienditas no importen — la regresión controlada mostró que sí correlacionan. Quiere decir que el problema más modificable con intervención escolar es la actividad física y la alimentación, no la regulación de comercios.</a:t>
+              <a:t>Por eso diseñamos nuestra propia encuesta. Aplicada en San Luis Potosí, con población real, no agregados estatales. Estructurada en dos pistas — padres y no padres — para no perder ningún ángulo.</a:t>
             </a:r>
           </a:p>
           <a:p/>
           <a:p>
             <a:r>
-              <a:t>Ese es el fundamento cuantitativo de nuestra intervención.</a:t>
+              <a:t>Esto no es complementario al análisis. Es el corazón del análisis.</a:t>
             </a:r>
           </a:p>
         </p:txBody>
@@ -1688,37 +1679,37 @@
           </a:p>
           <a:p>
             <a:r>
-              <a:t>Los modelos estadísticos nos dieron correlaciones. Las personas reales nos dieron causas.</a:t>
+              <a:t>Cien personas. San Luis Potosí. Diciembre y enero.</a:t>
             </a:r>
           </a:p>
           <a:p/>
           <a:p>
             <a:r>
-              <a:t>Diseñamos un cuestionario en dos pistas — padres y no padres — y lo aplicamos a 98 personas en San Luis Potosí entre diciembre y enero.</a:t>
+              <a:t>La barra más alta de la izquierda no necesita explicación: 38 personas, la respuesta más frecuente con amplio margen, dicen que no cocinan porque no tienen tiempo por el trabajo. Más que las que dicen que no les gusta cocinar.</a:t>
             </a:r>
           </a:p>
           <a:p/>
           <a:p>
             <a:r>
-              <a:t>La barra más alta de la izquierda no necesita explicación: 38 personas, la mayoría de las respuestas, dicen que no cocinan porque no tienen tiempo por el trabajo. Más que las que dicen que no les gusta cocinar.</a:t>
+              <a:t>Ese dato es estructural. La gente no es ignorante, no es perezosa, no le falta motivación. Le falta tiempo. Físicamente.</a:t>
             </a:r>
           </a:p>
           <a:p/>
           <a:p>
             <a:r>
-              <a:t>Ese dato es estructural. No se resuelve con información. No se resuelve con motivación. La gente quiere cocinar y no puede.</a:t>
+              <a:t>Ahora la derecha: cuando preguntamos qué soluciones quieren, las dos respuestas más pedidas fueron acceso a alimentos saludables y educación nutricional. La gente nos estaba diciendo, sin que se lo preguntáramos directamente, qué intervención están dispuestos a recibir.</a:t>
             </a:r>
           </a:p>
           <a:p/>
           <a:p>
             <a:r>
-              <a:t>Ahora miren la derecha: cuando preguntamos qué soluciones quieren, la educación nutricional queda en el top 3. La propia población está nombrando el tipo de intervención que nosotros proponemos.</a:t>
+              <a:t>Y los números de abajo: 79% de los padres están preocupados por la alimentación de sus hijos. 80 de 98 personas dicen que cambiarían sus hábitos con más tiempo o recursos. 27 piden explícitamente programas de educación nutricional.</a:t>
             </a:r>
           </a:p>
           <a:p/>
           <a:p>
             <a:r>
-              <a:t>Y abajo: 79% de los padres están preocupados. 80 de 98 personas dicen que cambiarían sus hábitos si tuvieran más tiempo o recursos. La motivación no es el problema. La estructura sí.</a:t>
+              <a:t>La motivación no es el problema. La estructura sí. Y la población misma nombra la solución.</a:t>
             </a:r>
           </a:p>
         </p:txBody>
@@ -1806,13 +1797,13 @@
           <a:p/>
           <a:p>
             <a:r>
-              <a:t>Y los datos cuantitativos lo confirman: el predictor más fuerte de obesidad adolescente a nivel estatal no es la densidad de tienditas — es el cumplimiento de actividad física, con una correlación de −0.91.</a:t>
+              <a:t>Los modelos cuantitativos lo confirman: el predictor más fuerte de obesidad adolescente es la actividad física, con correlación de −0.91. La encuesta lo confirma desde el otro lado: la gente pide educación nutricional explícitamente.</a:t>
             </a:r>
           </a:p>
           <a:p/>
           <a:p>
             <a:r>
-              <a:t>Eso nos llevó de la regulación a la educación. Y específicamente: a la única institución que ya tiene a los adolescentes 30 horas a la semana, con presupuesto asignado y maestros en plaza. La escuela secundaria.</a:t>
+              <a:t>Cuantitativo y cualitativo apuntan al mismo lugar. El plan ya estaba en los datos. Solo había que construirlo.</a:t>
             </a:r>
           </a:p>
         </p:txBody>
@@ -1887,43 +1878,43 @@
           </a:p>
           <a:p>
             <a:r>
-              <a:t>Cinco componentes. Ninguno inventa desde cero — todos refuerzan lo que el NEM 2022 ya nombra.</a:t>
+              <a:t>Aquí está el plan. Lo importante es que cada componente está anclado en un hallazgo concreto, no en una opinión.</a:t>
             </a:r>
           </a:p>
           <a:p/>
           <a:p>
             <a:r>
-              <a:t>A: La tercera hora de EF no es deporte. Es alfabetización aplicada: leer una etiqueta de un producto real de la tiendita, diseñar un snack con 20 pesos, mapear el entorno alimentario alrededor de la escuela.</a:t>
+              <a:t>A: La tercera hora de EF no es deporte adicional. Es alfabetización aplicada. Leer una etiqueta de un producto real de la tiendita, diseñar un snack saludable con 20 pesos, mapear el entorno alimentario. Responde directamente al predictor número uno del Random Forest: la actividad física.</a:t>
             </a:r>
           </a:p>
           <a:p/>
           <a:p>
             <a:r>
-              <a:t>B: Nuestro aporte original. Cada dos semanas los estudiantes auditan las tienditas vecinas. Cuentan productos, clasifican, registran precios. Eso produce un dataset geolocal que México hoy no tiene.</a:t>
+              <a:t>B: Auditorías bisemanales de tienditas. Es ciencia ciudadana, y produce un dataset geolocal que México hoy no tiene. Responde a las tienditas como nodo obesogénico identificado por la regresión controlada.</a:t>
             </a:r>
           </a:p>
           <a:p/>
           <a:p>
             <a:r>
-              <a:t>C: La compra en la tiendita es una decisión en 3 segundos, System 1. La clase del martes no llega a ese momento. Por eso trabajamos con tienditas voluntarias para mover el agua al frente y poner señalización diseñada por los propios alumnos.</a:t>
+              <a:t>C: La capa estructural. Nudges en el punto de venta con tienderos voluntarios. Responde directamente a lo que la encuesta dijo: la decisión de compra se toma en segundos, no en la clase del martes.</a:t>
             </a:r>
           </a:p>
           <a:p/>
           <a:p>
             <a:r>
-              <a:t>D: Capacitación docente centrada en pedagogía de autonomía. Si el maestro vuelve a dar cátedra, el mecanismo se rompe. La fidelidad se mide, no se asume.</a:t>
+              <a:t>D: La capacitación docente. Asegura que los maestros enseñen con pedagogía de autonomía, no dando cátedra. La fidelidad se mide.</a:t>
             </a:r>
           </a:p>
           <a:p/>
           <a:p>
             <a:r>
-              <a:t>E: Invitación mensual para casa — nunca tarea. Respeta el hallazgo más importante de la encuesta: las familias no tienen tiempo.</a:t>
+              <a:t>E: El puente familiar. Una invitación mensual — nunca tarea. Respeta el hallazgo más importante de la encuesta: la barrera número uno es el tiempo.</a:t>
             </a:r>
           </a:p>
           <a:p/>
           <a:p>
             <a:r>
-              <a:t>Doce mil pesos por escuela al año. Escalado: 420 millones. Menos del 0.1% del presupuesto de la SEP.</a:t>
+              <a:t>Doce mil pesos por escuela al año. Escalado a 35 mil secundarias: 420 millones. Menos del 0.1% del presupuesto federal de educación. Sin necesidad de reforma legislativa.</a:t>
             </a:r>
           </a:p>
         </p:txBody>
@@ -5094,7 +5085,7 @@
         <p:spPr>
           <a:xfrm>
             <a:off x="731520" y="4114800"/>
-            <a:ext cx="9144000" cy="457200"/>
+            <a:ext cx="10058400" cy="457200"/>
           </a:xfrm>
           <a:prstGeom prst="rect">
             <a:avLst/>
@@ -5109,13 +5100,13 @@
           <a:p>
             <a:pPr algn="l"/>
             <a:r>
-              <a:rPr sz="1600" b="0" i="0">
+              <a:rPr sz="1400" b="0" i="0">
                 <a:solidFill>
                   <a:srgbClr val="7A7368"/>
                 </a:solidFill>
                 <a:latin typeface="Calibri"/>
               </a:rPr>
-              <a:t>Una historia de datos reales, 98 voces, y una propuesta para la salud infantil en México.</a:t>
+              <a:t>Una historia de un modelo malo, datasets que lo salvaron, 100 voces que lo enfocaron — y un plan para la salud infantil.</a:t>
             </a:r>
           </a:p>
         </p:txBody>
@@ -5368,7 +5359,7 @@
                 </a:solidFill>
                 <a:latin typeface="Calibri"/>
               </a:rPr>
-              <a:t>5 Fases · Regresión · RF · Monte Carlo</a:t>
+              <a:t>Regresión → RF → Encuesta → MC</a:t>
             </a:r>
           </a:p>
         </p:txBody>
@@ -5542,7 +5533,7 @@
                 </a:solidFill>
                 <a:latin typeface="Consolas"/>
               </a:rPr>
-              <a:t>DASHBOARD 07  ·  FASE 5 — MONTE CARLO  ·  5,000 CORRIDAS  ·  5 ESCENARIOS</a:t>
+              <a:t>DASHBOARD  ·  MONTE CARLO  ·  PROBAMOS EL PLAN ANTES DE PROPONERLO</a:t>
             </a:r>
           </a:p>
         </p:txBody>
@@ -5555,7 +5546,7 @@
         </p:nvSpPr>
         <p:spPr>
           <a:xfrm>
-            <a:off x="548640" y="658368"/>
+            <a:off x="548640" y="640080"/>
             <a:ext cx="10972800" cy="411480"/>
           </a:xfrm>
           <a:prstGeom prst="rect">
@@ -5571,13 +5562,13 @@
           <a:p>
             <a:pPr algn="l"/>
             <a:r>
-              <a:rPr sz="2600" b="1" i="0">
+              <a:rPr sz="2400" b="1" i="0">
                 <a:solidFill>
                   <a:srgbClr val="1A1612"/>
                 </a:solidFill>
                 <a:latin typeface="Calibri"/>
               </a:rPr>
-              <a:t>5,000 corridas. Honestidad sobre la incertidumbre.</a:t>
+              <a:t>5,000 corridas. 5 escenarios. Incertidumbre honesta.</a:t>
             </a:r>
           </a:p>
         </p:txBody>
@@ -5590,8 +5581,8 @@
         </p:nvSpPr>
         <p:spPr>
           <a:xfrm>
-            <a:off x="457200" y="1417320"/>
-            <a:ext cx="2194560" cy="347472"/>
+            <a:off x="457200" y="1280160"/>
+            <a:ext cx="2194560" cy="365760"/>
           </a:xfrm>
           <a:prstGeom prst="rect">
             <a:avLst/>
@@ -5633,7 +5624,7 @@
         </p:nvSpPr>
         <p:spPr>
           <a:xfrm>
-            <a:off x="457200" y="1463040"/>
+            <a:off x="457200" y="1325880"/>
             <a:ext cx="2194560" cy="310896"/>
           </a:xfrm>
           <a:prstGeom prst="rect">
@@ -5668,8 +5659,8 @@
         </p:nvSpPr>
         <p:spPr>
           <a:xfrm>
-            <a:off x="457200" y="1810512"/>
-            <a:ext cx="2194560" cy="1371600"/>
+            <a:off x="457200" y="1691640"/>
+            <a:ext cx="2194560" cy="1554480"/>
           </a:xfrm>
           <a:prstGeom prst="rect">
             <a:avLst/>
@@ -5711,8 +5702,8 @@
         </p:nvSpPr>
         <p:spPr>
           <a:xfrm>
-            <a:off x="548640" y="1920240"/>
-            <a:ext cx="2011680" cy="822960"/>
+            <a:off x="548640" y="1810512"/>
+            <a:ext cx="2011680" cy="960120"/>
           </a:xfrm>
           <a:prstGeom prst="rect">
             <a:avLst/>
@@ -5746,8 +5737,8 @@
         </p:nvSpPr>
         <p:spPr>
           <a:xfrm>
-            <a:off x="548640" y="2788920"/>
-            <a:ext cx="2011680" cy="320040"/>
+            <a:off x="548640" y="2852928"/>
+            <a:ext cx="2011680" cy="365760"/>
           </a:xfrm>
           <a:prstGeom prst="rect">
             <a:avLst/>
@@ -5782,8 +5773,8 @@
         </p:nvSpPr>
         <p:spPr>
           <a:xfrm>
-            <a:off x="2788920" y="1417320"/>
-            <a:ext cx="2194560" cy="347472"/>
+            <a:off x="2788920" y="1280160"/>
+            <a:ext cx="2194560" cy="365760"/>
           </a:xfrm>
           <a:prstGeom prst="rect">
             <a:avLst/>
@@ -5825,7 +5816,7 @@
         </p:nvSpPr>
         <p:spPr>
           <a:xfrm>
-            <a:off x="2788920" y="1463040"/>
+            <a:off x="2788920" y="1325880"/>
             <a:ext cx="2194560" cy="310896"/>
           </a:xfrm>
           <a:prstGeom prst="rect">
@@ -5860,8 +5851,8 @@
         </p:nvSpPr>
         <p:spPr>
           <a:xfrm>
-            <a:off x="2788920" y="1810512"/>
-            <a:ext cx="2194560" cy="1371600"/>
+            <a:off x="2788920" y="1691640"/>
+            <a:ext cx="2194560" cy="1554480"/>
           </a:xfrm>
           <a:prstGeom prst="rect">
             <a:avLst/>
@@ -5903,8 +5894,8 @@
         </p:nvSpPr>
         <p:spPr>
           <a:xfrm>
-            <a:off x="2880360" y="1920240"/>
-            <a:ext cx="2011680" cy="822960"/>
+            <a:off x="2880360" y="1810512"/>
+            <a:ext cx="2011680" cy="960120"/>
           </a:xfrm>
           <a:prstGeom prst="rect">
             <a:avLst/>
@@ -5938,8 +5929,8 @@
         </p:nvSpPr>
         <p:spPr>
           <a:xfrm>
-            <a:off x="2880360" y="2788920"/>
-            <a:ext cx="2011680" cy="320040"/>
+            <a:off x="2880360" y="2852928"/>
+            <a:ext cx="2011680" cy="365760"/>
           </a:xfrm>
           <a:prstGeom prst="rect">
             <a:avLst/>
@@ -5974,8 +5965,8 @@
         </p:nvSpPr>
         <p:spPr>
           <a:xfrm>
-            <a:off x="5120640" y="1417320"/>
-            <a:ext cx="2194560" cy="347472"/>
+            <a:off x="5120640" y="1280160"/>
+            <a:ext cx="2194560" cy="365760"/>
           </a:xfrm>
           <a:prstGeom prst="rect">
             <a:avLst/>
@@ -6017,7 +6008,7 @@
         </p:nvSpPr>
         <p:spPr>
           <a:xfrm>
-            <a:off x="5120640" y="1463040"/>
+            <a:off x="5120640" y="1325880"/>
             <a:ext cx="2194560" cy="310896"/>
           </a:xfrm>
           <a:prstGeom prst="rect">
@@ -6052,8 +6043,8 @@
         </p:nvSpPr>
         <p:spPr>
           <a:xfrm>
-            <a:off x="5120640" y="1810512"/>
-            <a:ext cx="2194560" cy="1371600"/>
+            <a:off x="5120640" y="1691640"/>
+            <a:ext cx="2194560" cy="1554480"/>
           </a:xfrm>
           <a:prstGeom prst="rect">
             <a:avLst/>
@@ -6095,8 +6086,8 @@
         </p:nvSpPr>
         <p:spPr>
           <a:xfrm>
-            <a:off x="5212079" y="1920240"/>
-            <a:ext cx="2011680" cy="822960"/>
+            <a:off x="5212079" y="1810512"/>
+            <a:ext cx="2011680" cy="960120"/>
           </a:xfrm>
           <a:prstGeom prst="rect">
             <a:avLst/>
@@ -6130,8 +6121,8 @@
         </p:nvSpPr>
         <p:spPr>
           <a:xfrm>
-            <a:off x="5212079" y="2788920"/>
-            <a:ext cx="2011680" cy="320040"/>
+            <a:off x="5212079" y="2852928"/>
+            <a:ext cx="2011680" cy="365760"/>
           </a:xfrm>
           <a:prstGeom prst="rect">
             <a:avLst/>
@@ -6166,8 +6157,8 @@
         </p:nvSpPr>
         <p:spPr>
           <a:xfrm>
-            <a:off x="7452359" y="1417320"/>
-            <a:ext cx="2194560" cy="347472"/>
+            <a:off x="7452359" y="1280160"/>
+            <a:ext cx="2194560" cy="365760"/>
           </a:xfrm>
           <a:prstGeom prst="rect">
             <a:avLst/>
@@ -6209,7 +6200,7 @@
         </p:nvSpPr>
         <p:spPr>
           <a:xfrm>
-            <a:off x="7452359" y="1463040"/>
+            <a:off x="7452359" y="1325880"/>
             <a:ext cx="2194560" cy="310896"/>
           </a:xfrm>
           <a:prstGeom prst="rect">
@@ -6244,8 +6235,8 @@
         </p:nvSpPr>
         <p:spPr>
           <a:xfrm>
-            <a:off x="7452359" y="1810512"/>
-            <a:ext cx="2194560" cy="1371600"/>
+            <a:off x="7452359" y="1691640"/>
+            <a:ext cx="2194560" cy="1554480"/>
           </a:xfrm>
           <a:prstGeom prst="rect">
             <a:avLst/>
@@ -6287,8 +6278,8 @@
         </p:nvSpPr>
         <p:spPr>
           <a:xfrm>
-            <a:off x="7543799" y="1920240"/>
-            <a:ext cx="2011680" cy="822960"/>
+            <a:off x="7543799" y="1810512"/>
+            <a:ext cx="2011680" cy="960120"/>
           </a:xfrm>
           <a:prstGeom prst="rect">
             <a:avLst/>
@@ -6322,8 +6313,8 @@
         </p:nvSpPr>
         <p:spPr>
           <a:xfrm>
-            <a:off x="7543799" y="2788920"/>
-            <a:ext cx="2011680" cy="320040"/>
+            <a:off x="7543799" y="2852928"/>
+            <a:ext cx="2011680" cy="365760"/>
           </a:xfrm>
           <a:prstGeom prst="rect">
             <a:avLst/>
@@ -6358,8 +6349,8 @@
         </p:nvSpPr>
         <p:spPr>
           <a:xfrm>
-            <a:off x="9784080" y="1417320"/>
-            <a:ext cx="2194560" cy="347472"/>
+            <a:off x="9784080" y="1280160"/>
+            <a:ext cx="2194560" cy="365760"/>
           </a:xfrm>
           <a:prstGeom prst="rect">
             <a:avLst/>
@@ -6401,7 +6392,7 @@
         </p:nvSpPr>
         <p:spPr>
           <a:xfrm>
-            <a:off x="9784080" y="1463040"/>
+            <a:off x="9784080" y="1325880"/>
             <a:ext cx="2194560" cy="310896"/>
           </a:xfrm>
           <a:prstGeom prst="rect">
@@ -6436,8 +6427,8 @@
         </p:nvSpPr>
         <p:spPr>
           <a:xfrm>
-            <a:off x="9784080" y="1810512"/>
-            <a:ext cx="2194560" cy="1371600"/>
+            <a:off x="9784080" y="1691640"/>
+            <a:ext cx="2194560" cy="1554480"/>
           </a:xfrm>
           <a:prstGeom prst="rect">
             <a:avLst/>
@@ -6479,8 +6470,8 @@
         </p:nvSpPr>
         <p:spPr>
           <a:xfrm>
-            <a:off x="9875519" y="1920240"/>
-            <a:ext cx="2011680" cy="822960"/>
+            <a:off x="9875519" y="1810512"/>
+            <a:ext cx="2011680" cy="960120"/>
           </a:xfrm>
           <a:prstGeom prst="rect">
             <a:avLst/>
@@ -6514,8 +6505,8 @@
         </p:nvSpPr>
         <p:spPr>
           <a:xfrm>
-            <a:off x="9875519" y="2788920"/>
-            <a:ext cx="2011680" cy="320040"/>
+            <a:off x="9875519" y="2852928"/>
+            <a:ext cx="2011680" cy="365760"/>
           </a:xfrm>
           <a:prstGeom prst="rect">
             <a:avLst/>
@@ -6550,7 +6541,7 @@
         </p:nvSpPr>
         <p:spPr>
           <a:xfrm>
-            <a:off x="548640" y="3337560"/>
+            <a:off x="548640" y="3474720"/>
             <a:ext cx="10972800" cy="256032"/>
           </a:xfrm>
           <a:prstGeom prst="rect">
@@ -6572,7 +6563,7 @@
                 </a:solidFill>
                 <a:latin typeface="Consolas"/>
               </a:rPr>
-              <a:t>PARÁMETROS DE EFECTO — DE META-ANÁLISIS PUBLICADOS</a:t>
+              <a:t>PARÁMETROS DE EFECTO — META-ANÁLISIS PUBLICADOS</a:t>
             </a:r>
           </a:p>
         </p:txBody>
@@ -6585,7 +6576,7 @@
         </p:nvSpPr>
         <p:spPr>
           <a:xfrm>
-            <a:off x="457200" y="3639312"/>
+            <a:off x="457200" y="3749039"/>
             <a:ext cx="4343400" cy="292608"/>
           </a:xfrm>
           <a:prstGeom prst="rect">
@@ -6628,7 +6619,7 @@
         </p:nvSpPr>
         <p:spPr>
           <a:xfrm>
-            <a:off x="548640" y="3675887"/>
+            <a:off x="548640" y="3785615"/>
             <a:ext cx="4251959" cy="237744"/>
           </a:xfrm>
           <a:prstGeom prst="rect">
@@ -6663,7 +6654,7 @@
         </p:nvSpPr>
         <p:spPr>
           <a:xfrm>
-            <a:off x="5029200" y="3639312"/>
+            <a:off x="5029200" y="3749039"/>
             <a:ext cx="1874520" cy="292608"/>
           </a:xfrm>
           <a:prstGeom prst="rect">
@@ -6706,7 +6697,7 @@
         </p:nvSpPr>
         <p:spPr>
           <a:xfrm>
-            <a:off x="5120640" y="3675887"/>
+            <a:off x="5120640" y="3785615"/>
             <a:ext cx="1783080" cy="237744"/>
           </a:xfrm>
           <a:prstGeom prst="rect">
@@ -6741,7 +6732,7 @@
         </p:nvSpPr>
         <p:spPr>
           <a:xfrm>
-            <a:off x="7132320" y="3639312"/>
+            <a:off x="7132320" y="3749039"/>
             <a:ext cx="1965960" cy="292608"/>
           </a:xfrm>
           <a:prstGeom prst="rect">
@@ -6784,7 +6775,7 @@
         </p:nvSpPr>
         <p:spPr>
           <a:xfrm>
-            <a:off x="7223759" y="3675887"/>
+            <a:off x="7223759" y="3785615"/>
             <a:ext cx="1874520" cy="237744"/>
           </a:xfrm>
           <a:prstGeom prst="rect">
@@ -6819,7 +6810,7 @@
         </p:nvSpPr>
         <p:spPr>
           <a:xfrm>
-            <a:off x="9326880" y="3639312"/>
+            <a:off x="9326880" y="3749039"/>
             <a:ext cx="2606040" cy="292608"/>
           </a:xfrm>
           <a:prstGeom prst="rect">
@@ -6862,7 +6853,7 @@
         </p:nvSpPr>
         <p:spPr>
           <a:xfrm>
-            <a:off x="9418319" y="3675887"/>
+            <a:off x="9418319" y="3785615"/>
             <a:ext cx="2514600" cy="237744"/>
           </a:xfrm>
           <a:prstGeom prst="rect">
@@ -6897,8 +6888,8 @@
         </p:nvSpPr>
         <p:spPr>
           <a:xfrm>
-            <a:off x="457200" y="3977639"/>
-            <a:ext cx="4343400" cy="329184"/>
+            <a:off x="457200" y="4069080"/>
+            <a:ext cx="4343400" cy="310896"/>
           </a:xfrm>
           <a:prstGeom prst="rect">
             <a:avLst/>
@@ -6940,7 +6931,7 @@
         </p:nvSpPr>
         <p:spPr>
           <a:xfrm>
-            <a:off x="548640" y="4023359"/>
+            <a:off x="548640" y="4105656"/>
             <a:ext cx="4251959" cy="256032"/>
           </a:xfrm>
           <a:prstGeom prst="rect">
@@ -6975,8 +6966,8 @@
         </p:nvSpPr>
         <p:spPr>
           <a:xfrm>
-            <a:off x="5029200" y="3977639"/>
-            <a:ext cx="1874520" cy="329184"/>
+            <a:off x="5029200" y="4069080"/>
+            <a:ext cx="1874520" cy="310896"/>
           </a:xfrm>
           <a:prstGeom prst="rect">
             <a:avLst/>
@@ -7018,7 +7009,7 @@
         </p:nvSpPr>
         <p:spPr>
           <a:xfrm>
-            <a:off x="5120640" y="4023359"/>
+            <a:off x="5120640" y="4105656"/>
             <a:ext cx="1783080" cy="256032"/>
           </a:xfrm>
           <a:prstGeom prst="rect">
@@ -7053,8 +7044,8 @@
         </p:nvSpPr>
         <p:spPr>
           <a:xfrm>
-            <a:off x="7132320" y="3977639"/>
-            <a:ext cx="1965960" cy="329184"/>
+            <a:off x="7132320" y="4069080"/>
+            <a:ext cx="1965960" cy="310896"/>
           </a:xfrm>
           <a:prstGeom prst="rect">
             <a:avLst/>
@@ -7096,7 +7087,7 @@
         </p:nvSpPr>
         <p:spPr>
           <a:xfrm>
-            <a:off x="7223759" y="4023359"/>
+            <a:off x="7223759" y="4105656"/>
             <a:ext cx="1874520" cy="256032"/>
           </a:xfrm>
           <a:prstGeom prst="rect">
@@ -7131,8 +7122,8 @@
         </p:nvSpPr>
         <p:spPr>
           <a:xfrm>
-            <a:off x="9326880" y="3977639"/>
-            <a:ext cx="2606040" cy="329184"/>
+            <a:off x="9326880" y="4069080"/>
+            <a:ext cx="2606040" cy="310896"/>
           </a:xfrm>
           <a:prstGeom prst="rect">
             <a:avLst/>
@@ -7174,7 +7165,7 @@
         </p:nvSpPr>
         <p:spPr>
           <a:xfrm>
-            <a:off x="9418319" y="4023359"/>
+            <a:off x="9418319" y="4105656"/>
             <a:ext cx="2514600" cy="256032"/>
           </a:xfrm>
           <a:prstGeom prst="rect">
@@ -7209,8 +7200,8 @@
         </p:nvSpPr>
         <p:spPr>
           <a:xfrm>
-            <a:off x="457200" y="4325112"/>
-            <a:ext cx="4343400" cy="329184"/>
+            <a:off x="457200" y="4398264"/>
+            <a:ext cx="4343400" cy="310896"/>
           </a:xfrm>
           <a:prstGeom prst="rect">
             <a:avLst/>
@@ -7252,7 +7243,7 @@
         </p:nvSpPr>
         <p:spPr>
           <a:xfrm>
-            <a:off x="548640" y="4370831"/>
+            <a:off x="548640" y="4434840"/>
             <a:ext cx="4251959" cy="256032"/>
           </a:xfrm>
           <a:prstGeom prst="rect">
@@ -7287,8 +7278,8 @@
         </p:nvSpPr>
         <p:spPr>
           <a:xfrm>
-            <a:off x="5029200" y="4325112"/>
-            <a:ext cx="1874520" cy="329184"/>
+            <a:off x="5029200" y="4398264"/>
+            <a:ext cx="1874520" cy="310896"/>
           </a:xfrm>
           <a:prstGeom prst="rect">
             <a:avLst/>
@@ -7330,7 +7321,7 @@
         </p:nvSpPr>
         <p:spPr>
           <a:xfrm>
-            <a:off x="5120640" y="4370831"/>
+            <a:off x="5120640" y="4434840"/>
             <a:ext cx="1783080" cy="256032"/>
           </a:xfrm>
           <a:prstGeom prst="rect">
@@ -7365,8 +7356,8 @@
         </p:nvSpPr>
         <p:spPr>
           <a:xfrm>
-            <a:off x="7132320" y="4325112"/>
-            <a:ext cx="1965960" cy="329184"/>
+            <a:off x="7132320" y="4398264"/>
+            <a:ext cx="1965960" cy="310896"/>
           </a:xfrm>
           <a:prstGeom prst="rect">
             <a:avLst/>
@@ -7408,7 +7399,7 @@
         </p:nvSpPr>
         <p:spPr>
           <a:xfrm>
-            <a:off x="7223759" y="4370831"/>
+            <a:off x="7223759" y="4434840"/>
             <a:ext cx="1874520" cy="256032"/>
           </a:xfrm>
           <a:prstGeom prst="rect">
@@ -7443,8 +7434,8 @@
         </p:nvSpPr>
         <p:spPr>
           <a:xfrm>
-            <a:off x="9326880" y="4325112"/>
-            <a:ext cx="2606040" cy="329184"/>
+            <a:off x="9326880" y="4398264"/>
+            <a:ext cx="2606040" cy="310896"/>
           </a:xfrm>
           <a:prstGeom prst="rect">
             <a:avLst/>
@@ -7486,7 +7477,7 @@
         </p:nvSpPr>
         <p:spPr>
           <a:xfrm>
-            <a:off x="9418319" y="4370831"/>
+            <a:off x="9418319" y="4434840"/>
             <a:ext cx="2514600" cy="256032"/>
           </a:xfrm>
           <a:prstGeom prst="rect">
@@ -7521,8 +7512,8 @@
         </p:nvSpPr>
         <p:spPr>
           <a:xfrm>
-            <a:off x="457200" y="4672583"/>
-            <a:ext cx="4343400" cy="329184"/>
+            <a:off x="457200" y="4727448"/>
+            <a:ext cx="4343400" cy="310896"/>
           </a:xfrm>
           <a:prstGeom prst="rect">
             <a:avLst/>
@@ -7564,7 +7555,7 @@
         </p:nvSpPr>
         <p:spPr>
           <a:xfrm>
-            <a:off x="548640" y="4718303"/>
+            <a:off x="548640" y="4764024"/>
             <a:ext cx="4251959" cy="256032"/>
           </a:xfrm>
           <a:prstGeom prst="rect">
@@ -7599,8 +7590,8 @@
         </p:nvSpPr>
         <p:spPr>
           <a:xfrm>
-            <a:off x="5029200" y="4672583"/>
-            <a:ext cx="1874520" cy="329184"/>
+            <a:off x="5029200" y="4727448"/>
+            <a:ext cx="1874520" cy="310896"/>
           </a:xfrm>
           <a:prstGeom prst="rect">
             <a:avLst/>
@@ -7642,7 +7633,7 @@
         </p:nvSpPr>
         <p:spPr>
           <a:xfrm>
-            <a:off x="5120640" y="4718303"/>
+            <a:off x="5120640" y="4764024"/>
             <a:ext cx="1783080" cy="256032"/>
           </a:xfrm>
           <a:prstGeom prst="rect">
@@ -7677,8 +7668,8 @@
         </p:nvSpPr>
         <p:spPr>
           <a:xfrm>
-            <a:off x="7132320" y="4672583"/>
-            <a:ext cx="1965960" cy="329184"/>
+            <a:off x="7132320" y="4727448"/>
+            <a:ext cx="1965960" cy="310896"/>
           </a:xfrm>
           <a:prstGeom prst="rect">
             <a:avLst/>
@@ -7720,7 +7711,7 @@
         </p:nvSpPr>
         <p:spPr>
           <a:xfrm>
-            <a:off x="7223759" y="4718303"/>
+            <a:off x="7223759" y="4764024"/>
             <a:ext cx="1874520" cy="256032"/>
           </a:xfrm>
           <a:prstGeom prst="rect">
@@ -7755,8 +7746,8 @@
         </p:nvSpPr>
         <p:spPr>
           <a:xfrm>
-            <a:off x="9326880" y="4672583"/>
-            <a:ext cx="2606040" cy="329184"/>
+            <a:off x="9326880" y="4727448"/>
+            <a:ext cx="2606040" cy="310896"/>
           </a:xfrm>
           <a:prstGeom prst="rect">
             <a:avLst/>
@@ -7798,7 +7789,7 @@
         </p:nvSpPr>
         <p:spPr>
           <a:xfrm>
-            <a:off x="9418319" y="4718303"/>
+            <a:off x="9418319" y="4764024"/>
             <a:ext cx="2514600" cy="256032"/>
           </a:xfrm>
           <a:prstGeom prst="rect">
@@ -7833,8 +7824,8 @@
         </p:nvSpPr>
         <p:spPr>
           <a:xfrm>
-            <a:off x="457200" y="5020056"/>
-            <a:ext cx="4343400" cy="329184"/>
+            <a:off x="457200" y="5056632"/>
+            <a:ext cx="4343400" cy="310896"/>
           </a:xfrm>
           <a:prstGeom prst="rect">
             <a:avLst/>
@@ -7876,7 +7867,7 @@
         </p:nvSpPr>
         <p:spPr>
           <a:xfrm>
-            <a:off x="548640" y="5065776"/>
+            <a:off x="548640" y="5093208"/>
             <a:ext cx="4251959" cy="256032"/>
           </a:xfrm>
           <a:prstGeom prst="rect">
@@ -7911,8 +7902,8 @@
         </p:nvSpPr>
         <p:spPr>
           <a:xfrm>
-            <a:off x="5029200" y="5020056"/>
-            <a:ext cx="1874520" cy="329184"/>
+            <a:off x="5029200" y="5056632"/>
+            <a:ext cx="1874520" cy="310896"/>
           </a:xfrm>
           <a:prstGeom prst="rect">
             <a:avLst/>
@@ -7954,7 +7945,7 @@
         </p:nvSpPr>
         <p:spPr>
           <a:xfrm>
-            <a:off x="5120640" y="5065776"/>
+            <a:off x="5120640" y="5093208"/>
             <a:ext cx="1783080" cy="256032"/>
           </a:xfrm>
           <a:prstGeom prst="rect">
@@ -7989,8 +7980,8 @@
         </p:nvSpPr>
         <p:spPr>
           <a:xfrm>
-            <a:off x="7132320" y="5020056"/>
-            <a:ext cx="1965960" cy="329184"/>
+            <a:off x="7132320" y="5056632"/>
+            <a:ext cx="1965960" cy="310896"/>
           </a:xfrm>
           <a:prstGeom prst="rect">
             <a:avLst/>
@@ -8032,7 +8023,7 @@
         </p:nvSpPr>
         <p:spPr>
           <a:xfrm>
-            <a:off x="7223759" y="5065776"/>
+            <a:off x="7223759" y="5093208"/>
             <a:ext cx="1874520" cy="256032"/>
           </a:xfrm>
           <a:prstGeom prst="rect">
@@ -8067,8 +8058,8 @@
         </p:nvSpPr>
         <p:spPr>
           <a:xfrm>
-            <a:off x="9326880" y="5020056"/>
-            <a:ext cx="2606040" cy="329184"/>
+            <a:off x="9326880" y="5056632"/>
+            <a:ext cx="2606040" cy="310896"/>
           </a:xfrm>
           <a:prstGeom prst="rect">
             <a:avLst/>
@@ -8110,7 +8101,7 @@
         </p:nvSpPr>
         <p:spPr>
           <a:xfrm>
-            <a:off x="9418319" y="5065776"/>
+            <a:off x="9418319" y="5093208"/>
             <a:ext cx="2514600" cy="256032"/>
           </a:xfrm>
           <a:prstGeom prst="rect">
@@ -8145,8 +8136,8 @@
         </p:nvSpPr>
         <p:spPr>
           <a:xfrm>
-            <a:off x="457200" y="5367527"/>
-            <a:ext cx="4343400" cy="329184"/>
+            <a:off x="457200" y="5385816"/>
+            <a:ext cx="4343400" cy="310896"/>
           </a:xfrm>
           <a:prstGeom prst="rect">
             <a:avLst/>
@@ -8188,7 +8179,7 @@
         </p:nvSpPr>
         <p:spPr>
           <a:xfrm>
-            <a:off x="548640" y="5413247"/>
+            <a:off x="548640" y="5422392"/>
             <a:ext cx="4251959" cy="256032"/>
           </a:xfrm>
           <a:prstGeom prst="rect">
@@ -8223,8 +8214,8 @@
         </p:nvSpPr>
         <p:spPr>
           <a:xfrm>
-            <a:off x="5029200" y="5367527"/>
-            <a:ext cx="1874520" cy="329184"/>
+            <a:off x="5029200" y="5385816"/>
+            <a:ext cx="1874520" cy="310896"/>
           </a:xfrm>
           <a:prstGeom prst="rect">
             <a:avLst/>
@@ -8266,7 +8257,7 @@
         </p:nvSpPr>
         <p:spPr>
           <a:xfrm>
-            <a:off x="5120640" y="5413247"/>
+            <a:off x="5120640" y="5422392"/>
             <a:ext cx="1783080" cy="256032"/>
           </a:xfrm>
           <a:prstGeom prst="rect">
@@ -8301,8 +8292,8 @@
         </p:nvSpPr>
         <p:spPr>
           <a:xfrm>
-            <a:off x="7132320" y="5367527"/>
-            <a:ext cx="1965960" cy="329184"/>
+            <a:off x="7132320" y="5385816"/>
+            <a:ext cx="1965960" cy="310896"/>
           </a:xfrm>
           <a:prstGeom prst="rect">
             <a:avLst/>
@@ -8344,7 +8335,7 @@
         </p:nvSpPr>
         <p:spPr>
           <a:xfrm>
-            <a:off x="7223759" y="5413247"/>
+            <a:off x="7223759" y="5422392"/>
             <a:ext cx="1874520" cy="256032"/>
           </a:xfrm>
           <a:prstGeom prst="rect">
@@ -8379,8 +8370,8 @@
         </p:nvSpPr>
         <p:spPr>
           <a:xfrm>
-            <a:off x="9326880" y="5367527"/>
-            <a:ext cx="2606040" cy="329184"/>
+            <a:off x="9326880" y="5385816"/>
+            <a:ext cx="2606040" cy="310896"/>
           </a:xfrm>
           <a:prstGeom prst="rect">
             <a:avLst/>
@@ -8422,7 +8413,7 @@
         </p:nvSpPr>
         <p:spPr>
           <a:xfrm>
-            <a:off x="9418319" y="5413247"/>
+            <a:off x="9418319" y="5422392"/>
             <a:ext cx="2514600" cy="256032"/>
           </a:xfrm>
           <a:prstGeom prst="rect">
@@ -8458,7 +8449,7 @@
         <p:spPr>
           <a:xfrm>
             <a:off x="457200" y="5852160"/>
-            <a:ext cx="11338560" cy="320040"/>
+            <a:ext cx="11338560" cy="365760"/>
           </a:xfrm>
           <a:prstGeom prst="rect">
             <a:avLst/>
@@ -8479,7 +8470,7 @@
                 </a:solidFill>
                 <a:latin typeface="Calibri"/>
               </a:rPr>
-              <a:t>★  El escenario nulo de largo plazo se incluye explícitamente. Un resultado nulo en IMC es consistente con la literatura — y honesto es reportarlo.</a:t>
+              <a:t>★  El escenario nulo se incluye explícitamente. Si nuestro plan no mueve el IMC a largo plazo, lo decimos. Eso es ciencia honesta.</a:t>
             </a:r>
           </a:p>
         </p:txBody>
@@ -10512,13 +10503,13 @@
           <a:p>
             <a:pPr algn="l"/>
             <a:r>
-              <a:rPr sz="1800" b="0" i="1">
+              <a:rPr sz="1600" b="0" i="1">
                 <a:solidFill>
                   <a:srgbClr val="B8332A"/>
                 </a:solidFill>
                 <a:latin typeface="Calibri"/>
               </a:rPr>
-              <a:t>Una propuesta basada en evidencia para la salud infantil en México.</a:t>
+              <a:t>De un modelo malo a un plan basado en evidencia para la salud infantil en México.</a:t>
             </a:r>
           </a:p>
         </p:txBody>
@@ -11168,13 +11159,13 @@
           <a:p>
             <a:pPr algn="l"/>
             <a:r>
-              <a:rPr sz="2000" b="1" i="0">
+              <a:rPr sz="1600" b="1" i="0">
                 <a:solidFill>
                   <a:srgbClr val="B8332A"/>
                 </a:solidFill>
                 <a:latin typeface="Calibri"/>
               </a:rPr>
-              <a:t>R² = 0.634</a:t>
+              <a:t>0.064 → 0.634</a:t>
             </a:r>
           </a:p>
         </p:txBody>
@@ -11203,13 +11194,13 @@
           <a:p>
             <a:pPr algn="l"/>
             <a:r>
-              <a:rPr sz="1000" b="0" i="0">
+              <a:rPr sz="900" b="0" i="0">
                 <a:solidFill>
                   <a:srgbClr val="7A7368"/>
                 </a:solidFill>
                 <a:latin typeface="Calibri"/>
               </a:rPr>
-              <a:t>regresión controlada</a:t>
+              <a:t>R² del primer modelo al modelo expandido</a:t>
             </a:r>
           </a:p>
         </p:txBody>
@@ -11238,7 +11229,7 @@
           <a:p>
             <a:pPr algn="l"/>
             <a:r>
-              <a:rPr sz="2000" b="1" i="0">
+              <a:rPr sz="1600" b="1" i="0">
                 <a:solidFill>
                   <a:srgbClr val="B8332A"/>
                 </a:solidFill>
@@ -11273,13 +11264,13 @@
           <a:p>
             <a:pPr algn="l"/>
             <a:r>
-              <a:rPr sz="1000" b="0" i="0">
+              <a:rPr sz="900" b="0" i="0">
                 <a:solidFill>
                   <a:srgbClr val="7A7368"/>
                 </a:solidFill>
                 <a:latin typeface="Calibri"/>
               </a:rPr>
-              <a:t>PA compliance vs obesidad</a:t>
+              <a:t>actividad física vs obesidad (RF)</a:t>
             </a:r>
           </a:p>
         </p:txBody>
@@ -11308,13 +11299,13 @@
           <a:p>
             <a:pPr algn="l"/>
             <a:r>
-              <a:rPr sz="2000" b="1" i="0">
+              <a:rPr sz="1600" b="1" i="0">
                 <a:solidFill>
                   <a:srgbClr val="B8332A"/>
                 </a:solidFill>
                 <a:latin typeface="Calibri"/>
               </a:rPr>
-              <a:t>98</a:t>
+              <a:t>100+</a:t>
             </a:r>
           </a:p>
         </p:txBody>
@@ -11343,7 +11334,7 @@
           <a:p>
             <a:pPr algn="l"/>
             <a:r>
-              <a:rPr sz="1000" b="0" i="0">
+              <a:rPr sz="900" b="0" i="0">
                 <a:solidFill>
                   <a:srgbClr val="7A7368"/>
                 </a:solidFill>
@@ -11378,7 +11369,7 @@
           <a:p>
             <a:pPr algn="l"/>
             <a:r>
-              <a:rPr sz="2000" b="1" i="0">
+              <a:rPr sz="1600" b="1" i="0">
                 <a:solidFill>
                   <a:srgbClr val="B8332A"/>
                 </a:solidFill>
@@ -11413,7 +11404,7 @@
           <a:p>
             <a:pPr algn="l"/>
             <a:r>
-              <a:rPr sz="1000" b="0" i="0">
+              <a:rPr sz="900" b="0" i="0">
                 <a:solidFill>
                   <a:srgbClr val="7A7368"/>
                 </a:solidFill>
@@ -11931,7 +11922,7 @@
                 </a:solidFill>
                 <a:latin typeface="Consolas"/>
               </a:rPr>
-              <a:t>DASHBOARD 01  ·  LA CRISIS</a:t>
+              <a:t>DASHBOARD  ·  LA CRISIS</a:t>
             </a:r>
           </a:p>
         </p:txBody>
@@ -12958,7 +12949,7 @@
                 </a:solidFill>
                 <a:latin typeface="Consolas"/>
               </a:rPr>
-              <a:t>DASHBOARD 02  ·  EL MÉTODO</a:t>
+              <a:t>DASHBOARD  ·  PRIMER INTENTO  ·  REGRESIÓN LINEAL SIMPLE</a:t>
             </a:r>
           </a:p>
         </p:txBody>
@@ -12971,7 +12962,7 @@
         </p:nvSpPr>
         <p:spPr>
           <a:xfrm>
-            <a:off x="548640" y="685800"/>
+            <a:off x="548640" y="640080"/>
             <a:ext cx="10972800" cy="411480"/>
           </a:xfrm>
           <a:prstGeom prst="rect">
@@ -12987,27 +12978,315 @@
           <a:p>
             <a:pPr algn="l"/>
             <a:r>
+              <a:rPr sz="2400" b="1" i="0">
+                <a:solidFill>
+                  <a:srgbClr val="1A1612"/>
+                </a:solidFill>
+                <a:latin typeface="Calibri"/>
+              </a:rPr>
+              <a:t>Empezamos con lo más básico. Y no fue suficiente.</a:t>
+            </a:r>
+          </a:p>
+        </p:txBody>
+      </p:sp>
+      <p:sp>
+        <p:nvSpPr>
+          <p:cNvPr id="5" name="TextBox 4"/>
+          <p:cNvSpPr txBox="1"/>
+          <p:nvPr/>
+        </p:nvSpPr>
+        <p:spPr>
+          <a:xfrm>
+            <a:off x="548640" y="1097280"/>
+            <a:ext cx="10972800" cy="320040"/>
+          </a:xfrm>
+          <a:prstGeom prst="rect">
+            <a:avLst/>
+          </a:prstGeom>
+          <a:noFill/>
+        </p:spPr>
+        <p:txBody>
+          <a:bodyPr wrap="square">
+            <a:spAutoFit/>
+          </a:bodyPr>
+          <a:lstStyle/>
+          <a:p>
+            <a:pPr algn="l"/>
+            <a:r>
+              <a:rPr sz="1200" b="0" i="0">
+                <a:solidFill>
+                  <a:srgbClr val="7A7368"/>
+                </a:solidFill>
+                <a:latin typeface="Calibri"/>
+              </a:rPr>
+              <a:t>Hipótesis inicial: más tienditas por habitante → más obesidad. Lo probamos con OLS simple a nivel estatal (n=32).</a:t>
+            </a:r>
+          </a:p>
+        </p:txBody>
+      </p:sp>
+      <p:sp>
+        <p:nvSpPr>
+          <p:cNvPr id="6" name="Rectangle 5"/>
+          <p:cNvSpPr/>
+          <p:nvPr/>
+        </p:nvSpPr>
+        <p:spPr>
+          <a:xfrm>
+            <a:off x="457200" y="1691640"/>
+            <a:ext cx="5486400" cy="4023360"/>
+          </a:xfrm>
+          <a:prstGeom prst="rect">
+            <a:avLst/>
+          </a:prstGeom>
+          <a:solidFill>
+            <a:srgbClr val="1A1612"/>
+          </a:solidFill>
+          <a:ln>
+            <a:noFill/>
+          </a:ln>
+        </p:spPr>
+        <p:style>
+          <a:lnRef idx="1">
+            <a:schemeClr val="accent1"/>
+          </a:lnRef>
+          <a:fillRef idx="3">
+            <a:schemeClr val="accent1"/>
+          </a:fillRef>
+          <a:effectRef idx="2">
+            <a:schemeClr val="accent1"/>
+          </a:effectRef>
+          <a:fontRef idx="minor">
+            <a:schemeClr val="lt1"/>
+          </a:fontRef>
+        </p:style>
+        <p:txBody>
+          <a:bodyPr rtlCol="0" anchor="ctr"/>
+          <a:lstStyle/>
+          <a:p>
+            <a:pPr algn="ctr"/>
+          </a:p>
+        </p:txBody>
+      </p:sp>
+      <p:sp>
+        <p:nvSpPr>
+          <p:cNvPr id="7" name="TextBox 6"/>
+          <p:cNvSpPr txBox="1"/>
+          <p:nvPr/>
+        </p:nvSpPr>
+        <p:spPr>
+          <a:xfrm>
+            <a:off x="640080" y="1783080"/>
+            <a:ext cx="5120640" cy="274320"/>
+          </a:xfrm>
+          <a:prstGeom prst="rect">
+            <a:avLst/>
+          </a:prstGeom>
+          <a:noFill/>
+        </p:spPr>
+        <p:txBody>
+          <a:bodyPr wrap="square">
+            <a:spAutoFit/>
+          </a:bodyPr>
+          <a:lstStyle/>
+          <a:p>
+            <a:pPr algn="l"/>
+            <a:r>
+              <a:rPr sz="900" b="0" i="0">
+                <a:solidFill>
+                  <a:srgbClr val="B8862A"/>
+                </a:solidFill>
+                <a:latin typeface="Consolas"/>
+              </a:rPr>
+              <a:t>MODELO M1 — OLS BIVARIADO</a:t>
+            </a:r>
+          </a:p>
+        </p:txBody>
+      </p:sp>
+      <p:sp>
+        <p:nvSpPr>
+          <p:cNvPr id="8" name="TextBox 7"/>
+          <p:cNvSpPr txBox="1"/>
+          <p:nvPr/>
+        </p:nvSpPr>
+        <p:spPr>
+          <a:xfrm>
+            <a:off x="640080" y="2103120"/>
+            <a:ext cx="5120640" cy="365760"/>
+          </a:xfrm>
+          <a:prstGeom prst="rect">
+            <a:avLst/>
+          </a:prstGeom>
+          <a:noFill/>
+        </p:spPr>
+        <p:txBody>
+          <a:bodyPr wrap="square">
+            <a:spAutoFit/>
+          </a:bodyPr>
+          <a:lstStyle/>
+          <a:p>
+            <a:pPr algn="l"/>
+            <a:r>
+              <a:rPr sz="1200" b="0" i="1">
+                <a:solidFill>
+                  <a:srgbClr val="C8BEB0"/>
+                </a:solidFill>
+                <a:latin typeface="Consolas"/>
+              </a:rPr>
+              <a:t>obesidad ~ densidad_tienditas</a:t>
+            </a:r>
+          </a:p>
+        </p:txBody>
+      </p:sp>
+      <p:sp>
+        <p:nvSpPr>
+          <p:cNvPr id="9" name="TextBox 8"/>
+          <p:cNvSpPr txBox="1"/>
+          <p:nvPr/>
+        </p:nvSpPr>
+        <p:spPr>
+          <a:xfrm>
+            <a:off x="640080" y="2743200"/>
+            <a:ext cx="5120640" cy="365760"/>
+          </a:xfrm>
+          <a:prstGeom prst="rect">
+            <a:avLst/>
+          </a:prstGeom>
+          <a:noFill/>
+        </p:spPr>
+        <p:txBody>
+          <a:bodyPr wrap="square">
+            <a:spAutoFit/>
+          </a:bodyPr>
+          <a:lstStyle/>
+          <a:p>
+            <a:pPr algn="l"/>
+            <a:r>
               <a:rPr sz="2600" b="1" i="0">
                 <a:solidFill>
-                  <a:srgbClr val="1A1612"/>
+                  <a:srgbClr val="7A7368"/>
                 </a:solidFill>
                 <a:latin typeface="Calibri"/>
               </a:rPr>
-              <a:t>Cinco fases. Una cadena de evidencia.</a:t>
-            </a:r>
-          </a:p>
-        </p:txBody>
-      </p:sp>
-      <p:sp>
-        <p:nvSpPr>
-          <p:cNvPr id="5" name="Rectangle 4"/>
+              <a:t>β  =  −0.30</a:t>
+            </a:r>
+          </a:p>
+        </p:txBody>
+      </p:sp>
+      <p:sp>
+        <p:nvSpPr>
+          <p:cNvPr id="10" name="TextBox 9"/>
+          <p:cNvSpPr txBox="1"/>
+          <p:nvPr/>
+        </p:nvSpPr>
+        <p:spPr>
+          <a:xfrm>
+            <a:off x="640080" y="3246120"/>
+            <a:ext cx="5120640" cy="320040"/>
+          </a:xfrm>
+          <a:prstGeom prst="rect">
+            <a:avLst/>
+          </a:prstGeom>
+          <a:noFill/>
+        </p:spPr>
+        <p:txBody>
+          <a:bodyPr wrap="square">
+            <a:spAutoFit/>
+          </a:bodyPr>
+          <a:lstStyle/>
+          <a:p>
+            <a:pPr algn="l"/>
+            <a:r>
+              <a:rPr sz="1200" b="1" i="0">
+                <a:solidFill>
+                  <a:srgbClr val="B8332A"/>
+                </a:solidFill>
+                <a:latin typeface="Calibri"/>
+              </a:rPr>
+              <a:t>p = 0.162  ·  No significativo</a:t>
+            </a:r>
+          </a:p>
+        </p:txBody>
+      </p:sp>
+      <p:sp>
+        <p:nvSpPr>
+          <p:cNvPr id="11" name="TextBox 10"/>
+          <p:cNvSpPr txBox="1"/>
+          <p:nvPr/>
+        </p:nvSpPr>
+        <p:spPr>
+          <a:xfrm>
+            <a:off x="640080" y="3657600"/>
+            <a:ext cx="5120640" cy="320040"/>
+          </a:xfrm>
+          <a:prstGeom prst="rect">
+            <a:avLst/>
+          </a:prstGeom>
+          <a:noFill/>
+        </p:spPr>
+        <p:txBody>
+          <a:bodyPr wrap="square">
+            <a:spAutoFit/>
+          </a:bodyPr>
+          <a:lstStyle/>
+          <a:p>
+            <a:pPr algn="l"/>
+            <a:r>
+              <a:rPr sz="1800" b="1" i="0">
+                <a:solidFill>
+                  <a:srgbClr val="7A7368"/>
+                </a:solidFill>
+                <a:latin typeface="Calibri"/>
+              </a:rPr>
+              <a:t>R²  =  0.064</a:t>
+            </a:r>
+          </a:p>
+        </p:txBody>
+      </p:sp>
+      <p:sp>
+        <p:nvSpPr>
+          <p:cNvPr id="12" name="TextBox 11"/>
+          <p:cNvSpPr txBox="1"/>
+          <p:nvPr/>
+        </p:nvSpPr>
+        <p:spPr>
+          <a:xfrm>
+            <a:off x="640080" y="4114800"/>
+            <a:ext cx="5120640" cy="320040"/>
+          </a:xfrm>
+          <a:prstGeom prst="rect">
+            <a:avLst/>
+          </a:prstGeom>
+          <a:noFill/>
+        </p:spPr>
+        <p:txBody>
+          <a:bodyPr wrap="square">
+            <a:spAutoFit/>
+          </a:bodyPr>
+          <a:lstStyle/>
+          <a:p>
+            <a:pPr algn="l"/>
+            <a:r>
+              <a:rPr sz="1100" b="0" i="0">
+                <a:solidFill>
+                  <a:srgbClr val="C8BEB0"/>
+                </a:solidFill>
+                <a:latin typeface="Calibri"/>
+              </a:rPr>
+              <a:t>Solo 6% de varianza explicada</a:t>
+            </a:r>
+          </a:p>
+        </p:txBody>
+      </p:sp>
+      <p:sp>
+        <p:nvSpPr>
+          <p:cNvPr id="13" name="Rectangle 12"/>
           <p:cNvSpPr/>
           <p:nvPr/>
         </p:nvSpPr>
         <p:spPr>
           <a:xfrm>
-            <a:off x="457200" y="1417320"/>
-            <a:ext cx="2194560" cy="822960"/>
+            <a:off x="640080" y="4709160"/>
+            <a:ext cx="5120640" cy="914400"/>
           </a:xfrm>
           <a:prstGeom prst="rect">
             <a:avLst/>
@@ -13043,49 +13322,302 @@
       </p:sp>
       <p:sp>
         <p:nvSpPr>
-          <p:cNvPr id="6" name="TextBox 5"/>
-          <p:cNvSpPr txBox="1"/>
-          <p:nvPr/>
-        </p:nvSpPr>
-        <p:spPr>
-          <a:xfrm>
-            <a:off x="457200" y="1463040"/>
-            <a:ext cx="2194560" cy="731520"/>
-          </a:xfrm>
-          <a:prstGeom prst="rect">
-            <a:avLst/>
-          </a:prstGeom>
-          <a:noFill/>
-        </p:spPr>
-        <p:txBody>
-          <a:bodyPr wrap="square">
-            <a:spAutoFit/>
-          </a:bodyPr>
+          <p:cNvPr id="14" name="TextBox 13"/>
+          <p:cNvSpPr txBox="1"/>
+          <p:nvPr/>
+        </p:nvSpPr>
+        <p:spPr>
+          <a:xfrm>
+            <a:off x="777240" y="4773168"/>
+            <a:ext cx="4846320" cy="274320"/>
+          </a:xfrm>
+          <a:prstGeom prst="rect">
+            <a:avLst/>
+          </a:prstGeom>
+          <a:noFill/>
+        </p:spPr>
+        <p:txBody>
+          <a:bodyPr wrap="square">
+            <a:spAutoFit/>
+          </a:bodyPr>
+          <a:lstStyle/>
+          <a:p>
+            <a:pPr algn="l"/>
+            <a:r>
+              <a:rPr sz="900" b="0" i="0">
+                <a:solidFill>
+                  <a:srgbClr val="FDF8F1"/>
+                </a:solidFill>
+                <a:latin typeface="Consolas"/>
+              </a:rPr>
+              <a:t>DIAGNÓSTICO</a:t>
+            </a:r>
+          </a:p>
+        </p:txBody>
+      </p:sp>
+      <p:sp>
+        <p:nvSpPr>
+          <p:cNvPr id="15" name="TextBox 14"/>
+          <p:cNvSpPr txBox="1"/>
+          <p:nvPr/>
+        </p:nvSpPr>
+        <p:spPr>
+          <a:xfrm>
+            <a:off x="777240" y="5029200"/>
+            <a:ext cx="4846320" cy="548640"/>
+          </a:xfrm>
+          <a:prstGeom prst="rect">
+            <a:avLst/>
+          </a:prstGeom>
+          <a:noFill/>
+        </p:spPr>
+        <p:txBody>
+          <a:bodyPr wrap="square">
+            <a:spAutoFit/>
+          </a:bodyPr>
+          <a:lstStyle/>
+          <a:p>
+            <a:pPr algn="l"/>
+            <a:r>
+              <a:rPr sz="1600" b="1" i="0">
+                <a:solidFill>
+                  <a:srgbClr val="FDF8F1"/>
+                </a:solidFill>
+                <a:latin typeface="Calibri"/>
+              </a:rPr>
+              <a:t>El modelo es básico y horrible.</a:t>
+            </a:r>
+          </a:p>
+        </p:txBody>
+      </p:sp>
+      <p:sp>
+        <p:nvSpPr>
+          <p:cNvPr id="16" name="Rectangle 15"/>
+          <p:cNvSpPr/>
+          <p:nvPr/>
+        </p:nvSpPr>
+        <p:spPr>
+          <a:xfrm>
+            <a:off x="6217920" y="1691640"/>
+            <a:ext cx="5577840" cy="4023360"/>
+          </a:xfrm>
+          <a:prstGeom prst="rect">
+            <a:avLst/>
+          </a:prstGeom>
+          <a:solidFill>
+            <a:srgbClr val="F0E8D8"/>
+          </a:solidFill>
+          <a:ln>
+            <a:noFill/>
+          </a:ln>
+        </p:spPr>
+        <p:style>
+          <a:lnRef idx="1">
+            <a:schemeClr val="accent1"/>
+          </a:lnRef>
+          <a:fillRef idx="3">
+            <a:schemeClr val="accent1"/>
+          </a:fillRef>
+          <a:effectRef idx="2">
+            <a:schemeClr val="accent1"/>
+          </a:effectRef>
+          <a:fontRef idx="minor">
+            <a:schemeClr val="lt1"/>
+          </a:fontRef>
+        </p:style>
+        <p:txBody>
+          <a:bodyPr rtlCol="0" anchor="ctr"/>
           <a:lstStyle/>
           <a:p>
             <a:pPr algn="ctr"/>
-            <a:r>
-              <a:rPr sz="4400" b="1" i="0">
-                <a:solidFill>
-                  <a:srgbClr val="FDF8F1"/>
+          </a:p>
+        </p:txBody>
+      </p:sp>
+      <p:sp>
+        <p:nvSpPr>
+          <p:cNvPr id="17" name="TextBox 16"/>
+          <p:cNvSpPr txBox="1"/>
+          <p:nvPr/>
+        </p:nvSpPr>
+        <p:spPr>
+          <a:xfrm>
+            <a:off x="6400800" y="1783080"/>
+            <a:ext cx="5212080" cy="274320"/>
+          </a:xfrm>
+          <a:prstGeom prst="rect">
+            <a:avLst/>
+          </a:prstGeom>
+          <a:noFill/>
+        </p:spPr>
+        <p:txBody>
+          <a:bodyPr wrap="square">
+            <a:spAutoFit/>
+          </a:bodyPr>
+          <a:lstStyle/>
+          <a:p>
+            <a:pPr algn="l"/>
+            <a:r>
+              <a:rPr sz="900" b="0" i="0">
+                <a:solidFill>
+                  <a:srgbClr val="B8332A"/>
+                </a:solidFill>
+                <a:latin typeface="Consolas"/>
+              </a:rPr>
+              <a:t>¿POR QUÉ FALLÓ?</a:t>
+            </a:r>
+          </a:p>
+        </p:txBody>
+      </p:sp>
+      <p:sp>
+        <p:nvSpPr>
+          <p:cNvPr id="18" name="TextBox 17"/>
+          <p:cNvSpPr txBox="1"/>
+          <p:nvPr/>
+        </p:nvSpPr>
+        <p:spPr>
+          <a:xfrm>
+            <a:off x="6400800" y="2194560"/>
+            <a:ext cx="5212080" cy="731520"/>
+          </a:xfrm>
+          <a:prstGeom prst="rect">
+            <a:avLst/>
+          </a:prstGeom>
+          <a:noFill/>
+        </p:spPr>
+        <p:txBody>
+          <a:bodyPr wrap="square">
+            <a:spAutoFit/>
+          </a:bodyPr>
+          <a:lstStyle/>
+          <a:p>
+            <a:pPr algn="l"/>
+            <a:r>
+              <a:rPr sz="1100" b="0" i="0">
+                <a:solidFill>
+                  <a:srgbClr val="1A1612"/>
                 </a:solidFill>
                 <a:latin typeface="Calibri"/>
               </a:rPr>
-              <a:t>01</a:t>
-            </a:r>
-          </a:p>
-        </p:txBody>
-      </p:sp>
-      <p:sp>
-        <p:nvSpPr>
-          <p:cNvPr id="7" name="Rectangle 6"/>
+              <a:t>→  Una sola variable no captura un fenómeno multifactorial.</a:t>
+            </a:r>
+          </a:p>
+        </p:txBody>
+      </p:sp>
+      <p:sp>
+        <p:nvSpPr>
+          <p:cNvPr id="19" name="TextBox 18"/>
+          <p:cNvSpPr txBox="1"/>
+          <p:nvPr/>
+        </p:nvSpPr>
+        <p:spPr>
+          <a:xfrm>
+            <a:off x="6400800" y="2971800"/>
+            <a:ext cx="5212080" cy="731520"/>
+          </a:xfrm>
+          <a:prstGeom prst="rect">
+            <a:avLst/>
+          </a:prstGeom>
+          <a:noFill/>
+        </p:spPr>
+        <p:txBody>
+          <a:bodyPr wrap="square">
+            <a:spAutoFit/>
+          </a:bodyPr>
+          <a:lstStyle/>
+          <a:p>
+            <a:pPr algn="l"/>
+            <a:r>
+              <a:rPr sz="1100" b="0" i="0">
+                <a:solidFill>
+                  <a:srgbClr val="1A1612"/>
+                </a:solidFill>
+                <a:latin typeface="Calibri"/>
+              </a:rPr>
+              <a:t>→  Los estados con más tienditas (Guerrero, Oaxaca, Chiapas) son también los más marginados — y eso enmascara el efecto real.</a:t>
+            </a:r>
+          </a:p>
+        </p:txBody>
+      </p:sp>
+      <p:sp>
+        <p:nvSpPr>
+          <p:cNvPr id="20" name="TextBox 19"/>
+          <p:cNvSpPr txBox="1"/>
+          <p:nvPr/>
+        </p:nvSpPr>
+        <p:spPr>
+          <a:xfrm>
+            <a:off x="6400800" y="3749039"/>
+            <a:ext cx="5212080" cy="731520"/>
+          </a:xfrm>
+          <a:prstGeom prst="rect">
+            <a:avLst/>
+          </a:prstGeom>
+          <a:noFill/>
+        </p:spPr>
+        <p:txBody>
+          <a:bodyPr wrap="square">
+            <a:spAutoFit/>
+          </a:bodyPr>
+          <a:lstStyle/>
+          <a:p>
+            <a:pPr algn="l"/>
+            <a:r>
+              <a:rPr sz="1100" b="0" i="0">
+                <a:solidFill>
+                  <a:srgbClr val="1A1612"/>
+                </a:solidFill>
+                <a:latin typeface="Calibri"/>
+              </a:rPr>
+              <a:t>→  OLS bivariado no controla por urbanización, ingreso, ni acceso real a comida.</a:t>
+            </a:r>
+          </a:p>
+        </p:txBody>
+      </p:sp>
+      <p:sp>
+        <p:nvSpPr>
+          <p:cNvPr id="21" name="TextBox 20"/>
+          <p:cNvSpPr txBox="1"/>
+          <p:nvPr/>
+        </p:nvSpPr>
+        <p:spPr>
+          <a:xfrm>
+            <a:off x="6400800" y="4526279"/>
+            <a:ext cx="5212080" cy="731520"/>
+          </a:xfrm>
+          <a:prstGeom prst="rect">
+            <a:avLst/>
+          </a:prstGeom>
+          <a:noFill/>
+        </p:spPr>
+        <p:txBody>
+          <a:bodyPr wrap="square">
+            <a:spAutoFit/>
+          </a:bodyPr>
+          <a:lstStyle/>
+          <a:p>
+            <a:pPr algn="l"/>
+            <a:r>
+              <a:rPr sz="1100" b="0" i="0">
+                <a:solidFill>
+                  <a:srgbClr val="1A1612"/>
+                </a:solidFill>
+                <a:latin typeface="Calibri"/>
+              </a:rPr>
+              <a:t>→  No teníamos datos conductuales — solo geografía de comercios.</a:t>
+            </a:r>
+          </a:p>
+        </p:txBody>
+      </p:sp>
+      <p:sp>
+        <p:nvSpPr>
+          <p:cNvPr id="22" name="Rectangle 21"/>
           <p:cNvSpPr/>
           <p:nvPr/>
         </p:nvSpPr>
         <p:spPr>
           <a:xfrm>
-            <a:off x="457200" y="2286000"/>
-            <a:ext cx="2194560" cy="3520440"/>
+            <a:off x="457200" y="5852160"/>
+            <a:ext cx="11338560" cy="411480"/>
           </a:xfrm>
           <a:prstGeom prst="rect">
             <a:avLst/>
@@ -13121,1170 +13653,35 @@
       </p:sp>
       <p:sp>
         <p:nvSpPr>
-          <p:cNvPr id="8" name="TextBox 7"/>
-          <p:cNvSpPr txBox="1"/>
-          <p:nvPr/>
-        </p:nvSpPr>
-        <p:spPr>
-          <a:xfrm>
-            <a:off x="548640" y="2359152"/>
-            <a:ext cx="2011680" cy="256032"/>
-          </a:xfrm>
-          <a:prstGeom prst="rect">
-            <a:avLst/>
-          </a:prstGeom>
-          <a:noFill/>
-        </p:spPr>
-        <p:txBody>
-          <a:bodyPr wrap="square">
-            <a:spAutoFit/>
-          </a:bodyPr>
-          <a:lstStyle/>
-          <a:p>
-            <a:pPr algn="ctr"/>
-            <a:r>
-              <a:rPr sz="800" b="0" i="0">
+          <p:cNvPr id="23" name="TextBox 22"/>
+          <p:cNvSpPr txBox="1"/>
+          <p:nvPr/>
+        </p:nvSpPr>
+        <p:spPr>
+          <a:xfrm>
+            <a:off x="640080" y="5925312"/>
+            <a:ext cx="10972800" cy="274320"/>
+          </a:xfrm>
+          <a:prstGeom prst="rect">
+            <a:avLst/>
+          </a:prstGeom>
+          <a:noFill/>
+        </p:spPr>
+        <p:txBody>
+          <a:bodyPr wrap="square">
+            <a:spAutoFit/>
+          </a:bodyPr>
+          <a:lstStyle/>
+          <a:p>
+            <a:pPr algn="l"/>
+            <a:r>
+              <a:rPr sz="1100" b="0" i="0">
                 <a:solidFill>
                   <a:srgbClr val="B8862A"/>
                 </a:solidFill>
                 <a:latin typeface="Consolas"/>
               </a:rPr>
-              <a:t>DIAGNÓSTICO</a:t>
-            </a:r>
-          </a:p>
-        </p:txBody>
-      </p:sp>
-      <p:sp>
-        <p:nvSpPr>
-          <p:cNvPr id="9" name="TextBox 8"/>
-          <p:cNvSpPr txBox="1"/>
-          <p:nvPr/>
-        </p:nvSpPr>
-        <p:spPr>
-          <a:xfrm>
-            <a:off x="548640" y="2651760"/>
-            <a:ext cx="2011680" cy="594360"/>
-          </a:xfrm>
-          <a:prstGeom prst="rect">
-            <a:avLst/>
-          </a:prstGeom>
-          <a:noFill/>
-        </p:spPr>
-        <p:txBody>
-          <a:bodyPr wrap="square">
-            <a:spAutoFit/>
-          </a:bodyPr>
-          <a:lstStyle/>
-          <a:p>
-            <a:pPr algn="ctr"/>
-            <a:r>
-              <a:rPr sz="1400" b="1" i="0">
-                <a:solidFill>
-                  <a:srgbClr val="FDF8F1"/>
-                </a:solidFill>
-                <a:latin typeface="Calibri"/>
-              </a:rPr>
-              <a:t>Regresión
-Lineal</a:t>
-            </a:r>
-          </a:p>
-        </p:txBody>
-      </p:sp>
-      <p:sp>
-        <p:nvSpPr>
-          <p:cNvPr id="10" name="TextBox 9"/>
-          <p:cNvSpPr txBox="1"/>
-          <p:nvPr/>
-        </p:nvSpPr>
-        <p:spPr>
-          <a:xfrm>
-            <a:off x="548640" y="3337560"/>
-            <a:ext cx="2011680" cy="2194560"/>
-          </a:xfrm>
-          <a:prstGeom prst="rect">
-            <a:avLst/>
-          </a:prstGeom>
-          <a:noFill/>
-        </p:spPr>
-        <p:txBody>
-          <a:bodyPr wrap="square">
-            <a:spAutoFit/>
-          </a:bodyPr>
-          <a:lstStyle/>
-          <a:p>
-            <a:pPr algn="ctr"/>
-            <a:r>
-              <a:rPr sz="1000" b="0" i="0">
-                <a:solidFill>
-                  <a:srgbClr val="C8BEB0"/>
-                </a:solidFill>
-                <a:latin typeface="Calibri"/>
-              </a:rPr>
-              <a:t>32 estados · OLS bivariate vs. controlado · ¿Correlaciona densidad tienditas con obesidad?</a:t>
-            </a:r>
-          </a:p>
-        </p:txBody>
-      </p:sp>
-      <p:sp>
-        <p:nvSpPr>
-          <p:cNvPr id="11" name="Rectangle 10"/>
-          <p:cNvSpPr/>
-          <p:nvPr/>
-        </p:nvSpPr>
-        <p:spPr>
-          <a:xfrm>
-            <a:off x="2788920" y="1417320"/>
-            <a:ext cx="2194560" cy="822960"/>
-          </a:xfrm>
-          <a:prstGeom prst="rect">
-            <a:avLst/>
-          </a:prstGeom>
-          <a:solidFill>
-            <a:srgbClr val="B8332A"/>
-          </a:solidFill>
-          <a:ln>
-            <a:noFill/>
-          </a:ln>
-        </p:spPr>
-        <p:style>
-          <a:lnRef idx="1">
-            <a:schemeClr val="accent1"/>
-          </a:lnRef>
-          <a:fillRef idx="3">
-            <a:schemeClr val="accent1"/>
-          </a:fillRef>
-          <a:effectRef idx="2">
-            <a:schemeClr val="accent1"/>
-          </a:effectRef>
-          <a:fontRef idx="minor">
-            <a:schemeClr val="lt1"/>
-          </a:fontRef>
-        </p:style>
-        <p:txBody>
-          <a:bodyPr rtlCol="0" anchor="ctr"/>
-          <a:lstStyle/>
-          <a:p>
-            <a:pPr algn="ctr"/>
-          </a:p>
-        </p:txBody>
-      </p:sp>
-      <p:sp>
-        <p:nvSpPr>
-          <p:cNvPr id="12" name="TextBox 11"/>
-          <p:cNvSpPr txBox="1"/>
-          <p:nvPr/>
-        </p:nvSpPr>
-        <p:spPr>
-          <a:xfrm>
-            <a:off x="2788920" y="1463040"/>
-            <a:ext cx="2194560" cy="731520"/>
-          </a:xfrm>
-          <a:prstGeom prst="rect">
-            <a:avLst/>
-          </a:prstGeom>
-          <a:noFill/>
-        </p:spPr>
-        <p:txBody>
-          <a:bodyPr wrap="square">
-            <a:spAutoFit/>
-          </a:bodyPr>
-          <a:lstStyle/>
-          <a:p>
-            <a:pPr algn="ctr"/>
-            <a:r>
-              <a:rPr sz="4400" b="1" i="0">
-                <a:solidFill>
-                  <a:srgbClr val="FDF8F1"/>
-                </a:solidFill>
-                <a:latin typeface="Calibri"/>
-              </a:rPr>
-              <a:t>02</a:t>
-            </a:r>
-          </a:p>
-        </p:txBody>
-      </p:sp>
-      <p:sp>
-        <p:nvSpPr>
-          <p:cNvPr id="13" name="Rectangle 12"/>
-          <p:cNvSpPr/>
-          <p:nvPr/>
-        </p:nvSpPr>
-        <p:spPr>
-          <a:xfrm>
-            <a:off x="2788920" y="2286000"/>
-            <a:ext cx="2194560" cy="3520440"/>
-          </a:xfrm>
-          <a:prstGeom prst="rect">
-            <a:avLst/>
-          </a:prstGeom>
-          <a:solidFill>
-            <a:srgbClr val="1A1612"/>
-          </a:solidFill>
-          <a:ln>
-            <a:noFill/>
-          </a:ln>
-        </p:spPr>
-        <p:style>
-          <a:lnRef idx="1">
-            <a:schemeClr val="accent1"/>
-          </a:lnRef>
-          <a:fillRef idx="3">
-            <a:schemeClr val="accent1"/>
-          </a:fillRef>
-          <a:effectRef idx="2">
-            <a:schemeClr val="accent1"/>
-          </a:effectRef>
-          <a:fontRef idx="minor">
-            <a:schemeClr val="lt1"/>
-          </a:fontRef>
-        </p:style>
-        <p:txBody>
-          <a:bodyPr rtlCol="0" anchor="ctr"/>
-          <a:lstStyle/>
-          <a:p>
-            <a:pPr algn="ctr"/>
-          </a:p>
-        </p:txBody>
-      </p:sp>
-      <p:sp>
-        <p:nvSpPr>
-          <p:cNvPr id="14" name="TextBox 13"/>
-          <p:cNvSpPr txBox="1"/>
-          <p:nvPr/>
-        </p:nvSpPr>
-        <p:spPr>
-          <a:xfrm>
-            <a:off x="2880360" y="2359152"/>
-            <a:ext cx="2011680" cy="256032"/>
-          </a:xfrm>
-          <a:prstGeom prst="rect">
-            <a:avLst/>
-          </a:prstGeom>
-          <a:noFill/>
-        </p:spPr>
-        <p:txBody>
-          <a:bodyPr wrap="square">
-            <a:spAutoFit/>
-          </a:bodyPr>
-          <a:lstStyle/>
-          <a:p>
-            <a:pPr algn="ctr"/>
-            <a:r>
-              <a:rPr sz="800" b="0" i="0">
-                <a:solidFill>
-                  <a:srgbClr val="B8862A"/>
-                </a:solidFill>
-                <a:latin typeface="Consolas"/>
-              </a:rPr>
-              <a:t>DIAGNÓSTICO</a:t>
-            </a:r>
-          </a:p>
-        </p:txBody>
-      </p:sp>
-      <p:sp>
-        <p:nvSpPr>
-          <p:cNvPr id="15" name="TextBox 14"/>
-          <p:cNvSpPr txBox="1"/>
-          <p:nvPr/>
-        </p:nvSpPr>
-        <p:spPr>
-          <a:xfrm>
-            <a:off x="2880360" y="2651760"/>
-            <a:ext cx="2011680" cy="594360"/>
-          </a:xfrm>
-          <a:prstGeom prst="rect">
-            <a:avLst/>
-          </a:prstGeom>
-          <a:noFill/>
-        </p:spPr>
-        <p:txBody>
-          <a:bodyPr wrap="square">
-            <a:spAutoFit/>
-          </a:bodyPr>
-          <a:lstStyle/>
-          <a:p>
-            <a:pPr algn="ctr"/>
-            <a:r>
-              <a:rPr sz="1400" b="1" i="0">
-                <a:solidFill>
-                  <a:srgbClr val="FDF8F1"/>
-                </a:solidFill>
-                <a:latin typeface="Calibri"/>
-              </a:rPr>
-              <a:t>Random
-Forest</a:t>
-            </a:r>
-          </a:p>
-        </p:txBody>
-      </p:sp>
-      <p:sp>
-        <p:nvSpPr>
-          <p:cNvPr id="16" name="TextBox 15"/>
-          <p:cNvSpPr txBox="1"/>
-          <p:nvPr/>
-        </p:nvSpPr>
-        <p:spPr>
-          <a:xfrm>
-            <a:off x="2880360" y="3337560"/>
-            <a:ext cx="2011680" cy="2194560"/>
-          </a:xfrm>
-          <a:prstGeom prst="rect">
-            <a:avLst/>
-          </a:prstGeom>
-          <a:noFill/>
-        </p:spPr>
-        <p:txBody>
-          <a:bodyPr wrap="square">
-            <a:spAutoFit/>
-          </a:bodyPr>
-          <a:lstStyle/>
-          <a:p>
-            <a:pPr algn="ctr"/>
-            <a:r>
-              <a:rPr sz="1000" b="0" i="0">
-                <a:solidFill>
-                  <a:srgbClr val="C8BEB0"/>
-                </a:solidFill>
-                <a:latin typeface="Calibri"/>
-              </a:rPr>
-              <a:t>8 variables extendidas · LOO-CV · Feature importance · ¿Cuál es el predictor más modificable?</a:t>
-            </a:r>
-          </a:p>
-        </p:txBody>
-      </p:sp>
-      <p:sp>
-        <p:nvSpPr>
-          <p:cNvPr id="17" name="Rectangle 16"/>
-          <p:cNvSpPr/>
-          <p:nvPr/>
-        </p:nvSpPr>
-        <p:spPr>
-          <a:xfrm>
-            <a:off x="5120640" y="1417320"/>
-            <a:ext cx="2194560" cy="822960"/>
-          </a:xfrm>
-          <a:prstGeom prst="rect">
-            <a:avLst/>
-          </a:prstGeom>
-          <a:solidFill>
-            <a:srgbClr val="B8332A"/>
-          </a:solidFill>
-          <a:ln>
-            <a:noFill/>
-          </a:ln>
-        </p:spPr>
-        <p:style>
-          <a:lnRef idx="1">
-            <a:schemeClr val="accent1"/>
-          </a:lnRef>
-          <a:fillRef idx="3">
-            <a:schemeClr val="accent1"/>
-          </a:fillRef>
-          <a:effectRef idx="2">
-            <a:schemeClr val="accent1"/>
-          </a:effectRef>
-          <a:fontRef idx="minor">
-            <a:schemeClr val="lt1"/>
-          </a:fontRef>
-        </p:style>
-        <p:txBody>
-          <a:bodyPr rtlCol="0" anchor="ctr"/>
-          <a:lstStyle/>
-          <a:p>
-            <a:pPr algn="ctr"/>
-          </a:p>
-        </p:txBody>
-      </p:sp>
-      <p:sp>
-        <p:nvSpPr>
-          <p:cNvPr id="18" name="TextBox 17"/>
-          <p:cNvSpPr txBox="1"/>
-          <p:nvPr/>
-        </p:nvSpPr>
-        <p:spPr>
-          <a:xfrm>
-            <a:off x="5120640" y="1463040"/>
-            <a:ext cx="2194560" cy="731520"/>
-          </a:xfrm>
-          <a:prstGeom prst="rect">
-            <a:avLst/>
-          </a:prstGeom>
-          <a:noFill/>
-        </p:spPr>
-        <p:txBody>
-          <a:bodyPr wrap="square">
-            <a:spAutoFit/>
-          </a:bodyPr>
-          <a:lstStyle/>
-          <a:p>
-            <a:pPr algn="ctr"/>
-            <a:r>
-              <a:rPr sz="4400" b="1" i="0">
-                <a:solidFill>
-                  <a:srgbClr val="FDF8F1"/>
-                </a:solidFill>
-                <a:latin typeface="Calibri"/>
-              </a:rPr>
-              <a:t>03</a:t>
-            </a:r>
-          </a:p>
-        </p:txBody>
-      </p:sp>
-      <p:sp>
-        <p:nvSpPr>
-          <p:cNvPr id="19" name="Rectangle 18"/>
-          <p:cNvSpPr/>
-          <p:nvPr/>
-        </p:nvSpPr>
-        <p:spPr>
-          <a:xfrm>
-            <a:off x="5120640" y="2286000"/>
-            <a:ext cx="2194560" cy="3520440"/>
-          </a:xfrm>
-          <a:prstGeom prst="rect">
-            <a:avLst/>
-          </a:prstGeom>
-          <a:solidFill>
-            <a:srgbClr val="1A1612"/>
-          </a:solidFill>
-          <a:ln>
-            <a:noFill/>
-          </a:ln>
-        </p:spPr>
-        <p:style>
-          <a:lnRef idx="1">
-            <a:schemeClr val="accent1"/>
-          </a:lnRef>
-          <a:fillRef idx="3">
-            <a:schemeClr val="accent1"/>
-          </a:fillRef>
-          <a:effectRef idx="2">
-            <a:schemeClr val="accent1"/>
-          </a:effectRef>
-          <a:fontRef idx="minor">
-            <a:schemeClr val="lt1"/>
-          </a:fontRef>
-        </p:style>
-        <p:txBody>
-          <a:bodyPr rtlCol="0" anchor="ctr"/>
-          <a:lstStyle/>
-          <a:p>
-            <a:pPr algn="ctr"/>
-          </a:p>
-        </p:txBody>
-      </p:sp>
-      <p:sp>
-        <p:nvSpPr>
-          <p:cNvPr id="20" name="TextBox 19"/>
-          <p:cNvSpPr txBox="1"/>
-          <p:nvPr/>
-        </p:nvSpPr>
-        <p:spPr>
-          <a:xfrm>
-            <a:off x="5212079" y="2359152"/>
-            <a:ext cx="2011680" cy="256032"/>
-          </a:xfrm>
-          <a:prstGeom prst="rect">
-            <a:avLst/>
-          </a:prstGeom>
-          <a:noFill/>
-        </p:spPr>
-        <p:txBody>
-          <a:bodyPr wrap="square">
-            <a:spAutoFit/>
-          </a:bodyPr>
-          <a:lstStyle/>
-          <a:p>
-            <a:pPr algn="ctr"/>
-            <a:r>
-              <a:rPr sz="800" b="0" i="0">
-                <a:solidFill>
-                  <a:srgbClr val="B8862A"/>
-                </a:solidFill>
-                <a:latin typeface="Consolas"/>
-              </a:rPr>
-              <a:t>ESCUCHAR</a:t>
-            </a:r>
-          </a:p>
-        </p:txBody>
-      </p:sp>
-      <p:sp>
-        <p:nvSpPr>
-          <p:cNvPr id="21" name="TextBox 20"/>
-          <p:cNvSpPr txBox="1"/>
-          <p:nvPr/>
-        </p:nvSpPr>
-        <p:spPr>
-          <a:xfrm>
-            <a:off x="5212079" y="2651760"/>
-            <a:ext cx="2011680" cy="594360"/>
-          </a:xfrm>
-          <a:prstGeom prst="rect">
-            <a:avLst/>
-          </a:prstGeom>
-          <a:noFill/>
-        </p:spPr>
-        <p:txBody>
-          <a:bodyPr wrap="square">
-            <a:spAutoFit/>
-          </a:bodyPr>
-          <a:lstStyle/>
-          <a:p>
-            <a:pPr algn="ctr"/>
-            <a:r>
-              <a:rPr sz="1400" b="1" i="0">
-                <a:solidFill>
-                  <a:srgbClr val="FDF8F1"/>
-                </a:solidFill>
-                <a:latin typeface="Calibri"/>
-              </a:rPr>
-              <a:t>Encuesta
-n = 98</a:t>
-            </a:r>
-          </a:p>
-        </p:txBody>
-      </p:sp>
-      <p:sp>
-        <p:nvSpPr>
-          <p:cNvPr id="22" name="TextBox 21"/>
-          <p:cNvSpPr txBox="1"/>
-          <p:nvPr/>
-        </p:nvSpPr>
-        <p:spPr>
-          <a:xfrm>
-            <a:off x="5212079" y="3337560"/>
-            <a:ext cx="2011680" cy="2194560"/>
-          </a:xfrm>
-          <a:prstGeom prst="rect">
-            <a:avLst/>
-          </a:prstGeom>
-          <a:noFill/>
-        </p:spPr>
-        <p:txBody>
-          <a:bodyPr wrap="square">
-            <a:spAutoFit/>
-          </a:bodyPr>
-          <a:lstStyle/>
-          <a:p>
-            <a:pPr algn="ctr"/>
-            <a:r>
-              <a:rPr sz="1000" b="0" i="0">
-                <a:solidFill>
-                  <a:srgbClr val="C8BEB0"/>
-                </a:solidFill>
-                <a:latin typeface="Calibri"/>
-              </a:rPr>
-              <a:t>San Luis Potosí · Dic 2025 – Ene 2026 · 2 pistas: padres / no padres · Hipótesis confirmadas</a:t>
-            </a:r>
-          </a:p>
-        </p:txBody>
-      </p:sp>
-      <p:sp>
-        <p:nvSpPr>
-          <p:cNvPr id="23" name="Rectangle 22"/>
-          <p:cNvSpPr/>
-          <p:nvPr/>
-        </p:nvSpPr>
-        <p:spPr>
-          <a:xfrm>
-            <a:off x="7452359" y="1417320"/>
-            <a:ext cx="2194560" cy="822960"/>
-          </a:xfrm>
-          <a:prstGeom prst="rect">
-            <a:avLst/>
-          </a:prstGeom>
-          <a:solidFill>
-            <a:srgbClr val="B8332A"/>
-          </a:solidFill>
-          <a:ln>
-            <a:noFill/>
-          </a:ln>
-        </p:spPr>
-        <p:style>
-          <a:lnRef idx="1">
-            <a:schemeClr val="accent1"/>
-          </a:lnRef>
-          <a:fillRef idx="3">
-            <a:schemeClr val="accent1"/>
-          </a:fillRef>
-          <a:effectRef idx="2">
-            <a:schemeClr val="accent1"/>
-          </a:effectRef>
-          <a:fontRef idx="minor">
-            <a:schemeClr val="lt1"/>
-          </a:fontRef>
-        </p:style>
-        <p:txBody>
-          <a:bodyPr rtlCol="0" anchor="ctr"/>
-          <a:lstStyle/>
-          <a:p>
-            <a:pPr algn="ctr"/>
-          </a:p>
-        </p:txBody>
-      </p:sp>
-      <p:sp>
-        <p:nvSpPr>
-          <p:cNvPr id="24" name="TextBox 23"/>
-          <p:cNvSpPr txBox="1"/>
-          <p:nvPr/>
-        </p:nvSpPr>
-        <p:spPr>
-          <a:xfrm>
-            <a:off x="7452359" y="1463040"/>
-            <a:ext cx="2194560" cy="731520"/>
-          </a:xfrm>
-          <a:prstGeom prst="rect">
-            <a:avLst/>
-          </a:prstGeom>
-          <a:noFill/>
-        </p:spPr>
-        <p:txBody>
-          <a:bodyPr wrap="square">
-            <a:spAutoFit/>
-          </a:bodyPr>
-          <a:lstStyle/>
-          <a:p>
-            <a:pPr algn="ctr"/>
-            <a:r>
-              <a:rPr sz="4400" b="1" i="0">
-                <a:solidFill>
-                  <a:srgbClr val="FDF8F1"/>
-                </a:solidFill>
-                <a:latin typeface="Calibri"/>
-              </a:rPr>
-              <a:t>04</a:t>
-            </a:r>
-          </a:p>
-        </p:txBody>
-      </p:sp>
-      <p:sp>
-        <p:nvSpPr>
-          <p:cNvPr id="25" name="Rectangle 24"/>
-          <p:cNvSpPr/>
-          <p:nvPr/>
-        </p:nvSpPr>
-        <p:spPr>
-          <a:xfrm>
-            <a:off x="7452359" y="2286000"/>
-            <a:ext cx="2194560" cy="3520440"/>
-          </a:xfrm>
-          <a:prstGeom prst="rect">
-            <a:avLst/>
-          </a:prstGeom>
-          <a:solidFill>
-            <a:srgbClr val="1A1612"/>
-          </a:solidFill>
-          <a:ln>
-            <a:noFill/>
-          </a:ln>
-        </p:spPr>
-        <p:style>
-          <a:lnRef idx="1">
-            <a:schemeClr val="accent1"/>
-          </a:lnRef>
-          <a:fillRef idx="3">
-            <a:schemeClr val="accent1"/>
-          </a:fillRef>
-          <a:effectRef idx="2">
-            <a:schemeClr val="accent1"/>
-          </a:effectRef>
-          <a:fontRef idx="minor">
-            <a:schemeClr val="lt1"/>
-          </a:fontRef>
-        </p:style>
-        <p:txBody>
-          <a:bodyPr rtlCol="0" anchor="ctr"/>
-          <a:lstStyle/>
-          <a:p>
-            <a:pPr algn="ctr"/>
-          </a:p>
-        </p:txBody>
-      </p:sp>
-      <p:sp>
-        <p:nvSpPr>
-          <p:cNvPr id="26" name="TextBox 25"/>
-          <p:cNvSpPr txBox="1"/>
-          <p:nvPr/>
-        </p:nvSpPr>
-        <p:spPr>
-          <a:xfrm>
-            <a:off x="7543799" y="2359152"/>
-            <a:ext cx="2011680" cy="256032"/>
-          </a:xfrm>
-          <a:prstGeom prst="rect">
-            <a:avLst/>
-          </a:prstGeom>
-          <a:noFill/>
-        </p:spPr>
-        <p:txBody>
-          <a:bodyPr wrap="square">
-            <a:spAutoFit/>
-          </a:bodyPr>
-          <a:lstStyle/>
-          <a:p>
-            <a:pPr algn="ctr"/>
-            <a:r>
-              <a:rPr sz="800" b="0" i="0">
-                <a:solidFill>
-                  <a:srgbClr val="B8862A"/>
-                </a:solidFill>
-                <a:latin typeface="Consolas"/>
-              </a:rPr>
-              <a:t>DISEÑAR</a:t>
-            </a:r>
-          </a:p>
-        </p:txBody>
-      </p:sp>
-      <p:sp>
-        <p:nvSpPr>
-          <p:cNvPr id="27" name="TextBox 26"/>
-          <p:cNvSpPr txBox="1"/>
-          <p:nvPr/>
-        </p:nvSpPr>
-        <p:spPr>
-          <a:xfrm>
-            <a:off x="7543799" y="2651760"/>
-            <a:ext cx="2011680" cy="594360"/>
-          </a:xfrm>
-          <a:prstGeom prst="rect">
-            <a:avLst/>
-          </a:prstGeom>
-          <a:noFill/>
-        </p:spPr>
-        <p:txBody>
-          <a:bodyPr wrap="square">
-            <a:spAutoFit/>
-          </a:bodyPr>
-          <a:lstStyle/>
-          <a:p>
-            <a:pPr algn="ctr"/>
-            <a:r>
-              <a:rPr sz="1400" b="1" i="0">
-                <a:solidFill>
-                  <a:srgbClr val="FDF8F1"/>
-                </a:solidFill>
-                <a:latin typeface="Calibri"/>
-              </a:rPr>
-              <a:t>Intervención
-Curricular</a:t>
-            </a:r>
-          </a:p>
-        </p:txBody>
-      </p:sp>
-      <p:sp>
-        <p:nvSpPr>
-          <p:cNvPr id="28" name="TextBox 27"/>
-          <p:cNvSpPr txBox="1"/>
-          <p:nvPr/>
-        </p:nvSpPr>
-        <p:spPr>
-          <a:xfrm>
-            <a:off x="7543799" y="3337560"/>
-            <a:ext cx="2011680" cy="2194560"/>
-          </a:xfrm>
-          <a:prstGeom prst="rect">
-            <a:avLst/>
-          </a:prstGeom>
-          <a:noFill/>
-        </p:spPr>
-        <p:txBody>
-          <a:bodyPr wrap="square">
-            <a:spAutoFit/>
-          </a:bodyPr>
-          <a:lstStyle/>
-          <a:p>
-            <a:pPr algn="ctr"/>
-            <a:r>
-              <a:rPr sz="1000" b="0" i="0">
-                <a:solidFill>
-                  <a:srgbClr val="C8BEB0"/>
-                </a:solidFill>
-                <a:latin typeface="Calibri"/>
-              </a:rPr>
-              <a:t>EF + Vida Saludable · 5 componentes · NEM 2022 · Sin reforma legislativa</a:t>
-            </a:r>
-          </a:p>
-        </p:txBody>
-      </p:sp>
-      <p:sp>
-        <p:nvSpPr>
-          <p:cNvPr id="29" name="Rectangle 28"/>
-          <p:cNvSpPr/>
-          <p:nvPr/>
-        </p:nvSpPr>
-        <p:spPr>
-          <a:xfrm>
-            <a:off x="9784080" y="1417320"/>
-            <a:ext cx="2194560" cy="822960"/>
-          </a:xfrm>
-          <a:prstGeom prst="rect">
-            <a:avLst/>
-          </a:prstGeom>
-          <a:solidFill>
-            <a:srgbClr val="B8332A"/>
-          </a:solidFill>
-          <a:ln>
-            <a:noFill/>
-          </a:ln>
-        </p:spPr>
-        <p:style>
-          <a:lnRef idx="1">
-            <a:schemeClr val="accent1"/>
-          </a:lnRef>
-          <a:fillRef idx="3">
-            <a:schemeClr val="accent1"/>
-          </a:fillRef>
-          <a:effectRef idx="2">
-            <a:schemeClr val="accent1"/>
-          </a:effectRef>
-          <a:fontRef idx="minor">
-            <a:schemeClr val="lt1"/>
-          </a:fontRef>
-        </p:style>
-        <p:txBody>
-          <a:bodyPr rtlCol="0" anchor="ctr"/>
-          <a:lstStyle/>
-          <a:p>
-            <a:pPr algn="ctr"/>
-          </a:p>
-        </p:txBody>
-      </p:sp>
-      <p:sp>
-        <p:nvSpPr>
-          <p:cNvPr id="30" name="TextBox 29"/>
-          <p:cNvSpPr txBox="1"/>
-          <p:nvPr/>
-        </p:nvSpPr>
-        <p:spPr>
-          <a:xfrm>
-            <a:off x="9784080" y="1463040"/>
-            <a:ext cx="2194560" cy="731520"/>
-          </a:xfrm>
-          <a:prstGeom prst="rect">
-            <a:avLst/>
-          </a:prstGeom>
-          <a:noFill/>
-        </p:spPr>
-        <p:txBody>
-          <a:bodyPr wrap="square">
-            <a:spAutoFit/>
-          </a:bodyPr>
-          <a:lstStyle/>
-          <a:p>
-            <a:pPr algn="ctr"/>
-            <a:r>
-              <a:rPr sz="4400" b="1" i="0">
-                <a:solidFill>
-                  <a:srgbClr val="FDF8F1"/>
-                </a:solidFill>
-                <a:latin typeface="Calibri"/>
-              </a:rPr>
-              <a:t>05</a:t>
-            </a:r>
-          </a:p>
-        </p:txBody>
-      </p:sp>
-      <p:sp>
-        <p:nvSpPr>
-          <p:cNvPr id="31" name="Rectangle 30"/>
-          <p:cNvSpPr/>
-          <p:nvPr/>
-        </p:nvSpPr>
-        <p:spPr>
-          <a:xfrm>
-            <a:off x="9784080" y="2286000"/>
-            <a:ext cx="2194560" cy="3520440"/>
-          </a:xfrm>
-          <a:prstGeom prst="rect">
-            <a:avLst/>
-          </a:prstGeom>
-          <a:solidFill>
-            <a:srgbClr val="1A1612"/>
-          </a:solidFill>
-          <a:ln>
-            <a:noFill/>
-          </a:ln>
-        </p:spPr>
-        <p:style>
-          <a:lnRef idx="1">
-            <a:schemeClr val="accent1"/>
-          </a:lnRef>
-          <a:fillRef idx="3">
-            <a:schemeClr val="accent1"/>
-          </a:fillRef>
-          <a:effectRef idx="2">
-            <a:schemeClr val="accent1"/>
-          </a:effectRef>
-          <a:fontRef idx="minor">
-            <a:schemeClr val="lt1"/>
-          </a:fontRef>
-        </p:style>
-        <p:txBody>
-          <a:bodyPr rtlCol="0" anchor="ctr"/>
-          <a:lstStyle/>
-          <a:p>
-            <a:pPr algn="ctr"/>
-          </a:p>
-        </p:txBody>
-      </p:sp>
-      <p:sp>
-        <p:nvSpPr>
-          <p:cNvPr id="32" name="TextBox 31"/>
-          <p:cNvSpPr txBox="1"/>
-          <p:nvPr/>
-        </p:nvSpPr>
-        <p:spPr>
-          <a:xfrm>
-            <a:off x="9875519" y="2359152"/>
-            <a:ext cx="2011680" cy="256032"/>
-          </a:xfrm>
-          <a:prstGeom prst="rect">
-            <a:avLst/>
-          </a:prstGeom>
-          <a:noFill/>
-        </p:spPr>
-        <p:txBody>
-          <a:bodyPr wrap="square">
-            <a:spAutoFit/>
-          </a:bodyPr>
-          <a:lstStyle/>
-          <a:p>
-            <a:pPr algn="ctr"/>
-            <a:r>
-              <a:rPr sz="800" b="0" i="0">
-                <a:solidFill>
-                  <a:srgbClr val="B8862A"/>
-                </a:solidFill>
-                <a:latin typeface="Consolas"/>
-              </a:rPr>
-              <a:t>PROYECTAR</a:t>
-            </a:r>
-          </a:p>
-        </p:txBody>
-      </p:sp>
-      <p:sp>
-        <p:nvSpPr>
-          <p:cNvPr id="33" name="TextBox 32"/>
-          <p:cNvSpPr txBox="1"/>
-          <p:nvPr/>
-        </p:nvSpPr>
-        <p:spPr>
-          <a:xfrm>
-            <a:off x="9875519" y="2651760"/>
-            <a:ext cx="2011680" cy="594360"/>
-          </a:xfrm>
-          <a:prstGeom prst="rect">
-            <a:avLst/>
-          </a:prstGeom>
-          <a:noFill/>
-        </p:spPr>
-        <p:txBody>
-          <a:bodyPr wrap="square">
-            <a:spAutoFit/>
-          </a:bodyPr>
-          <a:lstStyle/>
-          <a:p>
-            <a:pPr algn="ctr"/>
-            <a:r>
-              <a:rPr sz="1400" b="1" i="0">
-                <a:solidFill>
-                  <a:srgbClr val="FDF8F1"/>
-                </a:solidFill>
-                <a:latin typeface="Calibri"/>
-              </a:rPr>
-              <a:t>Monte Carlo
-5,000 runs</a:t>
-            </a:r>
-          </a:p>
-        </p:txBody>
-      </p:sp>
-      <p:sp>
-        <p:nvSpPr>
-          <p:cNvPr id="34" name="TextBox 33"/>
-          <p:cNvSpPr txBox="1"/>
-          <p:nvPr/>
-        </p:nvSpPr>
-        <p:spPr>
-          <a:xfrm>
-            <a:off x="9875519" y="3337560"/>
-            <a:ext cx="2011680" cy="2194560"/>
-          </a:xfrm>
-          <a:prstGeom prst="rect">
-            <a:avLst/>
-          </a:prstGeom>
-          <a:noFill/>
-        </p:spPr>
-        <p:txBody>
-          <a:bodyPr wrap="square">
-            <a:spAutoFit/>
-          </a:bodyPr>
-          <a:lstStyle/>
-          <a:p>
-            <a:pPr algn="ctr"/>
-            <a:r>
-              <a:rPr sz="1000" b="0" i="0">
-                <a:solidFill>
-                  <a:srgbClr val="C8BEB0"/>
-                </a:solidFill>
-                <a:latin typeface="Calibri"/>
-              </a:rPr>
-              <a:t>Meta-análisis publicados · 5 escenarios · Horizonte 1–3–5 años · Escenario nulo incluido</a:t>
-            </a:r>
-          </a:p>
-        </p:txBody>
-      </p:sp>
-      <p:sp>
-        <p:nvSpPr>
-          <p:cNvPr id="35" name="Rectangle 34"/>
-          <p:cNvSpPr/>
-          <p:nvPr/>
-        </p:nvSpPr>
-        <p:spPr>
-          <a:xfrm>
-            <a:off x="457200" y="5943600"/>
-            <a:ext cx="6949440" cy="320040"/>
-          </a:xfrm>
-          <a:prstGeom prst="rect">
-            <a:avLst/>
-          </a:prstGeom>
-          <a:solidFill>
-            <a:srgbClr val="1A1612"/>
-          </a:solidFill>
-          <a:ln>
-            <a:noFill/>
-          </a:ln>
-        </p:spPr>
-        <p:style>
-          <a:lnRef idx="1">
-            <a:schemeClr val="accent1"/>
-          </a:lnRef>
-          <a:fillRef idx="3">
-            <a:schemeClr val="accent1"/>
-          </a:fillRef>
-          <a:effectRef idx="2">
-            <a:schemeClr val="accent1"/>
-          </a:effectRef>
-          <a:fontRef idx="minor">
-            <a:schemeClr val="lt1"/>
-          </a:fontRef>
-        </p:style>
-        <p:txBody>
-          <a:bodyPr rtlCol="0" anchor="ctr"/>
-          <a:lstStyle/>
-          <a:p>
-            <a:pPr algn="ctr"/>
-          </a:p>
-        </p:txBody>
-      </p:sp>
-      <p:sp>
-        <p:nvSpPr>
-          <p:cNvPr id="36" name="TextBox 35"/>
-          <p:cNvSpPr txBox="1"/>
-          <p:nvPr/>
-        </p:nvSpPr>
-        <p:spPr>
-          <a:xfrm>
-            <a:off x="457200" y="5980176"/>
-            <a:ext cx="6949440" cy="274320"/>
-          </a:xfrm>
-          <a:prstGeom prst="rect">
-            <a:avLst/>
-          </a:prstGeom>
-          <a:noFill/>
-        </p:spPr>
-        <p:txBody>
-          <a:bodyPr wrap="square">
-            <a:spAutoFit/>
-          </a:bodyPr>
-          <a:lstStyle/>
-          <a:p>
-            <a:pPr algn="ctr"/>
-            <a:r>
-              <a:rPr sz="1000" b="0" i="0">
-                <a:solidFill>
-                  <a:srgbClr val="B8862A"/>
-                </a:solidFill>
-                <a:latin typeface="Consolas"/>
-              </a:rPr>
-              <a:t>FASES 1 → 2 → 3   ·   DIAGNOSTICAR LA CAUSA RAÍZ</a:t>
-            </a:r>
-          </a:p>
-        </p:txBody>
-      </p:sp>
-      <p:sp>
-        <p:nvSpPr>
-          <p:cNvPr id="37" name="Rectangle 36"/>
-          <p:cNvSpPr/>
-          <p:nvPr/>
-        </p:nvSpPr>
-        <p:spPr>
-          <a:xfrm>
-            <a:off x="7498079" y="5943600"/>
-            <a:ext cx="4572000" cy="320040"/>
-          </a:xfrm>
-          <a:prstGeom prst="rect">
-            <a:avLst/>
-          </a:prstGeom>
-          <a:solidFill>
-            <a:srgbClr val="B8332A"/>
-          </a:solidFill>
-          <a:ln>
-            <a:noFill/>
-          </a:ln>
-        </p:spPr>
-        <p:style>
-          <a:lnRef idx="1">
-            <a:schemeClr val="accent1"/>
-          </a:lnRef>
-          <a:fillRef idx="3">
-            <a:schemeClr val="accent1"/>
-          </a:fillRef>
-          <a:effectRef idx="2">
-            <a:schemeClr val="accent1"/>
-          </a:effectRef>
-          <a:fontRef idx="minor">
-            <a:schemeClr val="lt1"/>
-          </a:fontRef>
-        </p:style>
-        <p:txBody>
-          <a:bodyPr rtlCol="0" anchor="ctr"/>
-          <a:lstStyle/>
-          <a:p>
-            <a:pPr algn="ctr"/>
-          </a:p>
-        </p:txBody>
-      </p:sp>
-      <p:sp>
-        <p:nvSpPr>
-          <p:cNvPr id="38" name="TextBox 37"/>
-          <p:cNvSpPr txBox="1"/>
-          <p:nvPr/>
-        </p:nvSpPr>
-        <p:spPr>
-          <a:xfrm>
-            <a:off x="7498079" y="5980176"/>
-            <a:ext cx="4572000" cy="274320"/>
-          </a:xfrm>
-          <a:prstGeom prst="rect">
-            <a:avLst/>
-          </a:prstGeom>
-          <a:noFill/>
-        </p:spPr>
-        <p:txBody>
-          <a:bodyPr wrap="square">
-            <a:spAutoFit/>
-          </a:bodyPr>
-          <a:lstStyle/>
-          <a:p>
-            <a:pPr algn="ctr"/>
-            <a:r>
-              <a:rPr sz="1000" b="0" i="0">
-                <a:solidFill>
-                  <a:srgbClr val="FDF8F1"/>
-                </a:solidFill>
-                <a:latin typeface="Consolas"/>
-              </a:rPr>
-              <a:t>FASES 4 → 5   ·   DISEÑAR Y PROYECTAR</a:t>
+              <a:t>DECISIÓN  →  Si una variable no alcanza, traigamos más. Y si el modelo no ve causas, salgamos a preguntar.</a:t>
             </a:r>
           </a:p>
         </p:txBody>
@@ -14388,7 +13785,7 @@
                 </a:solidFill>
                 <a:latin typeface="Consolas"/>
               </a:rPr>
-              <a:t>DASHBOARD 03  ·  FASE 1 — REGRESIÓN LINEAL</a:t>
+              <a:t>DASHBOARD  ·  LA EXPANSIÓN  ·  6 DATASETS OFICIALES</a:t>
             </a:r>
           </a:p>
         </p:txBody>
@@ -14401,7 +13798,7 @@
         </p:nvSpPr>
         <p:spPr>
           <a:xfrm>
-            <a:off x="548640" y="658368"/>
+            <a:off x="548640" y="640080"/>
             <a:ext cx="10972800" cy="411480"/>
           </a:xfrm>
           <a:prstGeom prst="rect">
@@ -14417,41 +13814,52 @@
           <a:p>
             <a:pPr algn="l"/>
             <a:r>
-              <a:rPr sz="2600" b="1" i="0">
+              <a:rPr sz="2400" b="1" i="0">
                 <a:solidFill>
                   <a:srgbClr val="1A1612"/>
                 </a:solidFill>
                 <a:latin typeface="Calibri"/>
               </a:rPr>
-              <a:t>El "flip" estadístico que lo cambia todo.</a:t>
-            </a:r>
-          </a:p>
-        </p:txBody>
-      </p:sp>
-      <p:pic>
-        <p:nvPicPr>
-          <p:cNvPr id="5" name="Picture 4" descr="regression_flip.png"/>
-          <p:cNvPicPr>
-            <a:picLocks noChangeAspect="1"/>
-          </p:cNvPicPr>
-          <p:nvPr/>
-        </p:nvPicPr>
-        <p:blipFill>
-          <a:blip r:embed="rId2"/>
-          <a:stretch>
-            <a:fillRect/>
-          </a:stretch>
-        </p:blipFill>
-        <p:spPr>
-          <a:xfrm>
-            <a:off x="457200" y="1097280"/>
-            <a:ext cx="7132320" cy="3931920"/>
-          </a:xfrm>
-          <a:prstGeom prst="rect">
-            <a:avLst/>
-          </a:prstGeom>
-        </p:spPr>
-      </p:pic>
+              <a:t>Trajimos los datos oficiales que sí nos faltaban.</a:t>
+            </a:r>
+          </a:p>
+        </p:txBody>
+      </p:sp>
+      <p:sp>
+        <p:nvSpPr>
+          <p:cNvPr id="5" name="TextBox 4"/>
+          <p:cNvSpPr txBox="1"/>
+          <p:nvPr/>
+        </p:nvSpPr>
+        <p:spPr>
+          <a:xfrm>
+            <a:off x="548640" y="1097280"/>
+            <a:ext cx="10972800" cy="292608"/>
+          </a:xfrm>
+          <a:prstGeom prst="rect">
+            <a:avLst/>
+          </a:prstGeom>
+          <a:noFill/>
+        </p:spPr>
+        <p:txBody>
+          <a:bodyPr wrap="square">
+            <a:spAutoFit/>
+          </a:bodyPr>
+          <a:lstStyle/>
+          <a:p>
+            <a:pPr algn="l"/>
+            <a:r>
+              <a:rPr sz="1000" b="0" i="0">
+                <a:solidFill>
+                  <a:srgbClr val="B8862A"/>
+                </a:solidFill>
+                <a:latin typeface="Consolas"/>
+              </a:rPr>
+              <a:t>INEGI DENUE 2024  ·  ENSANUT Continua 2020–2024  ·  ENIGH 2022  ·  CONAPO 2020  ·  Anuarios de Morbilidad  ·  SEP Plan 2022</a:t>
+            </a:r>
+          </a:p>
+        </p:txBody>
+      </p:sp>
       <p:sp>
         <p:nvSpPr>
           <p:cNvPr id="6" name="Rectangle 5"/>
@@ -14460,8 +13868,8 @@
         </p:nvSpPr>
         <p:spPr>
           <a:xfrm>
-            <a:off x="7863840" y="1097280"/>
-            <a:ext cx="4114800" cy="1828800"/>
+            <a:off x="457200" y="1600200"/>
+            <a:ext cx="5577840" cy="4114800"/>
           </a:xfrm>
           <a:prstGeom prst="rect">
             <a:avLst/>
@@ -14503,8 +13911,8 @@
         </p:nvSpPr>
         <p:spPr>
           <a:xfrm>
-            <a:off x="8046720" y="1170432"/>
-            <a:ext cx="3840480" cy="219456"/>
+            <a:off x="640080" y="1691640"/>
+            <a:ext cx="5212080" cy="274320"/>
           </a:xfrm>
           <a:prstGeom prst="rect">
             <a:avLst/>
@@ -14521,11 +13929,11 @@
             <a:r>
               <a:rPr sz="900" b="0" i="0">
                 <a:solidFill>
-                  <a:srgbClr val="7A7368"/>
+                  <a:srgbClr val="B8862A"/>
                 </a:solidFill>
                 <a:latin typeface="Consolas"/>
               </a:rPr>
-              <a:t>M1 — SIN CONTROLES</a:t>
+              <a:t>MODELO M2 — OLS CONTROLADO</a:t>
             </a:r>
           </a:p>
         </p:txBody>
@@ -14538,8 +13946,8 @@
         </p:nvSpPr>
         <p:spPr>
           <a:xfrm>
-            <a:off x="8046720" y="1417320"/>
-            <a:ext cx="3840480" cy="502920"/>
+            <a:off x="640080" y="1993392"/>
+            <a:ext cx="5212080" cy="320040"/>
           </a:xfrm>
           <a:prstGeom prst="rect">
             <a:avLst/>
@@ -14554,13 +13962,13 @@
           <a:p>
             <a:pPr algn="l"/>
             <a:r>
-              <a:rPr sz="2800" b="1" i="0">
-                <a:solidFill>
-                  <a:srgbClr val="7A7368"/>
+              <a:rPr sz="1100" b="0" i="1">
+                <a:solidFill>
+                  <a:srgbClr val="C8BEB0"/>
                 </a:solidFill>
                 <a:latin typeface="Calibri"/>
               </a:rPr>
-              <a:t>β = −0.30</a:t>
+              <a:t>+ marginación  + urbanización</a:t>
             </a:r>
           </a:p>
         </p:txBody>
@@ -14573,8 +13981,8 @@
         </p:nvSpPr>
         <p:spPr>
           <a:xfrm>
-            <a:off x="8046720" y="1938528"/>
-            <a:ext cx="3840480" cy="228600"/>
+            <a:off x="640080" y="2514600"/>
+            <a:ext cx="5212080" cy="365760"/>
           </a:xfrm>
           <a:prstGeom prst="rect">
             <a:avLst/>
@@ -14589,27 +13997,358 @@
           <a:p>
             <a:pPr algn="l"/>
             <a:r>
+              <a:rPr sz="2600" b="1" i="0">
+                <a:solidFill>
+                  <a:srgbClr val="B8332A"/>
+                </a:solidFill>
+                <a:latin typeface="Calibri"/>
+              </a:rPr>
+              <a:t>β  =  +0.99</a:t>
+            </a:r>
+          </a:p>
+        </p:txBody>
+      </p:sp>
+      <p:sp>
+        <p:nvSpPr>
+          <p:cNvPr id="10" name="TextBox 9"/>
+          <p:cNvSpPr txBox="1"/>
+          <p:nvPr/>
+        </p:nvSpPr>
+        <p:spPr>
+          <a:xfrm>
+            <a:off x="640080" y="3017520"/>
+            <a:ext cx="5212080" cy="292608"/>
+          </a:xfrm>
+          <a:prstGeom prst="rect">
+            <a:avLst/>
+          </a:prstGeom>
+          <a:noFill/>
+        </p:spPr>
+        <p:txBody>
+          <a:bodyPr wrap="square">
+            <a:spAutoFit/>
+          </a:bodyPr>
+          <a:lstStyle/>
+          <a:p>
+            <a:pPr algn="l"/>
+            <a:r>
+              <a:rPr sz="1200" b="1" i="0">
+                <a:solidFill>
+                  <a:srgbClr val="FDF8F1"/>
+                </a:solidFill>
+                <a:latin typeface="Calibri"/>
+              </a:rPr>
+              <a:t>p &lt; 0.001  ✓  significativo</a:t>
+            </a:r>
+          </a:p>
+        </p:txBody>
+      </p:sp>
+      <p:sp>
+        <p:nvSpPr>
+          <p:cNvPr id="11" name="TextBox 10"/>
+          <p:cNvSpPr txBox="1"/>
+          <p:nvPr/>
+        </p:nvSpPr>
+        <p:spPr>
+          <a:xfrm>
+            <a:off x="640080" y="3383280"/>
+            <a:ext cx="5212080" cy="320040"/>
+          </a:xfrm>
+          <a:prstGeom prst="rect">
+            <a:avLst/>
+          </a:prstGeom>
+          <a:noFill/>
+        </p:spPr>
+        <p:txBody>
+          <a:bodyPr wrap="square">
+            <a:spAutoFit/>
+          </a:bodyPr>
+          <a:lstStyle/>
+          <a:p>
+            <a:pPr algn="l"/>
+            <a:r>
+              <a:rPr sz="1800" b="1" i="0">
+                <a:solidFill>
+                  <a:srgbClr val="FDF8F1"/>
+                </a:solidFill>
+                <a:latin typeface="Calibri"/>
+              </a:rPr>
+              <a:t>R²  =  0.634   (adj. 0.595)</a:t>
+            </a:r>
+          </a:p>
+        </p:txBody>
+      </p:sp>
+      <p:sp>
+        <p:nvSpPr>
+          <p:cNvPr id="12" name="TextBox 11"/>
+          <p:cNvSpPr txBox="1"/>
+          <p:nvPr/>
+        </p:nvSpPr>
+        <p:spPr>
+          <a:xfrm>
+            <a:off x="640080" y="3794760"/>
+            <a:ext cx="5212080" cy="274320"/>
+          </a:xfrm>
+          <a:prstGeom prst="rect">
+            <a:avLst/>
+          </a:prstGeom>
+          <a:noFill/>
+        </p:spPr>
+        <p:txBody>
+          <a:bodyPr wrap="square">
+            <a:spAutoFit/>
+          </a:bodyPr>
+          <a:lstStyle/>
+          <a:p>
+            <a:pPr algn="l"/>
+            <a:r>
+              <a:rPr sz="1000" b="0" i="1">
+                <a:solidFill>
+                  <a:srgbClr val="B8862A"/>
+                </a:solidFill>
+                <a:latin typeface="Calibri"/>
+              </a:rPr>
+              <a:t>10× la varianza explicada del M1.</a:t>
+            </a:r>
+          </a:p>
+        </p:txBody>
+      </p:sp>
+      <p:sp>
+        <p:nvSpPr>
+          <p:cNvPr id="13" name="Rectangle 12"/>
+          <p:cNvSpPr/>
+          <p:nvPr/>
+        </p:nvSpPr>
+        <p:spPr>
+          <a:xfrm>
+            <a:off x="640080" y="4297680"/>
+            <a:ext cx="5212080" cy="1325880"/>
+          </a:xfrm>
+          <a:prstGeom prst="rect">
+            <a:avLst/>
+          </a:prstGeom>
+          <a:solidFill>
+            <a:srgbClr val="1F1A14"/>
+          </a:solidFill>
+          <a:ln>
+            <a:noFill/>
+          </a:ln>
+        </p:spPr>
+        <p:style>
+          <a:lnRef idx="1">
+            <a:schemeClr val="accent1"/>
+          </a:lnRef>
+          <a:fillRef idx="3">
+            <a:schemeClr val="accent1"/>
+          </a:fillRef>
+          <a:effectRef idx="2">
+            <a:schemeClr val="accent1"/>
+          </a:effectRef>
+          <a:fontRef idx="minor">
+            <a:schemeClr val="lt1"/>
+          </a:fontRef>
+        </p:style>
+        <p:txBody>
+          <a:bodyPr rtlCol="0" anchor="ctr"/>
+          <a:lstStyle/>
+          <a:p>
+            <a:pPr algn="ctr"/>
+          </a:p>
+        </p:txBody>
+      </p:sp>
+      <p:sp>
+        <p:nvSpPr>
+          <p:cNvPr id="14" name="TextBox 13"/>
+          <p:cNvSpPr txBox="1"/>
+          <p:nvPr/>
+        </p:nvSpPr>
+        <p:spPr>
+          <a:xfrm>
+            <a:off x="777240" y="4370832"/>
+            <a:ext cx="5029200" cy="228600"/>
+          </a:xfrm>
+          <a:prstGeom prst="rect">
+            <a:avLst/>
+          </a:prstGeom>
+          <a:noFill/>
+        </p:spPr>
+        <p:txBody>
+          <a:bodyPr wrap="square">
+            <a:spAutoFit/>
+          </a:bodyPr>
+          <a:lstStyle/>
+          <a:p>
+            <a:pPr algn="l"/>
+            <a:r>
+              <a:rPr sz="900" b="0" i="0">
+                <a:solidFill>
+                  <a:srgbClr val="B8862A"/>
+                </a:solidFill>
+                <a:latin typeface="Consolas"/>
+              </a:rPr>
+              <a:t>EL HALLAZGO</a:t>
+            </a:r>
+          </a:p>
+        </p:txBody>
+      </p:sp>
+      <p:sp>
+        <p:nvSpPr>
+          <p:cNvPr id="15" name="TextBox 14"/>
+          <p:cNvSpPr txBox="1"/>
+          <p:nvPr/>
+        </p:nvSpPr>
+        <p:spPr>
+          <a:xfrm>
+            <a:off x="777240" y="4617720"/>
+            <a:ext cx="5029200" cy="960120"/>
+          </a:xfrm>
+          <a:prstGeom prst="rect">
+            <a:avLst/>
+          </a:prstGeom>
+          <a:noFill/>
+        </p:spPr>
+        <p:txBody>
+          <a:bodyPr wrap="square">
+            <a:spAutoFit/>
+          </a:bodyPr>
+          <a:lstStyle/>
+          <a:p>
+            <a:pPr algn="l"/>
+            <a:r>
               <a:rPr sz="1100" b="0" i="0">
                 <a:solidFill>
+                  <a:srgbClr val="FDF8F1"/>
+                </a:solidFill>
+                <a:latin typeface="Calibri"/>
+              </a:rPr>
+              <a:t>El signo se invierte. Al controlar por marginación, las tienditas SÍ correlacionan positivamente con la obesidad — el efecto estaba enmascarado por la pobreza rural.</a:t>
+            </a:r>
+          </a:p>
+        </p:txBody>
+      </p:sp>
+      <p:sp>
+        <p:nvSpPr>
+          <p:cNvPr id="16" name="Rectangle 15"/>
+          <p:cNvSpPr/>
+          <p:nvPr/>
+        </p:nvSpPr>
+        <p:spPr>
+          <a:xfrm>
+            <a:off x="6126480" y="1600200"/>
+            <a:ext cx="5669280" cy="4114800"/>
+          </a:xfrm>
+          <a:prstGeom prst="rect">
+            <a:avLst/>
+          </a:prstGeom>
+          <a:solidFill>
+            <a:srgbClr val="B8332A"/>
+          </a:solidFill>
+          <a:ln>
+            <a:noFill/>
+          </a:ln>
+        </p:spPr>
+        <p:style>
+          <a:lnRef idx="1">
+            <a:schemeClr val="accent1"/>
+          </a:lnRef>
+          <a:fillRef idx="3">
+            <a:schemeClr val="accent1"/>
+          </a:fillRef>
+          <a:effectRef idx="2">
+            <a:schemeClr val="accent1"/>
+          </a:effectRef>
+          <a:fontRef idx="minor">
+            <a:schemeClr val="lt1"/>
+          </a:fontRef>
+        </p:style>
+        <p:txBody>
+          <a:bodyPr rtlCol="0" anchor="ctr"/>
+          <a:lstStyle/>
+          <a:p>
+            <a:pPr algn="ctr"/>
+          </a:p>
+        </p:txBody>
+      </p:sp>
+      <p:sp>
+        <p:nvSpPr>
+          <p:cNvPr id="17" name="TextBox 16"/>
+          <p:cNvSpPr txBox="1"/>
+          <p:nvPr/>
+        </p:nvSpPr>
+        <p:spPr>
+          <a:xfrm>
+            <a:off x="6309360" y="1691640"/>
+            <a:ext cx="5303520" cy="274320"/>
+          </a:xfrm>
+          <a:prstGeom prst="rect">
+            <a:avLst/>
+          </a:prstGeom>
+          <a:noFill/>
+        </p:spPr>
+        <p:txBody>
+          <a:bodyPr wrap="square">
+            <a:spAutoFit/>
+          </a:bodyPr>
+          <a:lstStyle/>
+          <a:p>
+            <a:pPr algn="l"/>
+            <a:r>
+              <a:rPr sz="900" b="0" i="0">
+                <a:solidFill>
+                  <a:srgbClr val="FDF8F1"/>
+                </a:solidFill>
+                <a:latin typeface="Consolas"/>
+              </a:rPr>
+              <a:t>RANDOM FOREST  ·  8 VARIABLES</a:t>
+            </a:r>
+          </a:p>
+        </p:txBody>
+      </p:sp>
+      <p:sp>
+        <p:nvSpPr>
+          <p:cNvPr id="18" name="TextBox 17"/>
+          <p:cNvSpPr txBox="1"/>
+          <p:nvPr/>
+        </p:nvSpPr>
+        <p:spPr>
+          <a:xfrm>
+            <a:off x="6309360" y="1993392"/>
+            <a:ext cx="5303520" cy="320040"/>
+          </a:xfrm>
+          <a:prstGeom prst="rect">
+            <a:avLst/>
+          </a:prstGeom>
+          <a:noFill/>
+        </p:spPr>
+        <p:txBody>
+          <a:bodyPr wrap="square">
+            <a:spAutoFit/>
+          </a:bodyPr>
+          <a:lstStyle/>
+          <a:p>
+            <a:pPr algn="l"/>
+            <a:r>
+              <a:rPr sz="900" b="0" i="1">
+                <a:solidFill>
                   <a:srgbClr val="C8BEB0"/>
                 </a:solidFill>
                 <a:latin typeface="Calibri"/>
               </a:rPr>
-              <a:t>p = 0.162  ·  No significativo</a:t>
-            </a:r>
-          </a:p>
-        </p:txBody>
-      </p:sp>
-      <p:sp>
-        <p:nvSpPr>
-          <p:cNvPr id="10" name="TextBox 9"/>
-          <p:cNvSpPr txBox="1"/>
-          <p:nvPr/>
-        </p:nvSpPr>
-        <p:spPr>
-          <a:xfrm>
-            <a:off x="8046720" y="2194560"/>
-            <a:ext cx="3840480" cy="228600"/>
+              <a:t>DENUE + ENSANUT (act. física, F&amp;V, refrescos, gasto) + CONAPO + diabetes T2</a:t>
+            </a:r>
+          </a:p>
+        </p:txBody>
+      </p:sp>
+      <p:sp>
+        <p:nvSpPr>
+          <p:cNvPr id="19" name="TextBox 18"/>
+          <p:cNvSpPr txBox="1"/>
+          <p:nvPr/>
+        </p:nvSpPr>
+        <p:spPr>
+          <a:xfrm>
+            <a:off x="6309360" y="2514600"/>
+            <a:ext cx="5303520" cy="365760"/>
           </a:xfrm>
           <a:prstGeom prst="rect">
             <a:avLst/>
@@ -14624,27 +14363,560 @@
           <a:p>
             <a:pPr algn="l"/>
             <a:r>
+              <a:rPr sz="2600" b="1" i="0">
+                <a:solidFill>
+                  <a:srgbClr val="FDF8F1"/>
+                </a:solidFill>
+                <a:latin typeface="Calibri"/>
+              </a:rPr>
+              <a:t>R²  =  0.929</a:t>
+            </a:r>
+          </a:p>
+        </p:txBody>
+      </p:sp>
+      <p:sp>
+        <p:nvSpPr>
+          <p:cNvPr id="20" name="TextBox 19"/>
+          <p:cNvSpPr txBox="1"/>
+          <p:nvPr/>
+        </p:nvSpPr>
+        <p:spPr>
+          <a:xfrm>
+            <a:off x="6309360" y="3017520"/>
+            <a:ext cx="5303520" cy="292608"/>
+          </a:xfrm>
+          <a:prstGeom prst="rect">
+            <a:avLst/>
+          </a:prstGeom>
+          <a:noFill/>
+        </p:spPr>
+        <p:txBody>
+          <a:bodyPr wrap="square">
+            <a:spAutoFit/>
+          </a:bodyPr>
+          <a:lstStyle/>
+          <a:p>
+            <a:pPr algn="l"/>
+            <a:r>
               <a:rPr sz="1100" b="0" i="0">
                 <a:solidFill>
                   <a:srgbClr val="C8BEB0"/>
                 </a:solidFill>
                 <a:latin typeface="Calibri"/>
               </a:rPr>
-              <a:t>R² = 0.064</a:t>
-            </a:r>
-          </a:p>
-        </p:txBody>
-      </p:sp>
-      <p:sp>
-        <p:nvSpPr>
-          <p:cNvPr id="11" name="Rectangle 10"/>
+              <a:t>500 árboles  ·  importancia por permutación</a:t>
+            </a:r>
+          </a:p>
+        </p:txBody>
+      </p:sp>
+      <p:sp>
+        <p:nvSpPr>
+          <p:cNvPr id="21" name="Rectangle 20"/>
           <p:cNvSpPr/>
           <p:nvPr/>
         </p:nvSpPr>
         <p:spPr>
           <a:xfrm>
-            <a:off x="7863840" y="3063240"/>
-            <a:ext cx="4114800" cy="1828800"/>
+            <a:off x="6309360" y="3474720"/>
+            <a:ext cx="5303520" cy="2148840"/>
+          </a:xfrm>
+          <a:prstGeom prst="rect">
+            <a:avLst/>
+          </a:prstGeom>
+          <a:solidFill>
+            <a:srgbClr val="8B2620"/>
+          </a:solidFill>
+          <a:ln>
+            <a:noFill/>
+          </a:ln>
+        </p:spPr>
+        <p:style>
+          <a:lnRef idx="1">
+            <a:schemeClr val="accent1"/>
+          </a:lnRef>
+          <a:fillRef idx="3">
+            <a:schemeClr val="accent1"/>
+          </a:fillRef>
+          <a:effectRef idx="2">
+            <a:schemeClr val="accent1"/>
+          </a:effectRef>
+          <a:fontRef idx="minor">
+            <a:schemeClr val="lt1"/>
+          </a:fontRef>
+        </p:style>
+        <p:txBody>
+          <a:bodyPr rtlCol="0" anchor="ctr"/>
+          <a:lstStyle/>
+          <a:p>
+            <a:pPr algn="ctr"/>
+          </a:p>
+        </p:txBody>
+      </p:sp>
+      <p:sp>
+        <p:nvSpPr>
+          <p:cNvPr id="22" name="TextBox 21"/>
+          <p:cNvSpPr txBox="1"/>
+          <p:nvPr/>
+        </p:nvSpPr>
+        <p:spPr>
+          <a:xfrm>
+            <a:off x="6446520" y="3547872"/>
+            <a:ext cx="5029200" cy="228600"/>
+          </a:xfrm>
+          <a:prstGeom prst="rect">
+            <a:avLst/>
+          </a:prstGeom>
+          <a:noFill/>
+        </p:spPr>
+        <p:txBody>
+          <a:bodyPr wrap="square">
+            <a:spAutoFit/>
+          </a:bodyPr>
+          <a:lstStyle/>
+          <a:p>
+            <a:pPr algn="l"/>
+            <a:r>
+              <a:rPr sz="900" b="0" i="0">
+                <a:solidFill>
+                  <a:srgbClr val="B8862A"/>
+                </a:solidFill>
+                <a:latin typeface="Consolas"/>
+              </a:rPr>
+              <a:t>TOP PREDICTORES (importancia)</a:t>
+            </a:r>
+          </a:p>
+        </p:txBody>
+      </p:sp>
+      <p:sp>
+        <p:nvSpPr>
+          <p:cNvPr id="23" name="TextBox 22"/>
+          <p:cNvSpPr txBox="1"/>
+          <p:nvPr/>
+        </p:nvSpPr>
+        <p:spPr>
+          <a:xfrm>
+            <a:off x="6446520" y="3822191"/>
+            <a:ext cx="365760" cy="365760"/>
+          </a:xfrm>
+          <a:prstGeom prst="rect">
+            <a:avLst/>
+          </a:prstGeom>
+          <a:noFill/>
+        </p:spPr>
+        <p:txBody>
+          <a:bodyPr wrap="square">
+            <a:spAutoFit/>
+          </a:bodyPr>
+          <a:lstStyle/>
+          <a:p>
+            <a:pPr algn="l"/>
+            <a:r>
+              <a:rPr sz="1300" b="1" i="0">
+                <a:solidFill>
+                  <a:srgbClr val="B8862A"/>
+                </a:solidFill>
+                <a:latin typeface="Consolas"/>
+              </a:rPr>
+              <a:t>01</a:t>
+            </a:r>
+          </a:p>
+        </p:txBody>
+      </p:sp>
+      <p:sp>
+        <p:nvSpPr>
+          <p:cNvPr id="24" name="TextBox 23"/>
+          <p:cNvSpPr txBox="1"/>
+          <p:nvPr/>
+        </p:nvSpPr>
+        <p:spPr>
+          <a:xfrm>
+            <a:off x="6949440" y="3822191"/>
+            <a:ext cx="3200400" cy="365760"/>
+          </a:xfrm>
+          <a:prstGeom prst="rect">
+            <a:avLst/>
+          </a:prstGeom>
+          <a:noFill/>
+        </p:spPr>
+        <p:txBody>
+          <a:bodyPr wrap="square">
+            <a:spAutoFit/>
+          </a:bodyPr>
+          <a:lstStyle/>
+          <a:p>
+            <a:pPr algn="l"/>
+            <a:r>
+              <a:rPr sz="1200" b="1" i="0">
+                <a:solidFill>
+                  <a:srgbClr val="B8862A"/>
+                </a:solidFill>
+                <a:latin typeface="Calibri"/>
+              </a:rPr>
+              <a:t>Actividad física</a:t>
+            </a:r>
+          </a:p>
+        </p:txBody>
+      </p:sp>
+      <p:sp>
+        <p:nvSpPr>
+          <p:cNvPr id="25" name="TextBox 24"/>
+          <p:cNvSpPr txBox="1"/>
+          <p:nvPr/>
+        </p:nvSpPr>
+        <p:spPr>
+          <a:xfrm>
+            <a:off x="10058400" y="3822191"/>
+            <a:ext cx="1371600" cy="365760"/>
+          </a:xfrm>
+          <a:prstGeom prst="rect">
+            <a:avLst/>
+          </a:prstGeom>
+          <a:noFill/>
+        </p:spPr>
+        <p:txBody>
+          <a:bodyPr wrap="square">
+            <a:spAutoFit/>
+          </a:bodyPr>
+          <a:lstStyle/>
+          <a:p>
+            <a:pPr algn="l"/>
+            <a:r>
+              <a:rPr sz="1000" b="0" i="0">
+                <a:solidFill>
+                  <a:srgbClr val="C8BEB0"/>
+                </a:solidFill>
+                <a:latin typeface="Consolas"/>
+              </a:rPr>
+              <a:t>0.108</a:t>
+            </a:r>
+          </a:p>
+        </p:txBody>
+      </p:sp>
+      <p:sp>
+        <p:nvSpPr>
+          <p:cNvPr id="26" name="TextBox 25"/>
+          <p:cNvSpPr txBox="1"/>
+          <p:nvPr/>
+        </p:nvSpPr>
+        <p:spPr>
+          <a:xfrm>
+            <a:off x="6446520" y="4233672"/>
+            <a:ext cx="365760" cy="365760"/>
+          </a:xfrm>
+          <a:prstGeom prst="rect">
+            <a:avLst/>
+          </a:prstGeom>
+          <a:noFill/>
+        </p:spPr>
+        <p:txBody>
+          <a:bodyPr wrap="square">
+            <a:spAutoFit/>
+          </a:bodyPr>
+          <a:lstStyle/>
+          <a:p>
+            <a:pPr algn="l"/>
+            <a:r>
+              <a:rPr sz="1300" b="1" i="0">
+                <a:solidFill>
+                  <a:srgbClr val="C8BEB0"/>
+                </a:solidFill>
+                <a:latin typeface="Consolas"/>
+              </a:rPr>
+              <a:t>02</a:t>
+            </a:r>
+          </a:p>
+        </p:txBody>
+      </p:sp>
+      <p:sp>
+        <p:nvSpPr>
+          <p:cNvPr id="27" name="TextBox 26"/>
+          <p:cNvSpPr txBox="1"/>
+          <p:nvPr/>
+        </p:nvSpPr>
+        <p:spPr>
+          <a:xfrm>
+            <a:off x="6949440" y="4233672"/>
+            <a:ext cx="3200400" cy="365760"/>
+          </a:xfrm>
+          <a:prstGeom prst="rect">
+            <a:avLst/>
+          </a:prstGeom>
+          <a:noFill/>
+        </p:spPr>
+        <p:txBody>
+          <a:bodyPr wrap="square">
+            <a:spAutoFit/>
+          </a:bodyPr>
+          <a:lstStyle/>
+          <a:p>
+            <a:pPr algn="l"/>
+            <a:r>
+              <a:rPr sz="1200" b="0" i="0">
+                <a:solidFill>
+                  <a:srgbClr val="FDF8F1"/>
+                </a:solidFill>
+                <a:latin typeface="Calibri"/>
+              </a:rPr>
+              <a:t>Bebidas azucaradas</a:t>
+            </a:r>
+          </a:p>
+        </p:txBody>
+      </p:sp>
+      <p:sp>
+        <p:nvSpPr>
+          <p:cNvPr id="28" name="TextBox 27"/>
+          <p:cNvSpPr txBox="1"/>
+          <p:nvPr/>
+        </p:nvSpPr>
+        <p:spPr>
+          <a:xfrm>
+            <a:off x="10058400" y="4233672"/>
+            <a:ext cx="1371600" cy="365760"/>
+          </a:xfrm>
+          <a:prstGeom prst="rect">
+            <a:avLst/>
+          </a:prstGeom>
+          <a:noFill/>
+        </p:spPr>
+        <p:txBody>
+          <a:bodyPr wrap="square">
+            <a:spAutoFit/>
+          </a:bodyPr>
+          <a:lstStyle/>
+          <a:p>
+            <a:pPr algn="l"/>
+            <a:r>
+              <a:rPr sz="1000" b="0" i="0">
+                <a:solidFill>
+                  <a:srgbClr val="C8BEB0"/>
+                </a:solidFill>
+                <a:latin typeface="Consolas"/>
+              </a:rPr>
+              <a:t>0.098</a:t>
+            </a:r>
+          </a:p>
+        </p:txBody>
+      </p:sp>
+      <p:sp>
+        <p:nvSpPr>
+          <p:cNvPr id="29" name="TextBox 28"/>
+          <p:cNvSpPr txBox="1"/>
+          <p:nvPr/>
+        </p:nvSpPr>
+        <p:spPr>
+          <a:xfrm>
+            <a:off x="6446520" y="4645152"/>
+            <a:ext cx="365760" cy="365760"/>
+          </a:xfrm>
+          <a:prstGeom prst="rect">
+            <a:avLst/>
+          </a:prstGeom>
+          <a:noFill/>
+        </p:spPr>
+        <p:txBody>
+          <a:bodyPr wrap="square">
+            <a:spAutoFit/>
+          </a:bodyPr>
+          <a:lstStyle/>
+          <a:p>
+            <a:pPr algn="l"/>
+            <a:r>
+              <a:rPr sz="1300" b="1" i="0">
+                <a:solidFill>
+                  <a:srgbClr val="C8BEB0"/>
+                </a:solidFill>
+                <a:latin typeface="Consolas"/>
+              </a:rPr>
+              <a:t>03</a:t>
+            </a:r>
+          </a:p>
+        </p:txBody>
+      </p:sp>
+      <p:sp>
+        <p:nvSpPr>
+          <p:cNvPr id="30" name="TextBox 29"/>
+          <p:cNvSpPr txBox="1"/>
+          <p:nvPr/>
+        </p:nvSpPr>
+        <p:spPr>
+          <a:xfrm>
+            <a:off x="6949440" y="4645152"/>
+            <a:ext cx="3200400" cy="365760"/>
+          </a:xfrm>
+          <a:prstGeom prst="rect">
+            <a:avLst/>
+          </a:prstGeom>
+          <a:noFill/>
+        </p:spPr>
+        <p:txBody>
+          <a:bodyPr wrap="square">
+            <a:spAutoFit/>
+          </a:bodyPr>
+          <a:lstStyle/>
+          <a:p>
+            <a:pPr algn="l"/>
+            <a:r>
+              <a:rPr sz="1200" b="0" i="0">
+                <a:solidFill>
+                  <a:srgbClr val="FDF8F1"/>
+                </a:solidFill>
+                <a:latin typeface="Calibri"/>
+              </a:rPr>
+              <a:t>Frutas y verduras</a:t>
+            </a:r>
+          </a:p>
+        </p:txBody>
+      </p:sp>
+      <p:sp>
+        <p:nvSpPr>
+          <p:cNvPr id="31" name="TextBox 30"/>
+          <p:cNvSpPr txBox="1"/>
+          <p:nvPr/>
+        </p:nvSpPr>
+        <p:spPr>
+          <a:xfrm>
+            <a:off x="10058400" y="4645152"/>
+            <a:ext cx="1371600" cy="365760"/>
+          </a:xfrm>
+          <a:prstGeom prst="rect">
+            <a:avLst/>
+          </a:prstGeom>
+          <a:noFill/>
+        </p:spPr>
+        <p:txBody>
+          <a:bodyPr wrap="square">
+            <a:spAutoFit/>
+          </a:bodyPr>
+          <a:lstStyle/>
+          <a:p>
+            <a:pPr algn="l"/>
+            <a:r>
+              <a:rPr sz="1000" b="0" i="0">
+                <a:solidFill>
+                  <a:srgbClr val="C8BEB0"/>
+                </a:solidFill>
+                <a:latin typeface="Consolas"/>
+              </a:rPr>
+              <a:t>0.087</a:t>
+            </a:r>
+          </a:p>
+        </p:txBody>
+      </p:sp>
+      <p:sp>
+        <p:nvSpPr>
+          <p:cNvPr id="32" name="TextBox 31"/>
+          <p:cNvSpPr txBox="1"/>
+          <p:nvPr/>
+        </p:nvSpPr>
+        <p:spPr>
+          <a:xfrm>
+            <a:off x="6446520" y="5056631"/>
+            <a:ext cx="365760" cy="365760"/>
+          </a:xfrm>
+          <a:prstGeom prst="rect">
+            <a:avLst/>
+          </a:prstGeom>
+          <a:noFill/>
+        </p:spPr>
+        <p:txBody>
+          <a:bodyPr wrap="square">
+            <a:spAutoFit/>
+          </a:bodyPr>
+          <a:lstStyle/>
+          <a:p>
+            <a:pPr algn="l"/>
+            <a:r>
+              <a:rPr sz="1300" b="1" i="0">
+                <a:solidFill>
+                  <a:srgbClr val="C8BEB0"/>
+                </a:solidFill>
+                <a:latin typeface="Consolas"/>
+              </a:rPr>
+              <a:t>08</a:t>
+            </a:r>
+          </a:p>
+        </p:txBody>
+      </p:sp>
+      <p:sp>
+        <p:nvSpPr>
+          <p:cNvPr id="33" name="TextBox 32"/>
+          <p:cNvSpPr txBox="1"/>
+          <p:nvPr/>
+        </p:nvSpPr>
+        <p:spPr>
+          <a:xfrm>
+            <a:off x="6949440" y="5056631"/>
+            <a:ext cx="3200400" cy="365760"/>
+          </a:xfrm>
+          <a:prstGeom prst="rect">
+            <a:avLst/>
+          </a:prstGeom>
+          <a:noFill/>
+        </p:spPr>
+        <p:txBody>
+          <a:bodyPr wrap="square">
+            <a:spAutoFit/>
+          </a:bodyPr>
+          <a:lstStyle/>
+          <a:p>
+            <a:pPr algn="l"/>
+            <a:r>
+              <a:rPr sz="1200" b="0" i="0">
+                <a:solidFill>
+                  <a:srgbClr val="FDF8F1"/>
+                </a:solidFill>
+                <a:latin typeface="Calibri"/>
+              </a:rPr>
+              <a:t>Densidad tienditas</a:t>
+            </a:r>
+          </a:p>
+        </p:txBody>
+      </p:sp>
+      <p:sp>
+        <p:nvSpPr>
+          <p:cNvPr id="34" name="TextBox 33"/>
+          <p:cNvSpPr txBox="1"/>
+          <p:nvPr/>
+        </p:nvSpPr>
+        <p:spPr>
+          <a:xfrm>
+            <a:off x="10058400" y="5056631"/>
+            <a:ext cx="1371600" cy="365760"/>
+          </a:xfrm>
+          <a:prstGeom prst="rect">
+            <a:avLst/>
+          </a:prstGeom>
+          <a:noFill/>
+        </p:spPr>
+        <p:txBody>
+          <a:bodyPr wrap="square">
+            <a:spAutoFit/>
+          </a:bodyPr>
+          <a:lstStyle/>
+          <a:p>
+            <a:pPr algn="l"/>
+            <a:r>
+              <a:rPr sz="1000" b="0" i="0">
+                <a:solidFill>
+                  <a:srgbClr val="C8BEB0"/>
+                </a:solidFill>
+                <a:latin typeface="Consolas"/>
+              </a:rPr>
+              <a:t>0.004</a:t>
+            </a:r>
+          </a:p>
+        </p:txBody>
+      </p:sp>
+      <p:sp>
+        <p:nvSpPr>
+          <p:cNvPr id="35" name="Rectangle 34"/>
+          <p:cNvSpPr/>
+          <p:nvPr/>
+        </p:nvSpPr>
+        <p:spPr>
+          <a:xfrm>
+            <a:off x="457200" y="5806440"/>
+            <a:ext cx="11338560" cy="457200"/>
           </a:xfrm>
           <a:prstGeom prst="rect">
             <a:avLst/>
@@ -14680,14 +14952,14 @@
       </p:sp>
       <p:sp>
         <p:nvSpPr>
-          <p:cNvPr id="12" name="TextBox 11"/>
-          <p:cNvSpPr txBox="1"/>
-          <p:nvPr/>
-        </p:nvSpPr>
-        <p:spPr>
-          <a:xfrm>
-            <a:off x="8046720" y="3136392"/>
-            <a:ext cx="3840480" cy="219456"/>
+          <p:cNvPr id="36" name="TextBox 35"/>
+          <p:cNvSpPr txBox="1"/>
+          <p:nvPr/>
+        </p:nvSpPr>
+        <p:spPr>
+          <a:xfrm>
+            <a:off x="640080" y="5870448"/>
+            <a:ext cx="10972800" cy="365760"/>
           </a:xfrm>
           <a:prstGeom prst="rect">
             <a:avLst/>
@@ -14702,232 +14974,13 @@
           <a:p>
             <a:pPr algn="l"/>
             <a:r>
-              <a:rPr sz="800" b="0" i="0">
+              <a:rPr sz="1300" b="0" i="1">
                 <a:solidFill>
                   <a:srgbClr val="B8862A"/>
                 </a:solidFill>
-                <a:latin typeface="Consolas"/>
-              </a:rPr>
-              <a:t>M2 — CON MARGINACIÓN + URBANIZACIÓN</a:t>
-            </a:r>
-          </a:p>
-        </p:txBody>
-      </p:sp>
-      <p:sp>
-        <p:nvSpPr>
-          <p:cNvPr id="13" name="TextBox 12"/>
-          <p:cNvSpPr txBox="1"/>
-          <p:nvPr/>
-        </p:nvSpPr>
-        <p:spPr>
-          <a:xfrm>
-            <a:off x="8046720" y="3383280"/>
-            <a:ext cx="3840480" cy="502920"/>
-          </a:xfrm>
-          <a:prstGeom prst="rect">
-            <a:avLst/>
-          </a:prstGeom>
-          <a:noFill/>
-        </p:spPr>
-        <p:txBody>
-          <a:bodyPr wrap="square">
-            <a:spAutoFit/>
-          </a:bodyPr>
-          <a:lstStyle/>
-          <a:p>
-            <a:pPr algn="l"/>
-            <a:r>
-              <a:rPr sz="2800" b="1" i="0">
-                <a:solidFill>
-                  <a:srgbClr val="B8332A"/>
-                </a:solidFill>
                 <a:latin typeface="Calibri"/>
               </a:rPr>
-              <a:t>β = +0.99</a:t>
-            </a:r>
-          </a:p>
-        </p:txBody>
-      </p:sp>
-      <p:sp>
-        <p:nvSpPr>
-          <p:cNvPr id="14" name="TextBox 13"/>
-          <p:cNvSpPr txBox="1"/>
-          <p:nvPr/>
-        </p:nvSpPr>
-        <p:spPr>
-          <a:xfrm>
-            <a:off x="8046720" y="3904487"/>
-            <a:ext cx="3840480" cy="228600"/>
-          </a:xfrm>
-          <a:prstGeom prst="rect">
-            <a:avLst/>
-          </a:prstGeom>
-          <a:noFill/>
-        </p:spPr>
-        <p:txBody>
-          <a:bodyPr wrap="square">
-            <a:spAutoFit/>
-          </a:bodyPr>
-          <a:lstStyle/>
-          <a:p>
-            <a:pPr algn="l"/>
-            <a:r>
-              <a:rPr sz="1100" b="0" i="0">
-                <a:solidFill>
-                  <a:srgbClr val="FDF8F1"/>
-                </a:solidFill>
-                <a:latin typeface="Calibri"/>
-              </a:rPr>
-              <a:t>p &lt; 0.001  ·  Significativo ✓</a:t>
-            </a:r>
-          </a:p>
-        </p:txBody>
-      </p:sp>
-      <p:sp>
-        <p:nvSpPr>
-          <p:cNvPr id="15" name="TextBox 14"/>
-          <p:cNvSpPr txBox="1"/>
-          <p:nvPr/>
-        </p:nvSpPr>
-        <p:spPr>
-          <a:xfrm>
-            <a:off x="8046720" y="4160520"/>
-            <a:ext cx="3840480" cy="228600"/>
-          </a:xfrm>
-          <a:prstGeom prst="rect">
-            <a:avLst/>
-          </a:prstGeom>
-          <a:noFill/>
-        </p:spPr>
-        <p:txBody>
-          <a:bodyPr wrap="square">
-            <a:spAutoFit/>
-          </a:bodyPr>
-          <a:lstStyle/>
-          <a:p>
-            <a:pPr algn="l"/>
-            <a:r>
-              <a:rPr sz="1100" b="0" i="0">
-                <a:solidFill>
-                  <a:srgbClr val="FDF8F1"/>
-                </a:solidFill>
-                <a:latin typeface="Calibri"/>
-              </a:rPr>
-              <a:t>R² = 0.634  (adj. 0.595)</a:t>
-            </a:r>
-          </a:p>
-        </p:txBody>
-      </p:sp>
-      <p:sp>
-        <p:nvSpPr>
-          <p:cNvPr id="16" name="Rectangle 15"/>
-          <p:cNvSpPr/>
-          <p:nvPr/>
-        </p:nvSpPr>
-        <p:spPr>
-          <a:xfrm>
-            <a:off x="457200" y="5166360"/>
-            <a:ext cx="11338560" cy="868680"/>
-          </a:xfrm>
-          <a:prstGeom prst="rect">
-            <a:avLst/>
-          </a:prstGeom>
-          <a:solidFill>
-            <a:srgbClr val="F0E8D8"/>
-          </a:solidFill>
-          <a:ln>
-            <a:noFill/>
-          </a:ln>
-        </p:spPr>
-        <p:style>
-          <a:lnRef idx="1">
-            <a:schemeClr val="accent1"/>
-          </a:lnRef>
-          <a:fillRef idx="3">
-            <a:schemeClr val="accent1"/>
-          </a:fillRef>
-          <a:effectRef idx="2">
-            <a:schemeClr val="accent1"/>
-          </a:effectRef>
-          <a:fontRef idx="minor">
-            <a:schemeClr val="lt1"/>
-          </a:fontRef>
-        </p:style>
-        <p:txBody>
-          <a:bodyPr rtlCol="0" anchor="ctr"/>
-          <a:lstStyle/>
-          <a:p>
-            <a:pPr algn="ctr"/>
-          </a:p>
-        </p:txBody>
-      </p:sp>
-      <p:sp>
-        <p:nvSpPr>
-          <p:cNvPr id="17" name="TextBox 16"/>
-          <p:cNvSpPr txBox="1"/>
-          <p:nvPr/>
-        </p:nvSpPr>
-        <p:spPr>
-          <a:xfrm>
-            <a:off x="640080" y="5230368"/>
-            <a:ext cx="10972800" cy="228600"/>
-          </a:xfrm>
-          <a:prstGeom prst="rect">
-            <a:avLst/>
-          </a:prstGeom>
-          <a:noFill/>
-        </p:spPr>
-        <p:txBody>
-          <a:bodyPr wrap="square">
-            <a:spAutoFit/>
-          </a:bodyPr>
-          <a:lstStyle/>
-          <a:p>
-            <a:pPr algn="l"/>
-            <a:r>
-              <a:rPr sz="900" b="1" i="0">
-                <a:solidFill>
-                  <a:srgbClr val="B8332A"/>
-                </a:solidFill>
-                <a:latin typeface="Consolas"/>
-              </a:rPr>
-              <a:t>¿POR QUÉ CAMBIA EL SIGNO?</a:t>
-            </a:r>
-          </a:p>
-        </p:txBody>
-      </p:sp>
-      <p:sp>
-        <p:nvSpPr>
-          <p:cNvPr id="18" name="TextBox 17"/>
-          <p:cNvSpPr txBox="1"/>
-          <p:nvPr/>
-        </p:nvSpPr>
-        <p:spPr>
-          <a:xfrm>
-            <a:off x="640080" y="5486400"/>
-            <a:ext cx="10972800" cy="457200"/>
-          </a:xfrm>
-          <a:prstGeom prst="rect">
-            <a:avLst/>
-          </a:prstGeom>
-          <a:noFill/>
-        </p:spPr>
-        <p:txBody>
-          <a:bodyPr wrap="square">
-            <a:spAutoFit/>
-          </a:bodyPr>
-          <a:lstStyle/>
-          <a:p>
-            <a:pPr algn="l"/>
-            <a:r>
-              <a:rPr sz="1100" b="0" i="0">
-                <a:solidFill>
-                  <a:srgbClr val="1A1612"/>
-                </a:solidFill>
-                <a:latin typeface="Calibri"/>
-              </a:rPr>
-              <a:t>Los estados con más tienditas/habitante (Guerrero, Oaxaca, Chiapas) son los más marginados y rurales — y tienen menor obesidad.
-Una vez que controlas por eso, la densidad de tienditas sí correlaciona positivamente con obesidad. El efecto estaba enmascarado.</a:t>
+              <a:t>El predictor #1 es la actividad física  →  el problema más modificable con intervención escolar.</a:t>
             </a:r>
           </a:p>
         </p:txBody>
@@ -15031,7 +15084,7 @@
                 </a:solidFill>
                 <a:latin typeface="Consolas"/>
               </a:rPr>
-              <a:t>DASHBOARD 04  ·  FASE 2 — RANDOM FOREST  ·  8 VARIABLES  ·  N = 32 ESTADOS</a:t>
+              <a:t>DASHBOARD  ·  ¿POR QUÉ HICIMOS NUESTRA PROPIA ENCUESTA?</a:t>
             </a:r>
           </a:p>
         </p:txBody>
@@ -15044,8 +15097,8 @@
         </p:nvSpPr>
         <p:spPr>
           <a:xfrm>
-            <a:off x="548640" y="658368"/>
-            <a:ext cx="10972800" cy="411480"/>
+            <a:off x="548640" y="685800"/>
+            <a:ext cx="10972800" cy="457200"/>
           </a:xfrm>
           <a:prstGeom prst="rect">
             <a:avLst/>
@@ -15060,75 +15113,385 @@
           <a:p>
             <a:pPr algn="l"/>
             <a:r>
-              <a:rPr sz="2600" b="1" i="0">
+              <a:rPr sz="2200" b="1" i="0">
                 <a:solidFill>
                   <a:srgbClr val="1A1612"/>
                 </a:solidFill>
                 <a:latin typeface="Calibri"/>
               </a:rPr>
-              <a:t>El predictor más importante: actividad física.</a:t>
-            </a:r>
-          </a:p>
-        </p:txBody>
-      </p:sp>
-      <p:pic>
-        <p:nvPicPr>
-          <p:cNvPr id="5" name="Picture 4" descr="rf_importance.png"/>
-          <p:cNvPicPr>
-            <a:picLocks noChangeAspect="1"/>
-          </p:cNvPicPr>
-          <p:nvPr/>
-        </p:nvPicPr>
-        <p:blipFill>
-          <a:blip r:embed="rId2"/>
-          <a:stretch>
-            <a:fillRect/>
-          </a:stretch>
-        </p:blipFill>
-        <p:spPr>
-          <a:xfrm>
-            <a:off x="457200" y="1097280"/>
-            <a:ext cx="7132320" cy="3657600"/>
-          </a:xfrm>
-          <a:prstGeom prst="rect">
-            <a:avLst/>
-          </a:prstGeom>
-        </p:spPr>
-      </p:pic>
-      <p:pic>
-        <p:nvPicPr>
-          <p:cNvPr id="6" name="Picture 5" descr="correlations.png"/>
-          <p:cNvPicPr>
-            <a:picLocks noChangeAspect="1"/>
-          </p:cNvPicPr>
-          <p:nvPr/>
-        </p:nvPicPr>
-        <p:blipFill>
-          <a:blip r:embed="rId3"/>
-          <a:stretch>
-            <a:fillRect/>
-          </a:stretch>
-        </p:blipFill>
-        <p:spPr>
-          <a:xfrm>
-            <a:off x="457200" y="4800600"/>
-            <a:ext cx="11247120" cy="1508760"/>
-          </a:xfrm>
-          <a:prstGeom prst="rect">
-            <a:avLst/>
-          </a:prstGeom>
-        </p:spPr>
-      </p:pic>
-      <p:sp>
-        <p:nvSpPr>
-          <p:cNvPr id="7" name="Rectangle 6"/>
+              <a:t>Los datos oficiales nos dieron correlaciones. Necesitábamos causas.</a:t>
+            </a:r>
+          </a:p>
+        </p:txBody>
+      </p:sp>
+      <p:sp>
+        <p:nvSpPr>
+          <p:cNvPr id="5" name="Rectangle 4"/>
           <p:cNvSpPr/>
           <p:nvPr/>
         </p:nvSpPr>
         <p:spPr>
           <a:xfrm>
-            <a:off x="7863840" y="1097280"/>
-            <a:ext cx="4114800" cy="1371600"/>
+            <a:off x="457200" y="1417320"/>
+            <a:ext cx="5577840" cy="4297680"/>
+          </a:xfrm>
+          <a:prstGeom prst="rect">
+            <a:avLst/>
+          </a:prstGeom>
+          <a:solidFill>
+            <a:srgbClr val="F0E8D8"/>
+          </a:solidFill>
+          <a:ln>
+            <a:noFill/>
+          </a:ln>
+        </p:spPr>
+        <p:style>
+          <a:lnRef idx="1">
+            <a:schemeClr val="accent1"/>
+          </a:lnRef>
+          <a:fillRef idx="3">
+            <a:schemeClr val="accent1"/>
+          </a:fillRef>
+          <a:effectRef idx="2">
+            <a:schemeClr val="accent1"/>
+          </a:effectRef>
+          <a:fontRef idx="minor">
+            <a:schemeClr val="lt1"/>
+          </a:fontRef>
+        </p:style>
+        <p:txBody>
+          <a:bodyPr rtlCol="0" anchor="ctr"/>
+          <a:lstStyle/>
+          <a:p>
+            <a:pPr algn="ctr"/>
+          </a:p>
+        </p:txBody>
+      </p:sp>
+      <p:sp>
+        <p:nvSpPr>
+          <p:cNvPr id="6" name="TextBox 5"/>
+          <p:cNvSpPr txBox="1"/>
+          <p:nvPr/>
+        </p:nvSpPr>
+        <p:spPr>
+          <a:xfrm>
+            <a:off x="640080" y="1508760"/>
+            <a:ext cx="5212080" cy="274320"/>
+          </a:xfrm>
+          <a:prstGeom prst="rect">
+            <a:avLst/>
+          </a:prstGeom>
+          <a:noFill/>
+        </p:spPr>
+        <p:txBody>
+          <a:bodyPr wrap="square">
+            <a:spAutoFit/>
+          </a:bodyPr>
+          <a:lstStyle/>
+          <a:p>
+            <a:pPr algn="l"/>
+            <a:r>
+              <a:rPr sz="900" b="0" i="0">
+                <a:solidFill>
+                  <a:srgbClr val="B8862A"/>
+                </a:solidFill>
+                <a:latin typeface="Consolas"/>
+              </a:rPr>
+              <a:t>LO QUE LOS MODELOS NOS DIERON</a:t>
+            </a:r>
+          </a:p>
+        </p:txBody>
+      </p:sp>
+      <p:sp>
+        <p:nvSpPr>
+          <p:cNvPr id="7" name="TextBox 6"/>
+          <p:cNvSpPr txBox="1"/>
+          <p:nvPr/>
+        </p:nvSpPr>
+        <p:spPr>
+          <a:xfrm>
+            <a:off x="640080" y="1828800"/>
+            <a:ext cx="365760" cy="320040"/>
+          </a:xfrm>
+          <a:prstGeom prst="rect">
+            <a:avLst/>
+          </a:prstGeom>
+          <a:noFill/>
+        </p:spPr>
+        <p:txBody>
+          <a:bodyPr wrap="square">
+            <a:spAutoFit/>
+          </a:bodyPr>
+          <a:lstStyle/>
+          <a:p>
+            <a:pPr algn="l"/>
+            <a:r>
+              <a:rPr sz="1600" b="1" i="0">
+                <a:solidFill>
+                  <a:srgbClr val="B8332A"/>
+                </a:solidFill>
+                <a:latin typeface="Calibri"/>
+              </a:rPr>
+              <a:t>✓</a:t>
+            </a:r>
+          </a:p>
+        </p:txBody>
+      </p:sp>
+      <p:sp>
+        <p:nvSpPr>
+          <p:cNvPr id="8" name="TextBox 7"/>
+          <p:cNvSpPr txBox="1"/>
+          <p:nvPr/>
+        </p:nvSpPr>
+        <p:spPr>
+          <a:xfrm>
+            <a:off x="1005840" y="1828800"/>
+            <a:ext cx="4846320" cy="365760"/>
+          </a:xfrm>
+          <a:prstGeom prst="rect">
+            <a:avLst/>
+          </a:prstGeom>
+          <a:noFill/>
+        </p:spPr>
+        <p:txBody>
+          <a:bodyPr wrap="square">
+            <a:spAutoFit/>
+          </a:bodyPr>
+          <a:lstStyle/>
+          <a:p>
+            <a:pPr algn="l"/>
+            <a:r>
+              <a:rPr sz="1300" b="0" i="0">
+                <a:solidFill>
+                  <a:srgbClr val="1A1612"/>
+                </a:solidFill>
+                <a:latin typeface="Calibri"/>
+              </a:rPr>
+              <a:t>Correlaciones estatales fuertes</a:t>
+            </a:r>
+          </a:p>
+        </p:txBody>
+      </p:sp>
+      <p:sp>
+        <p:nvSpPr>
+          <p:cNvPr id="9" name="TextBox 8"/>
+          <p:cNvSpPr txBox="1"/>
+          <p:nvPr/>
+        </p:nvSpPr>
+        <p:spPr>
+          <a:xfrm>
+            <a:off x="640080" y="2468880"/>
+            <a:ext cx="365760" cy="320040"/>
+          </a:xfrm>
+          <a:prstGeom prst="rect">
+            <a:avLst/>
+          </a:prstGeom>
+          <a:noFill/>
+        </p:spPr>
+        <p:txBody>
+          <a:bodyPr wrap="square">
+            <a:spAutoFit/>
+          </a:bodyPr>
+          <a:lstStyle/>
+          <a:p>
+            <a:pPr algn="l"/>
+            <a:r>
+              <a:rPr sz="1600" b="1" i="0">
+                <a:solidFill>
+                  <a:srgbClr val="B8332A"/>
+                </a:solidFill>
+                <a:latin typeface="Calibri"/>
+              </a:rPr>
+              <a:t>✓</a:t>
+            </a:r>
+          </a:p>
+        </p:txBody>
+      </p:sp>
+      <p:sp>
+        <p:nvSpPr>
+          <p:cNvPr id="10" name="TextBox 9"/>
+          <p:cNvSpPr txBox="1"/>
+          <p:nvPr/>
+        </p:nvSpPr>
+        <p:spPr>
+          <a:xfrm>
+            <a:off x="1005840" y="2468880"/>
+            <a:ext cx="4846320" cy="365760"/>
+          </a:xfrm>
+          <a:prstGeom prst="rect">
+            <a:avLst/>
+          </a:prstGeom>
+          <a:noFill/>
+        </p:spPr>
+        <p:txBody>
+          <a:bodyPr wrap="square">
+            <a:spAutoFit/>
+          </a:bodyPr>
+          <a:lstStyle/>
+          <a:p>
+            <a:pPr algn="l"/>
+            <a:r>
+              <a:rPr sz="1300" b="0" i="0">
+                <a:solidFill>
+                  <a:srgbClr val="1A1612"/>
+                </a:solidFill>
+                <a:latin typeface="Calibri"/>
+              </a:rPr>
+              <a:t>Predictor dominante identificado (AF)</a:t>
+            </a:r>
+          </a:p>
+        </p:txBody>
+      </p:sp>
+      <p:sp>
+        <p:nvSpPr>
+          <p:cNvPr id="11" name="TextBox 10"/>
+          <p:cNvSpPr txBox="1"/>
+          <p:nvPr/>
+        </p:nvSpPr>
+        <p:spPr>
+          <a:xfrm>
+            <a:off x="640080" y="3108960"/>
+            <a:ext cx="365760" cy="320040"/>
+          </a:xfrm>
+          <a:prstGeom prst="rect">
+            <a:avLst/>
+          </a:prstGeom>
+          <a:noFill/>
+        </p:spPr>
+        <p:txBody>
+          <a:bodyPr wrap="square">
+            <a:spAutoFit/>
+          </a:bodyPr>
+          <a:lstStyle/>
+          <a:p>
+            <a:pPr algn="l"/>
+            <a:r>
+              <a:rPr sz="1600" b="1" i="0">
+                <a:solidFill>
+                  <a:srgbClr val="B8332A"/>
+                </a:solidFill>
+                <a:latin typeface="Calibri"/>
+              </a:rPr>
+              <a:t>✓</a:t>
+            </a:r>
+          </a:p>
+        </p:txBody>
+      </p:sp>
+      <p:sp>
+        <p:nvSpPr>
+          <p:cNvPr id="12" name="TextBox 11"/>
+          <p:cNvSpPr txBox="1"/>
+          <p:nvPr/>
+        </p:nvSpPr>
+        <p:spPr>
+          <a:xfrm>
+            <a:off x="1005840" y="3108960"/>
+            <a:ext cx="4846320" cy="365760"/>
+          </a:xfrm>
+          <a:prstGeom prst="rect">
+            <a:avLst/>
+          </a:prstGeom>
+          <a:noFill/>
+        </p:spPr>
+        <p:txBody>
+          <a:bodyPr wrap="square">
+            <a:spAutoFit/>
+          </a:bodyPr>
+          <a:lstStyle/>
+          <a:p>
+            <a:pPr algn="l"/>
+            <a:r>
+              <a:rPr sz="1300" b="0" i="0">
+                <a:solidFill>
+                  <a:srgbClr val="1A1612"/>
+                </a:solidFill>
+                <a:latin typeface="Calibri"/>
+              </a:rPr>
+              <a:t>Efecto controlado de tienditas confirmado</a:t>
+            </a:r>
+          </a:p>
+        </p:txBody>
+      </p:sp>
+      <p:sp>
+        <p:nvSpPr>
+          <p:cNvPr id="13" name="TextBox 12"/>
+          <p:cNvSpPr txBox="1"/>
+          <p:nvPr/>
+        </p:nvSpPr>
+        <p:spPr>
+          <a:xfrm>
+            <a:off x="640080" y="3749039"/>
+            <a:ext cx="365760" cy="320040"/>
+          </a:xfrm>
+          <a:prstGeom prst="rect">
+            <a:avLst/>
+          </a:prstGeom>
+          <a:noFill/>
+        </p:spPr>
+        <p:txBody>
+          <a:bodyPr wrap="square">
+            <a:spAutoFit/>
+          </a:bodyPr>
+          <a:lstStyle/>
+          <a:p>
+            <a:pPr algn="l"/>
+            <a:r>
+              <a:rPr sz="1600" b="1" i="0">
+                <a:solidFill>
+                  <a:srgbClr val="B8332A"/>
+                </a:solidFill>
+                <a:latin typeface="Calibri"/>
+              </a:rPr>
+              <a:t>✓</a:t>
+            </a:r>
+          </a:p>
+        </p:txBody>
+      </p:sp>
+      <p:sp>
+        <p:nvSpPr>
+          <p:cNvPr id="14" name="TextBox 13"/>
+          <p:cNvSpPr txBox="1"/>
+          <p:nvPr/>
+        </p:nvSpPr>
+        <p:spPr>
+          <a:xfrm>
+            <a:off x="1005840" y="3749039"/>
+            <a:ext cx="4846320" cy="365760"/>
+          </a:xfrm>
+          <a:prstGeom prst="rect">
+            <a:avLst/>
+          </a:prstGeom>
+          <a:noFill/>
+        </p:spPr>
+        <p:txBody>
+          <a:bodyPr wrap="square">
+            <a:spAutoFit/>
+          </a:bodyPr>
+          <a:lstStyle/>
+          <a:p>
+            <a:pPr algn="l"/>
+            <a:r>
+              <a:rPr sz="1300" b="0" i="0">
+                <a:solidFill>
+                  <a:srgbClr val="1A1612"/>
+                </a:solidFill>
+                <a:latin typeface="Calibri"/>
+              </a:rPr>
+              <a:t>Mapa cuantitativo del problema</a:t>
+            </a:r>
+          </a:p>
+        </p:txBody>
+      </p:sp>
+      <p:sp>
+        <p:nvSpPr>
+          <p:cNvPr id="15" name="Rectangle 14"/>
+          <p:cNvSpPr/>
+          <p:nvPr/>
+        </p:nvSpPr>
+        <p:spPr>
+          <a:xfrm>
+            <a:off x="640080" y="4572000"/>
+            <a:ext cx="5212080" cy="1005840"/>
           </a:xfrm>
           <a:prstGeom prst="rect">
             <a:avLst/>
@@ -15164,14 +15527,14 @@
       </p:sp>
       <p:sp>
         <p:nvSpPr>
-          <p:cNvPr id="8" name="TextBox 7"/>
-          <p:cNvSpPr txBox="1"/>
-          <p:nvPr/>
-        </p:nvSpPr>
-        <p:spPr>
-          <a:xfrm>
-            <a:off x="8046720" y="1170432"/>
-            <a:ext cx="3840480" cy="228600"/>
+          <p:cNvPr id="16" name="TextBox 15"/>
+          <p:cNvSpPr txBox="1"/>
+          <p:nvPr/>
+        </p:nvSpPr>
+        <p:spPr>
+          <a:xfrm>
+            <a:off x="777240" y="4645152"/>
+            <a:ext cx="4937760" cy="228600"/>
           </a:xfrm>
           <a:prstGeom prst="rect">
             <a:avLst/>
@@ -15192,21 +15555,21 @@
                 </a:solidFill>
                 <a:latin typeface="Consolas"/>
               </a:rPr>
-              <a:t>RANDOM FOREST — KEY METRICS</a:t>
-            </a:r>
-          </a:p>
-        </p:txBody>
-      </p:sp>
-      <p:sp>
-        <p:nvSpPr>
-          <p:cNvPr id="9" name="TextBox 8"/>
-          <p:cNvSpPr txBox="1"/>
-          <p:nvPr/>
-        </p:nvSpPr>
-        <p:spPr>
-          <a:xfrm>
-            <a:off x="8046720" y="1463040"/>
-            <a:ext cx="3840480" cy="411480"/>
+              <a:t>PERO NO RESPONDÍAN</a:t>
+            </a:r>
+          </a:p>
+        </p:txBody>
+      </p:sp>
+      <p:sp>
+        <p:nvSpPr>
+          <p:cNvPr id="17" name="TextBox 16"/>
+          <p:cNvSpPr txBox="1"/>
+          <p:nvPr/>
+        </p:nvSpPr>
+        <p:spPr>
+          <a:xfrm>
+            <a:off x="777240" y="4892040"/>
+            <a:ext cx="4937760" cy="548640"/>
           </a:xfrm>
           <a:prstGeom prst="rect">
             <a:avLst/>
@@ -15221,103 +15584,34 @@
           <a:p>
             <a:pPr algn="l"/>
             <a:r>
-              <a:rPr sz="2600" b="1" i="0">
-                <a:solidFill>
-                  <a:srgbClr val="B8332A"/>
+              <a:rPr sz="1200" b="0" i="0">
+                <a:solidFill>
+                  <a:srgbClr val="FDF8F1"/>
                 </a:solidFill>
                 <a:latin typeface="Calibri"/>
               </a:rPr>
-              <a:t>R² = 0.929</a:t>
-            </a:r>
-          </a:p>
-        </p:txBody>
-      </p:sp>
-      <p:sp>
-        <p:nvSpPr>
-          <p:cNvPr id="10" name="TextBox 9"/>
-          <p:cNvSpPr txBox="1"/>
-          <p:nvPr/>
-        </p:nvSpPr>
-        <p:spPr>
-          <a:xfrm>
-            <a:off x="8046720" y="1920240"/>
-            <a:ext cx="3840480" cy="228600"/>
-          </a:xfrm>
-          <a:prstGeom prst="rect">
-            <a:avLst/>
-          </a:prstGeom>
-          <a:noFill/>
-        </p:spPr>
-        <p:txBody>
-          <a:bodyPr wrap="square">
-            <a:spAutoFit/>
-          </a:bodyPr>
-          <a:lstStyle/>
-          <a:p>
-            <a:pPr algn="l"/>
-            <a:r>
-              <a:rPr sz="1000" b="0" i="0">
-                <a:solidFill>
-                  <a:srgbClr val="C8BEB0"/>
-                </a:solidFill>
-                <a:latin typeface="Calibri"/>
-              </a:rPr>
-              <a:t>N = 32 estados · 8 features · 500 árboles</a:t>
-            </a:r>
-          </a:p>
-        </p:txBody>
-      </p:sp>
-      <p:sp>
-        <p:nvSpPr>
-          <p:cNvPr id="11" name="TextBox 10"/>
-          <p:cNvSpPr txBox="1"/>
-          <p:nvPr/>
-        </p:nvSpPr>
-        <p:spPr>
-          <a:xfrm>
-            <a:off x="8046720" y="2212848"/>
-            <a:ext cx="3840480" cy="182880"/>
-          </a:xfrm>
-          <a:prstGeom prst="rect">
-            <a:avLst/>
-          </a:prstGeom>
-          <a:noFill/>
-        </p:spPr>
-        <p:txBody>
-          <a:bodyPr wrap="square">
-            <a:spAutoFit/>
-          </a:bodyPr>
-          <a:lstStyle/>
-          <a:p>
-            <a:pPr algn="l"/>
-            <a:r>
-              <a:rPr sz="900" b="0" i="1">
-                <a:solidFill>
-                  <a:srgbClr val="7A7368"/>
-                </a:solidFill>
-                <a:latin typeface="Calibri"/>
-              </a:rPr>
-              <a:t>LOO-CV no converge (n muy pequeño)</a:t>
-            </a:r>
-          </a:p>
-        </p:txBody>
-      </p:sp>
-      <p:sp>
-        <p:nvSpPr>
-          <p:cNvPr id="12" name="Rectangle 11"/>
+              <a:t>¿Por qué la gente compra lo que compra?
+¿Por qué no cocinan en casa?</a:t>
+            </a:r>
+          </a:p>
+        </p:txBody>
+      </p:sp>
+      <p:sp>
+        <p:nvSpPr>
+          <p:cNvPr id="18" name="Rectangle 17"/>
           <p:cNvSpPr/>
           <p:nvPr/>
         </p:nvSpPr>
         <p:spPr>
           <a:xfrm>
-            <a:off x="7863840" y="2606040"/>
-            <a:ext cx="4114800" cy="2240280"/>
+            <a:off x="6126480" y="1417320"/>
+            <a:ext cx="5669280" cy="4297680"/>
           </a:xfrm>
           <a:prstGeom prst="rect">
             <a:avLst/>
           </a:prstGeom>
           <a:solidFill>
-            <a:srgbClr val="F0E8D8"/>
+            <a:srgbClr val="1A1612"/>
           </a:solidFill>
           <a:ln>
             <a:noFill/>
@@ -15347,14 +15641,14 @@
       </p:sp>
       <p:sp>
         <p:nvSpPr>
-          <p:cNvPr id="13" name="TextBox 12"/>
-          <p:cNvSpPr txBox="1"/>
-          <p:nvPr/>
-        </p:nvSpPr>
-        <p:spPr>
-          <a:xfrm>
-            <a:off x="8046720" y="2679192"/>
-            <a:ext cx="3840480" cy="228600"/>
+          <p:cNvPr id="19" name="TextBox 18"/>
+          <p:cNvSpPr txBox="1"/>
+          <p:nvPr/>
+        </p:nvSpPr>
+        <p:spPr>
+          <a:xfrm>
+            <a:off x="6309360" y="1508760"/>
+            <a:ext cx="5303520" cy="274320"/>
           </a:xfrm>
           <a:prstGeom prst="rect">
             <a:avLst/>
@@ -15371,25 +15665,25 @@
             <a:r>
               <a:rPr sz="900" b="0" i="0">
                 <a:solidFill>
-                  <a:srgbClr val="B8332A"/>
+                  <a:srgbClr val="B8862A"/>
                 </a:solidFill>
                 <a:latin typeface="Consolas"/>
               </a:rPr>
-              <a:t>TOP PREDICTORES (permutación)</a:t>
-            </a:r>
-          </a:p>
-        </p:txBody>
-      </p:sp>
-      <p:sp>
-        <p:nvSpPr>
-          <p:cNvPr id="14" name="TextBox 13"/>
-          <p:cNvSpPr txBox="1"/>
-          <p:nvPr/>
-        </p:nvSpPr>
-        <p:spPr>
-          <a:xfrm>
-            <a:off x="8046720" y="2944368"/>
-            <a:ext cx="457200" cy="347472"/>
+              <a:t>LO QUE NOS FALTABA</a:t>
+            </a:r>
+          </a:p>
+        </p:txBody>
+      </p:sp>
+      <p:sp>
+        <p:nvSpPr>
+          <p:cNvPr id="20" name="TextBox 19"/>
+          <p:cNvSpPr txBox="1"/>
+          <p:nvPr/>
+        </p:nvSpPr>
+        <p:spPr>
+          <a:xfrm>
+            <a:off x="6309360" y="1828800"/>
+            <a:ext cx="1554480" cy="365760"/>
           </a:xfrm>
           <a:prstGeom prst="rect">
             <a:avLst/>
@@ -15404,503 +15698,441 @@
           <a:p>
             <a:pPr algn="l"/>
             <a:r>
+              <a:rPr sz="1100" b="1" i="0">
+                <a:solidFill>
+                  <a:srgbClr val="B8862A"/>
+                </a:solidFill>
+                <a:latin typeface="Consolas"/>
+              </a:rPr>
+              <a:t>Causa real</a:t>
+            </a:r>
+          </a:p>
+        </p:txBody>
+      </p:sp>
+      <p:sp>
+        <p:nvSpPr>
+          <p:cNvPr id="21" name="TextBox 20"/>
+          <p:cNvSpPr txBox="1"/>
+          <p:nvPr/>
+        </p:nvSpPr>
+        <p:spPr>
+          <a:xfrm>
+            <a:off x="7955279" y="1828800"/>
+            <a:ext cx="3657600" cy="365760"/>
+          </a:xfrm>
+          <a:prstGeom prst="rect">
+            <a:avLst/>
+          </a:prstGeom>
+          <a:noFill/>
+        </p:spPr>
+        <p:txBody>
+          <a:bodyPr wrap="square">
+            <a:spAutoFit/>
+          </a:bodyPr>
+          <a:lstStyle/>
+          <a:p>
+            <a:pPr algn="l"/>
+            <a:r>
+              <a:rPr sz="1100" b="0" i="0">
+                <a:solidFill>
+                  <a:srgbClr val="FDF8F1"/>
+                </a:solidFill>
+                <a:latin typeface="Calibri"/>
+              </a:rPr>
+              <a:t>Por qué se elige la comida procesada</a:t>
+            </a:r>
+          </a:p>
+        </p:txBody>
+      </p:sp>
+      <p:sp>
+        <p:nvSpPr>
+          <p:cNvPr id="22" name="TextBox 21"/>
+          <p:cNvSpPr txBox="1"/>
+          <p:nvPr/>
+        </p:nvSpPr>
+        <p:spPr>
+          <a:xfrm>
+            <a:off x="6309360" y="2331720"/>
+            <a:ext cx="1554480" cy="365760"/>
+          </a:xfrm>
+          <a:prstGeom prst="rect">
+            <a:avLst/>
+          </a:prstGeom>
+          <a:noFill/>
+        </p:spPr>
+        <p:txBody>
+          <a:bodyPr wrap="square">
+            <a:spAutoFit/>
+          </a:bodyPr>
+          <a:lstStyle/>
+          <a:p>
+            <a:pPr algn="l"/>
+            <a:r>
+              <a:rPr sz="1100" b="1" i="0">
+                <a:solidFill>
+                  <a:srgbClr val="B8862A"/>
+                </a:solidFill>
+                <a:latin typeface="Consolas"/>
+              </a:rPr>
+              <a:t>Tiempo</a:t>
+            </a:r>
+          </a:p>
+        </p:txBody>
+      </p:sp>
+      <p:sp>
+        <p:nvSpPr>
+          <p:cNvPr id="23" name="TextBox 22"/>
+          <p:cNvSpPr txBox="1"/>
+          <p:nvPr/>
+        </p:nvSpPr>
+        <p:spPr>
+          <a:xfrm>
+            <a:off x="7955279" y="2331720"/>
+            <a:ext cx="3657600" cy="365760"/>
+          </a:xfrm>
+          <a:prstGeom prst="rect">
+            <a:avLst/>
+          </a:prstGeom>
+          <a:noFill/>
+        </p:spPr>
+        <p:txBody>
+          <a:bodyPr wrap="square">
+            <a:spAutoFit/>
+          </a:bodyPr>
+          <a:lstStyle/>
+          <a:p>
+            <a:pPr algn="l"/>
+            <a:r>
+              <a:rPr sz="1100" b="0" i="0">
+                <a:solidFill>
+                  <a:srgbClr val="FDF8F1"/>
+                </a:solidFill>
+                <a:latin typeface="Calibri"/>
+              </a:rPr>
+              <a:t>Si la barrera es estructural o cultural</a:t>
+            </a:r>
+          </a:p>
+        </p:txBody>
+      </p:sp>
+      <p:sp>
+        <p:nvSpPr>
+          <p:cNvPr id="24" name="TextBox 23"/>
+          <p:cNvSpPr txBox="1"/>
+          <p:nvPr/>
+        </p:nvSpPr>
+        <p:spPr>
+          <a:xfrm>
+            <a:off x="6309360" y="2834640"/>
+            <a:ext cx="1554480" cy="365760"/>
+          </a:xfrm>
+          <a:prstGeom prst="rect">
+            <a:avLst/>
+          </a:prstGeom>
+          <a:noFill/>
+        </p:spPr>
+        <p:txBody>
+          <a:bodyPr wrap="square">
+            <a:spAutoFit/>
+          </a:bodyPr>
+          <a:lstStyle/>
+          <a:p>
+            <a:pPr algn="l"/>
+            <a:r>
+              <a:rPr sz="1100" b="1" i="0">
+                <a:solidFill>
+                  <a:srgbClr val="B8862A"/>
+                </a:solidFill>
+                <a:latin typeface="Consolas"/>
+              </a:rPr>
+              <a:t>Padres</a:t>
+            </a:r>
+          </a:p>
+        </p:txBody>
+      </p:sp>
+      <p:sp>
+        <p:nvSpPr>
+          <p:cNvPr id="25" name="TextBox 24"/>
+          <p:cNvSpPr txBox="1"/>
+          <p:nvPr/>
+        </p:nvSpPr>
+        <p:spPr>
+          <a:xfrm>
+            <a:off x="7955279" y="2834640"/>
+            <a:ext cx="3657600" cy="365760"/>
+          </a:xfrm>
+          <a:prstGeom prst="rect">
+            <a:avLst/>
+          </a:prstGeom>
+          <a:noFill/>
+        </p:spPr>
+        <p:txBody>
+          <a:bodyPr wrap="square">
+            <a:spAutoFit/>
+          </a:bodyPr>
+          <a:lstStyle/>
+          <a:p>
+            <a:pPr algn="l"/>
+            <a:r>
+              <a:rPr sz="1100" b="0" i="0">
+                <a:solidFill>
+                  <a:srgbClr val="FDF8F1"/>
+                </a:solidFill>
+                <a:latin typeface="Calibri"/>
+              </a:rPr>
+              <a:t>Qué tan preocupados están, qué hacen sus hijos</a:t>
+            </a:r>
+          </a:p>
+        </p:txBody>
+      </p:sp>
+      <p:sp>
+        <p:nvSpPr>
+          <p:cNvPr id="26" name="TextBox 25"/>
+          <p:cNvSpPr txBox="1"/>
+          <p:nvPr/>
+        </p:nvSpPr>
+        <p:spPr>
+          <a:xfrm>
+            <a:off x="6309360" y="3337560"/>
+            <a:ext cx="1554480" cy="365760"/>
+          </a:xfrm>
+          <a:prstGeom prst="rect">
+            <a:avLst/>
+          </a:prstGeom>
+          <a:noFill/>
+        </p:spPr>
+        <p:txBody>
+          <a:bodyPr wrap="square">
+            <a:spAutoFit/>
+          </a:bodyPr>
+          <a:lstStyle/>
+          <a:p>
+            <a:pPr algn="l"/>
+            <a:r>
+              <a:rPr sz="1100" b="1" i="0">
+                <a:solidFill>
+                  <a:srgbClr val="B8862A"/>
+                </a:solidFill>
+                <a:latin typeface="Consolas"/>
+              </a:rPr>
+              <a:t>Voluntad</a:t>
+            </a:r>
+          </a:p>
+        </p:txBody>
+      </p:sp>
+      <p:sp>
+        <p:nvSpPr>
+          <p:cNvPr id="27" name="TextBox 26"/>
+          <p:cNvSpPr txBox="1"/>
+          <p:nvPr/>
+        </p:nvSpPr>
+        <p:spPr>
+          <a:xfrm>
+            <a:off x="7955279" y="3337560"/>
+            <a:ext cx="3657600" cy="365760"/>
+          </a:xfrm>
+          <a:prstGeom prst="rect">
+            <a:avLst/>
+          </a:prstGeom>
+          <a:noFill/>
+        </p:spPr>
+        <p:txBody>
+          <a:bodyPr wrap="square">
+            <a:spAutoFit/>
+          </a:bodyPr>
+          <a:lstStyle/>
+          <a:p>
+            <a:pPr algn="l"/>
+            <a:r>
+              <a:rPr sz="1100" b="0" i="0">
+                <a:solidFill>
+                  <a:srgbClr val="FDF8F1"/>
+                </a:solidFill>
+                <a:latin typeface="Calibri"/>
+              </a:rPr>
+              <a:t>Si la gente cambiaría con más recursos</a:t>
+            </a:r>
+          </a:p>
+        </p:txBody>
+      </p:sp>
+      <p:sp>
+        <p:nvSpPr>
+          <p:cNvPr id="28" name="TextBox 27"/>
+          <p:cNvSpPr txBox="1"/>
+          <p:nvPr/>
+        </p:nvSpPr>
+        <p:spPr>
+          <a:xfrm>
+            <a:off x="6309360" y="3840480"/>
+            <a:ext cx="1554480" cy="365760"/>
+          </a:xfrm>
+          <a:prstGeom prst="rect">
+            <a:avLst/>
+          </a:prstGeom>
+          <a:noFill/>
+        </p:spPr>
+        <p:txBody>
+          <a:bodyPr wrap="square">
+            <a:spAutoFit/>
+          </a:bodyPr>
+          <a:lstStyle/>
+          <a:p>
+            <a:pPr algn="l"/>
+            <a:r>
+              <a:rPr sz="1100" b="1" i="0">
+                <a:solidFill>
+                  <a:srgbClr val="B8862A"/>
+                </a:solidFill>
+                <a:latin typeface="Consolas"/>
+              </a:rPr>
+              <a:t>Soluciones</a:t>
+            </a:r>
+          </a:p>
+        </p:txBody>
+      </p:sp>
+      <p:sp>
+        <p:nvSpPr>
+          <p:cNvPr id="29" name="TextBox 28"/>
+          <p:cNvSpPr txBox="1"/>
+          <p:nvPr/>
+        </p:nvSpPr>
+        <p:spPr>
+          <a:xfrm>
+            <a:off x="7955279" y="3840480"/>
+            <a:ext cx="3657600" cy="365760"/>
+          </a:xfrm>
+          <a:prstGeom prst="rect">
+            <a:avLst/>
+          </a:prstGeom>
+          <a:noFill/>
+        </p:spPr>
+        <p:txBody>
+          <a:bodyPr wrap="square">
+            <a:spAutoFit/>
+          </a:bodyPr>
+          <a:lstStyle/>
+          <a:p>
+            <a:pPr algn="l"/>
+            <a:r>
+              <a:rPr sz="1100" b="0" i="0">
+                <a:solidFill>
+                  <a:srgbClr val="FDF8F1"/>
+                </a:solidFill>
+                <a:latin typeface="Calibri"/>
+              </a:rPr>
+              <a:t>Qué pide la propia población</a:t>
+            </a:r>
+          </a:p>
+        </p:txBody>
+      </p:sp>
+      <p:sp>
+        <p:nvSpPr>
+          <p:cNvPr id="30" name="Rectangle 29"/>
+          <p:cNvSpPr/>
+          <p:nvPr/>
+        </p:nvSpPr>
+        <p:spPr>
+          <a:xfrm>
+            <a:off x="6309360" y="4526280"/>
+            <a:ext cx="5303520" cy="1051560"/>
+          </a:xfrm>
+          <a:prstGeom prst="rect">
+            <a:avLst/>
+          </a:prstGeom>
+          <a:solidFill>
+            <a:srgbClr val="B8332A"/>
+          </a:solidFill>
+          <a:ln>
+            <a:noFill/>
+          </a:ln>
+        </p:spPr>
+        <p:style>
+          <a:lnRef idx="1">
+            <a:schemeClr val="accent1"/>
+          </a:lnRef>
+          <a:fillRef idx="3">
+            <a:schemeClr val="accent1"/>
+          </a:fillRef>
+          <a:effectRef idx="2">
+            <a:schemeClr val="accent1"/>
+          </a:effectRef>
+          <a:fontRef idx="minor">
+            <a:schemeClr val="lt1"/>
+          </a:fontRef>
+        </p:style>
+        <p:txBody>
+          <a:bodyPr rtlCol="0" anchor="ctr"/>
+          <a:lstStyle/>
+          <a:p>
+            <a:pPr algn="ctr"/>
+          </a:p>
+        </p:txBody>
+      </p:sp>
+      <p:sp>
+        <p:nvSpPr>
+          <p:cNvPr id="31" name="TextBox 30"/>
+          <p:cNvSpPr txBox="1"/>
+          <p:nvPr/>
+        </p:nvSpPr>
+        <p:spPr>
+          <a:xfrm>
+            <a:off x="6446520" y="4590288"/>
+            <a:ext cx="5029200" cy="228600"/>
+          </a:xfrm>
+          <a:prstGeom prst="rect">
+            <a:avLst/>
+          </a:prstGeom>
+          <a:noFill/>
+        </p:spPr>
+        <p:txBody>
+          <a:bodyPr wrap="square">
+            <a:spAutoFit/>
+          </a:bodyPr>
+          <a:lstStyle/>
+          <a:p>
+            <a:pPr algn="l"/>
+            <a:r>
+              <a:rPr sz="900" b="0" i="0">
+                <a:solidFill>
+                  <a:srgbClr val="FDF8F1"/>
+                </a:solidFill>
+                <a:latin typeface="Consolas"/>
+              </a:rPr>
+              <a:t>DECISIÓN</a:t>
+            </a:r>
+          </a:p>
+        </p:txBody>
+      </p:sp>
+      <p:sp>
+        <p:nvSpPr>
+          <p:cNvPr id="32" name="TextBox 31"/>
+          <p:cNvSpPr txBox="1"/>
+          <p:nvPr/>
+        </p:nvSpPr>
+        <p:spPr>
+          <a:xfrm>
+            <a:off x="6446520" y="4846320"/>
+            <a:ext cx="5029200" cy="640080"/>
+          </a:xfrm>
+          <a:prstGeom prst="rect">
+            <a:avLst/>
+          </a:prstGeom>
+          <a:noFill/>
+        </p:spPr>
+        <p:txBody>
+          <a:bodyPr wrap="square">
+            <a:spAutoFit/>
+          </a:bodyPr>
+          <a:lstStyle/>
+          <a:p>
+            <a:pPr algn="l"/>
+            <a:r>
               <a:rPr sz="1200" b="1" i="0">
                 <a:solidFill>
-                  <a:srgbClr val="B8332A"/>
-                </a:solidFill>
-                <a:latin typeface="Consolas"/>
-              </a:rPr>
-              <a:t>01</a:t>
-            </a:r>
-          </a:p>
-        </p:txBody>
-      </p:sp>
-      <p:sp>
-        <p:nvSpPr>
-          <p:cNvPr id="15" name="TextBox 14"/>
-          <p:cNvSpPr txBox="1"/>
-          <p:nvPr/>
-        </p:nvSpPr>
-        <p:spPr>
-          <a:xfrm>
-            <a:off x="8549640" y="2944368"/>
-            <a:ext cx="2011680" cy="347472"/>
-          </a:xfrm>
-          <a:prstGeom prst="rect">
-            <a:avLst/>
-          </a:prstGeom>
-          <a:noFill/>
-        </p:spPr>
-        <p:txBody>
-          <a:bodyPr wrap="square">
-            <a:spAutoFit/>
-          </a:bodyPr>
-          <a:lstStyle/>
-          <a:p>
-            <a:pPr algn="l"/>
-            <a:r>
-              <a:rPr sz="1100" b="1" i="0">
-                <a:solidFill>
-                  <a:srgbClr val="1A1612"/>
+                  <a:srgbClr val="FDF8F1"/>
                 </a:solidFill>
                 <a:latin typeface="Calibri"/>
               </a:rPr>
-              <a:t>PA compliance</a:t>
-            </a:r>
-          </a:p>
-        </p:txBody>
-      </p:sp>
-      <p:sp>
-        <p:nvSpPr>
-          <p:cNvPr id="16" name="TextBox 15"/>
-          <p:cNvSpPr txBox="1"/>
-          <p:nvPr/>
-        </p:nvSpPr>
-        <p:spPr>
-          <a:xfrm>
-            <a:off x="10607040" y="2944368"/>
-            <a:ext cx="1280160" cy="347472"/>
-          </a:xfrm>
-          <a:prstGeom prst="rect">
-            <a:avLst/>
-          </a:prstGeom>
-          <a:noFill/>
-        </p:spPr>
-        <p:txBody>
-          <a:bodyPr wrap="square">
-            <a:spAutoFit/>
-          </a:bodyPr>
-          <a:lstStyle/>
-          <a:p>
-            <a:pPr algn="l"/>
-            <a:r>
-              <a:rPr sz="900" b="0" i="0">
-                <a:solidFill>
-                  <a:srgbClr val="7A7368"/>
-                </a:solidFill>
-                <a:latin typeface="Consolas"/>
-              </a:rPr>
-              <a:t>0.108  r = −0.911</a:t>
-            </a:r>
-          </a:p>
-        </p:txBody>
-      </p:sp>
-      <p:sp>
-        <p:nvSpPr>
-          <p:cNvPr id="17" name="TextBox 16"/>
-          <p:cNvSpPr txBox="1"/>
-          <p:nvPr/>
-        </p:nvSpPr>
-        <p:spPr>
-          <a:xfrm>
-            <a:off x="8046720" y="3337560"/>
-            <a:ext cx="457200" cy="347472"/>
-          </a:xfrm>
-          <a:prstGeom prst="rect">
-            <a:avLst/>
-          </a:prstGeom>
-          <a:noFill/>
-        </p:spPr>
-        <p:txBody>
-          <a:bodyPr wrap="square">
-            <a:spAutoFit/>
-          </a:bodyPr>
-          <a:lstStyle/>
-          <a:p>
-            <a:pPr algn="l"/>
-            <a:r>
-              <a:rPr sz="1200" b="1" i="0">
-                <a:solidFill>
-                  <a:srgbClr val="B8862A"/>
-                </a:solidFill>
-                <a:latin typeface="Consolas"/>
-              </a:rPr>
-              <a:t>02</a:t>
-            </a:r>
-          </a:p>
-        </p:txBody>
-      </p:sp>
-      <p:sp>
-        <p:nvSpPr>
-          <p:cNvPr id="18" name="TextBox 17"/>
-          <p:cNvSpPr txBox="1"/>
-          <p:nvPr/>
-        </p:nvSpPr>
-        <p:spPr>
-          <a:xfrm>
-            <a:off x="8549640" y="3337560"/>
-            <a:ext cx="2011680" cy="347472"/>
-          </a:xfrm>
-          <a:prstGeom prst="rect">
-            <a:avLst/>
-          </a:prstGeom>
-          <a:noFill/>
-        </p:spPr>
-        <p:txBody>
-          <a:bodyPr wrap="square">
-            <a:spAutoFit/>
-          </a:bodyPr>
-          <a:lstStyle/>
-          <a:p>
-            <a:pPr algn="l"/>
-            <a:r>
-              <a:rPr sz="1100" b="0" i="0">
-                <a:solidFill>
-                  <a:srgbClr val="1A1612"/>
-                </a:solidFill>
-                <a:latin typeface="Calibri"/>
-              </a:rPr>
-              <a:t>Bebidas azucaradas</a:t>
-            </a:r>
-          </a:p>
-        </p:txBody>
-      </p:sp>
-      <p:sp>
-        <p:nvSpPr>
-          <p:cNvPr id="19" name="TextBox 18"/>
-          <p:cNvSpPr txBox="1"/>
-          <p:nvPr/>
-        </p:nvSpPr>
-        <p:spPr>
-          <a:xfrm>
-            <a:off x="10607040" y="3337560"/>
-            <a:ext cx="1280160" cy="347472"/>
-          </a:xfrm>
-          <a:prstGeom prst="rect">
-            <a:avLst/>
-          </a:prstGeom>
-          <a:noFill/>
-        </p:spPr>
-        <p:txBody>
-          <a:bodyPr wrap="square">
-            <a:spAutoFit/>
-          </a:bodyPr>
-          <a:lstStyle/>
-          <a:p>
-            <a:pPr algn="l"/>
-            <a:r>
-              <a:rPr sz="900" b="0" i="0">
-                <a:solidFill>
-                  <a:srgbClr val="7A7368"/>
-                </a:solidFill>
-                <a:latin typeface="Consolas"/>
-              </a:rPr>
-              <a:t>0.098  r = +0.893</a:t>
-            </a:r>
-          </a:p>
-        </p:txBody>
-      </p:sp>
-      <p:sp>
-        <p:nvSpPr>
-          <p:cNvPr id="20" name="TextBox 19"/>
-          <p:cNvSpPr txBox="1"/>
-          <p:nvPr/>
-        </p:nvSpPr>
-        <p:spPr>
-          <a:xfrm>
-            <a:off x="8046720" y="3730752"/>
-            <a:ext cx="457200" cy="347472"/>
-          </a:xfrm>
-          <a:prstGeom prst="rect">
-            <a:avLst/>
-          </a:prstGeom>
-          <a:noFill/>
-        </p:spPr>
-        <p:txBody>
-          <a:bodyPr wrap="square">
-            <a:spAutoFit/>
-          </a:bodyPr>
-          <a:lstStyle/>
-          <a:p>
-            <a:pPr algn="l"/>
-            <a:r>
-              <a:rPr sz="1200" b="1" i="0">
-                <a:solidFill>
-                  <a:srgbClr val="B8862A"/>
-                </a:solidFill>
-                <a:latin typeface="Consolas"/>
-              </a:rPr>
-              <a:t>03</a:t>
-            </a:r>
-          </a:p>
-        </p:txBody>
-      </p:sp>
-      <p:sp>
-        <p:nvSpPr>
-          <p:cNvPr id="21" name="TextBox 20"/>
-          <p:cNvSpPr txBox="1"/>
-          <p:nvPr/>
-        </p:nvSpPr>
-        <p:spPr>
-          <a:xfrm>
-            <a:off x="8549640" y="3730752"/>
-            <a:ext cx="2011680" cy="347472"/>
-          </a:xfrm>
-          <a:prstGeom prst="rect">
-            <a:avLst/>
-          </a:prstGeom>
-          <a:noFill/>
-        </p:spPr>
-        <p:txBody>
-          <a:bodyPr wrap="square">
-            <a:spAutoFit/>
-          </a:bodyPr>
-          <a:lstStyle/>
-          <a:p>
-            <a:pPr algn="l"/>
-            <a:r>
-              <a:rPr sz="1100" b="0" i="0">
-                <a:solidFill>
-                  <a:srgbClr val="1A1612"/>
-                </a:solidFill>
-                <a:latin typeface="Calibri"/>
-              </a:rPr>
-              <a:t>Frutas y verduras</a:t>
-            </a:r>
-          </a:p>
-        </p:txBody>
-      </p:sp>
-      <p:sp>
-        <p:nvSpPr>
-          <p:cNvPr id="22" name="TextBox 21"/>
-          <p:cNvSpPr txBox="1"/>
-          <p:nvPr/>
-        </p:nvSpPr>
-        <p:spPr>
-          <a:xfrm>
-            <a:off x="10607040" y="3730752"/>
-            <a:ext cx="1280160" cy="347472"/>
-          </a:xfrm>
-          <a:prstGeom prst="rect">
-            <a:avLst/>
-          </a:prstGeom>
-          <a:noFill/>
-        </p:spPr>
-        <p:txBody>
-          <a:bodyPr wrap="square">
-            <a:spAutoFit/>
-          </a:bodyPr>
-          <a:lstStyle/>
-          <a:p>
-            <a:pPr algn="l"/>
-            <a:r>
-              <a:rPr sz="900" b="0" i="0">
-                <a:solidFill>
-                  <a:srgbClr val="7A7368"/>
-                </a:solidFill>
-                <a:latin typeface="Consolas"/>
-              </a:rPr>
-              <a:t>0.087  r = −0.907</a:t>
-            </a:r>
-          </a:p>
-        </p:txBody>
-      </p:sp>
-      <p:sp>
-        <p:nvSpPr>
-          <p:cNvPr id="23" name="TextBox 22"/>
-          <p:cNvSpPr txBox="1"/>
-          <p:nvPr/>
-        </p:nvSpPr>
-        <p:spPr>
-          <a:xfrm>
-            <a:off x="8046720" y="4123944"/>
-            <a:ext cx="457200" cy="347472"/>
-          </a:xfrm>
-          <a:prstGeom prst="rect">
-            <a:avLst/>
-          </a:prstGeom>
-          <a:noFill/>
-        </p:spPr>
-        <p:txBody>
-          <a:bodyPr wrap="square">
-            <a:spAutoFit/>
-          </a:bodyPr>
-          <a:lstStyle/>
-          <a:p>
-            <a:pPr algn="l"/>
-            <a:r>
-              <a:rPr sz="1200" b="1" i="0">
-                <a:solidFill>
-                  <a:srgbClr val="B8862A"/>
-                </a:solidFill>
-                <a:latin typeface="Consolas"/>
-              </a:rPr>
-              <a:t>04</a:t>
-            </a:r>
-          </a:p>
-        </p:txBody>
-      </p:sp>
-      <p:sp>
-        <p:nvSpPr>
-          <p:cNvPr id="24" name="TextBox 23"/>
-          <p:cNvSpPr txBox="1"/>
-          <p:nvPr/>
-        </p:nvSpPr>
-        <p:spPr>
-          <a:xfrm>
-            <a:off x="8549640" y="4123944"/>
-            <a:ext cx="2011680" cy="347472"/>
-          </a:xfrm>
-          <a:prstGeom prst="rect">
-            <a:avLst/>
-          </a:prstGeom>
-          <a:noFill/>
-        </p:spPr>
-        <p:txBody>
-          <a:bodyPr wrap="square">
-            <a:spAutoFit/>
-          </a:bodyPr>
-          <a:lstStyle/>
-          <a:p>
-            <a:pPr algn="l"/>
-            <a:r>
-              <a:rPr sz="1100" b="0" i="0">
-                <a:solidFill>
-                  <a:srgbClr val="1A1612"/>
-                </a:solidFill>
-                <a:latin typeface="Calibri"/>
-              </a:rPr>
-              <a:t>Diabetes T2 menores</a:t>
-            </a:r>
-          </a:p>
-        </p:txBody>
-      </p:sp>
-      <p:sp>
-        <p:nvSpPr>
-          <p:cNvPr id="25" name="TextBox 24"/>
-          <p:cNvSpPr txBox="1"/>
-          <p:nvPr/>
-        </p:nvSpPr>
-        <p:spPr>
-          <a:xfrm>
-            <a:off x="10607040" y="4123944"/>
-            <a:ext cx="1280160" cy="347472"/>
-          </a:xfrm>
-          <a:prstGeom prst="rect">
-            <a:avLst/>
-          </a:prstGeom>
-          <a:noFill/>
-        </p:spPr>
-        <p:txBody>
-          <a:bodyPr wrap="square">
-            <a:spAutoFit/>
-          </a:bodyPr>
-          <a:lstStyle/>
-          <a:p>
-            <a:pPr algn="l"/>
-            <a:r>
-              <a:rPr sz="900" b="0" i="0">
-                <a:solidFill>
-                  <a:srgbClr val="7A7368"/>
-                </a:solidFill>
-                <a:latin typeface="Consolas"/>
-              </a:rPr>
-              <a:t>0.086  r = +0.862</a:t>
-            </a:r>
-          </a:p>
-        </p:txBody>
-      </p:sp>
-      <p:sp>
-        <p:nvSpPr>
-          <p:cNvPr id="26" name="TextBox 25"/>
-          <p:cNvSpPr txBox="1"/>
-          <p:nvPr/>
-        </p:nvSpPr>
-        <p:spPr>
-          <a:xfrm>
-            <a:off x="8046720" y="4517136"/>
-            <a:ext cx="457200" cy="347472"/>
-          </a:xfrm>
-          <a:prstGeom prst="rect">
-            <a:avLst/>
-          </a:prstGeom>
-          <a:noFill/>
-        </p:spPr>
-        <p:txBody>
-          <a:bodyPr wrap="square">
-            <a:spAutoFit/>
-          </a:bodyPr>
-          <a:lstStyle/>
-          <a:p>
-            <a:pPr algn="l"/>
-            <a:r>
-              <a:rPr sz="1200" b="1" i="0">
-                <a:solidFill>
-                  <a:srgbClr val="7A7368"/>
-                </a:solidFill>
-                <a:latin typeface="Consolas"/>
-              </a:rPr>
-              <a:t>08</a:t>
-            </a:r>
-          </a:p>
-        </p:txBody>
-      </p:sp>
-      <p:sp>
-        <p:nvSpPr>
-          <p:cNvPr id="27" name="TextBox 26"/>
-          <p:cNvSpPr txBox="1"/>
-          <p:nvPr/>
-        </p:nvSpPr>
-        <p:spPr>
-          <a:xfrm>
-            <a:off x="8549640" y="4517136"/>
-            <a:ext cx="2011680" cy="347472"/>
-          </a:xfrm>
-          <a:prstGeom prst="rect">
-            <a:avLst/>
-          </a:prstGeom>
-          <a:noFill/>
-        </p:spPr>
-        <p:txBody>
-          <a:bodyPr wrap="square">
-            <a:spAutoFit/>
-          </a:bodyPr>
-          <a:lstStyle/>
-          <a:p>
-            <a:pPr algn="l"/>
-            <a:r>
-              <a:rPr sz="1100" b="0" i="0">
-                <a:solidFill>
-                  <a:srgbClr val="1A1612"/>
-                </a:solidFill>
-                <a:latin typeface="Calibri"/>
-              </a:rPr>
-              <a:t>Densidad tienditas</a:t>
-            </a:r>
-          </a:p>
-        </p:txBody>
-      </p:sp>
-      <p:sp>
-        <p:nvSpPr>
-          <p:cNvPr id="28" name="TextBox 27"/>
-          <p:cNvSpPr txBox="1"/>
-          <p:nvPr/>
-        </p:nvSpPr>
-        <p:spPr>
-          <a:xfrm>
-            <a:off x="10607040" y="4517136"/>
-            <a:ext cx="1280160" cy="347472"/>
-          </a:xfrm>
-          <a:prstGeom prst="rect">
-            <a:avLst/>
-          </a:prstGeom>
-          <a:noFill/>
-        </p:spPr>
-        <p:txBody>
-          <a:bodyPr wrap="square">
-            <a:spAutoFit/>
-          </a:bodyPr>
-          <a:lstStyle/>
-          <a:p>
-            <a:pPr algn="l"/>
-            <a:r>
-              <a:rPr sz="900" b="0" i="0">
-                <a:solidFill>
-                  <a:srgbClr val="7A7368"/>
-                </a:solidFill>
-                <a:latin typeface="Consolas"/>
-              </a:rPr>
-              <a:t>0.004  r = −0.268</a:t>
+              <a:t>Hacer nuestra propia encuesta. n &gt; 100. Población real, no agregados estatales.</a:t>
             </a:r>
           </a:p>
         </p:txBody>
@@ -16004,7 +16236,7 @@
                 </a:solidFill>
                 <a:latin typeface="Consolas"/>
               </a:rPr>
-              <a:t>DASHBOARD 05  ·  FASE 3 — ENCUESTA  ·  N = 98 RESPUESTAS</a:t>
+              <a:t>DASHBOARD  ·  LA ENCUESTA  ·  100+ RESPUESTAS EN SAN LUIS POTOSÍ</a:t>
             </a:r>
           </a:p>
         </p:txBody>
@@ -16017,7 +16249,7 @@
         </p:nvSpPr>
         <p:spPr>
           <a:xfrm>
-            <a:off x="548640" y="658368"/>
+            <a:off x="548640" y="640080"/>
             <a:ext cx="10972800" cy="411480"/>
           </a:xfrm>
           <a:prstGeom prst="rect">
@@ -16033,13 +16265,13 @@
           <a:p>
             <a:pPr algn="l"/>
             <a:r>
-              <a:rPr sz="2200" b="1" i="0">
+              <a:rPr sz="2400" b="1" i="0">
                 <a:solidFill>
                   <a:srgbClr val="1A1612"/>
                 </a:solidFill>
                 <a:latin typeface="Calibri"/>
               </a:rPr>
-              <a:t>Los datos estadísticos nos dieron correlaciones. Las personas nos dieron causas.</a:t>
+              <a:t>Hablamos con cien personas. Esto es lo que nos dijeron.</a:t>
             </a:r>
           </a:p>
         </p:txBody>
@@ -16052,7 +16284,7 @@
         </p:nvSpPr>
         <p:spPr>
           <a:xfrm>
-            <a:off x="548640" y="1143000"/>
+            <a:off x="548640" y="1097280"/>
             <a:ext cx="11155680" cy="411480"/>
           </a:xfrm>
           <a:prstGeom prst="rect">
@@ -16095,7 +16327,7 @@
         </p:nvSpPr>
         <p:spPr>
           <a:xfrm>
-            <a:off x="731520" y="1207008"/>
+            <a:off x="731520" y="1161288"/>
             <a:ext cx="10972800" cy="320040"/>
           </a:xfrm>
           <a:prstGeom prst="rect">
@@ -16117,7 +16349,7 @@
                 </a:solidFill>
                 <a:latin typeface="Consolas"/>
               </a:rPr>
-              <a:t>SAN LUIS POTOSÍ  ·  DIC 2025 – ENE 2026  ·  98 RESPONDENTES  ·  2 PISTAS: PADRES / NO PADRES  ·  ESTUDIANTES 37% · OFICINISTAS 12% · 28 PADRES</a:t>
+              <a:t>SAN LUIS POTOSÍ  ·  DIC 2025 – ENE 2026  ·  2 PISTAS: PADRES (28) / NO PADRES (70)  ·  EDADES &lt;18 a &gt;50</a:t>
             </a:r>
           </a:p>
         </p:txBody>
@@ -16138,8 +16370,8 @@
         </p:blipFill>
         <p:spPr>
           <a:xfrm>
-            <a:off x="457200" y="1691640"/>
-            <a:ext cx="6400800" cy="3200400"/>
+            <a:off x="365760" y="1645920"/>
+            <a:ext cx="6492240" cy="3108960"/>
           </a:xfrm>
           <a:prstGeom prst="rect">
             <a:avLst/>
@@ -16162,8 +16394,8 @@
         </p:blipFill>
         <p:spPr>
           <a:xfrm>
-            <a:off x="7040880" y="1691640"/>
-            <a:ext cx="4937760" cy="3200400"/>
+            <a:off x="7040880" y="1645920"/>
+            <a:ext cx="5029200" cy="3108960"/>
           </a:xfrm>
           <a:prstGeom prst="rect">
             <a:avLst/>
@@ -16178,8 +16410,8 @@
         </p:nvSpPr>
         <p:spPr>
           <a:xfrm>
-            <a:off x="548640" y="5029200"/>
-            <a:ext cx="2743200" cy="1097280"/>
+            <a:off x="548640" y="4937760"/>
+            <a:ext cx="2743200" cy="1325880"/>
           </a:xfrm>
           <a:prstGeom prst="rect">
             <a:avLst/>
@@ -16221,7 +16453,7 @@
         </p:nvSpPr>
         <p:spPr>
           <a:xfrm>
-            <a:off x="685800" y="5102352"/>
+            <a:off x="685800" y="5029200"/>
             <a:ext cx="2468880" cy="502920"/>
           </a:xfrm>
           <a:prstGeom prst="rect">
@@ -16256,8 +16488,8 @@
         </p:nvSpPr>
         <p:spPr>
           <a:xfrm>
-            <a:off x="685800" y="5577840"/>
-            <a:ext cx="2468880" cy="457200"/>
+            <a:off x="685800" y="5532120"/>
+            <a:ext cx="2468880" cy="685800"/>
           </a:xfrm>
           <a:prstGeom prst="rect">
             <a:avLst/>
@@ -16279,7 +16511,7 @@
                 <a:latin typeface="Calibri"/>
               </a:rPr>
               <a:t>dicen 'no tengo tiempo
-por el trabajo' — barrera #1</a:t>
+por el trabajo'</a:t>
             </a:r>
           </a:p>
         </p:txBody>
@@ -16292,8 +16524,8 @@
         </p:nvSpPr>
         <p:spPr>
           <a:xfrm>
-            <a:off x="3429000" y="5029200"/>
-            <a:ext cx="2743200" cy="1097280"/>
+            <a:off x="3429000" y="4937760"/>
+            <a:ext cx="2743200" cy="1325880"/>
           </a:xfrm>
           <a:prstGeom prst="rect">
             <a:avLst/>
@@ -16335,7 +16567,7 @@
         </p:nvSpPr>
         <p:spPr>
           <a:xfrm>
-            <a:off x="3566160" y="5102352"/>
+            <a:off x="3566160" y="5029200"/>
             <a:ext cx="2468880" cy="502920"/>
           </a:xfrm>
           <a:prstGeom prst="rect">
@@ -16370,8 +16602,8 @@
         </p:nvSpPr>
         <p:spPr>
           <a:xfrm>
-            <a:off x="3566160" y="5577840"/>
-            <a:ext cx="2468880" cy="457200"/>
+            <a:off x="3566160" y="5532120"/>
+            <a:ext cx="2468880" cy="685800"/>
           </a:xfrm>
           <a:prstGeom prst="rect">
             <a:avLst/>
@@ -16393,7 +16625,7 @@
                 <a:latin typeface="Calibri"/>
               </a:rPr>
               <a:t>padres preocupados
-(muy + algo)</a:t>
+porque sus hijos comen mal</a:t>
             </a:r>
           </a:p>
         </p:txBody>
@@ -16406,8 +16638,8 @@
         </p:nvSpPr>
         <p:spPr>
           <a:xfrm>
-            <a:off x="6309359" y="5029200"/>
-            <a:ext cx="2743200" cy="1097280"/>
+            <a:off x="6309359" y="4937760"/>
+            <a:ext cx="2743200" cy="1325880"/>
           </a:xfrm>
           <a:prstGeom prst="rect">
             <a:avLst/>
@@ -16449,7 +16681,7 @@
         </p:nvSpPr>
         <p:spPr>
           <a:xfrm>
-            <a:off x="6446520" y="5102352"/>
+            <a:off x="6446520" y="5029200"/>
             <a:ext cx="2468880" cy="502920"/>
           </a:xfrm>
           <a:prstGeom prst="rect">
@@ -16484,8 +16716,8 @@
         </p:nvSpPr>
         <p:spPr>
           <a:xfrm>
-            <a:off x="6446520" y="5577840"/>
-            <a:ext cx="2468880" cy="457200"/>
+            <a:off x="6446520" y="5532120"/>
+            <a:ext cx="2468880" cy="685800"/>
           </a:xfrm>
           <a:prstGeom prst="rect">
             <a:avLst/>
@@ -16507,7 +16739,7 @@
                 <a:latin typeface="Calibri"/>
               </a:rPr>
               <a:t>cambiarían hábitos
-con más tiempo</a:t>
+con más tiempo o recursos</a:t>
             </a:r>
           </a:p>
         </p:txBody>
@@ -16520,8 +16752,8 @@
         </p:nvSpPr>
         <p:spPr>
           <a:xfrm>
-            <a:off x="9189719" y="5029200"/>
-            <a:ext cx="2743200" cy="1097280"/>
+            <a:off x="9189719" y="4937760"/>
+            <a:ext cx="2743200" cy="1325880"/>
           </a:xfrm>
           <a:prstGeom prst="rect">
             <a:avLst/>
@@ -16563,7 +16795,7 @@
         </p:nvSpPr>
         <p:spPr>
           <a:xfrm>
-            <a:off x="9326880" y="5102352"/>
+            <a:off x="9326880" y="5029200"/>
             <a:ext cx="2468880" cy="502920"/>
           </a:xfrm>
           <a:prstGeom prst="rect">
@@ -16598,8 +16830,8 @@
         </p:nvSpPr>
         <p:spPr>
           <a:xfrm>
-            <a:off x="9326880" y="5577840"/>
-            <a:ext cx="2468880" cy="457200"/>
+            <a:off x="9326880" y="5532120"/>
+            <a:ext cx="2468880" cy="685800"/>
           </a:xfrm>
           <a:prstGeom prst="rect">
             <a:avLst/>
@@ -16620,8 +16852,8 @@
                 </a:solidFill>
                 <a:latin typeface="Calibri"/>
               </a:rPr>
-              <a:t>piden ed. nutricional
-entre sus soluciones</a:t>
+              <a:t>piden educación
+nutricional explícitamente</a:t>
             </a:r>
           </a:p>
         </p:txBody>
@@ -16795,7 +17027,7 @@
                 </a:solidFill>
                 <a:latin typeface="Calibri"/>
               </a:rPr>
-              <a:t>— respuesta #1 · 38 de 98 personas · San Luis Potosí · Dic 2025</a:t>
+              <a:t>— respuesta #1 · 38 menciones · 100 personas reales · San Luis Potosí · Dic 2025</a:t>
             </a:r>
           </a:p>
         </p:txBody>
@@ -16808,7 +17040,7 @@
         </p:nvSpPr>
         <p:spPr>
           <a:xfrm>
-            <a:off x="1097280" y="2926080"/>
+            <a:off x="1097280" y="2880360"/>
             <a:ext cx="9966960" cy="18288"/>
           </a:xfrm>
           <a:prstGeom prst="rect">
@@ -16851,7 +17083,7 @@
         </p:nvSpPr>
         <p:spPr>
           <a:xfrm>
-            <a:off x="1097280" y="3200400"/>
+            <a:off x="1097280" y="3154680"/>
             <a:ext cx="9966960" cy="868680"/>
           </a:xfrm>
           <a:prstGeom prst="rect">
@@ -16894,7 +17126,7 @@
         </p:nvSpPr>
         <p:spPr>
           <a:xfrm>
-            <a:off x="1280160" y="3291840"/>
+            <a:off x="1280160" y="3246120"/>
             <a:ext cx="9692640" cy="685800"/>
           </a:xfrm>
           <a:prstGeom prst="rect">
@@ -16929,8 +17161,8 @@
         </p:nvSpPr>
         <p:spPr>
           <a:xfrm>
-            <a:off x="1097280" y="4251960"/>
-            <a:ext cx="10058400" cy="1188720"/>
+            <a:off x="1097280" y="4206240"/>
+            <a:ext cx="10058400" cy="1280160"/>
           </a:xfrm>
           <a:prstGeom prst="rect">
             <a:avLst/>
@@ -16952,8 +17184,8 @@
                 <a:latin typeface="Calibri"/>
               </a:rPr>
               <a:t>Si el tiempo es estructural — si las familias no pueden cocinar distinto porque trabajan más
-de lo que el día permite — entonces el cambio no llega por regular las tienditas.
-Llega por equipar a los adolescentes de mañana dentro del sistema que ya existe.</a:t>
+de lo que el día permite — entonces el cambio no llega regulando las tienditas.
+Llega equipando a los adolescentes dentro del sistema que ya existe: la escuela.</a:t>
             </a:r>
           </a:p>
         </p:txBody>
@@ -16966,7 +17198,7 @@
         </p:nvSpPr>
         <p:spPr>
           <a:xfrm>
-            <a:off x="1097280" y="5577840"/>
+            <a:off x="1097280" y="5623560"/>
             <a:ext cx="10058400" cy="457200"/>
           </a:xfrm>
           <a:prstGeom prst="rect">
@@ -16988,8 +17220,8 @@
                 </a:solidFill>
                 <a:latin typeface="Consolas"/>
               </a:rPr>
-              <a:t>REGRESIÓN: el predictor más modificable es la actividad física (r = −0.911)
-ENCUESTA: la población misma pide educación nutricional  →  La intervención ya estaba en los datos.</a:t>
+              <a:t>MODELOS: predictor #1 = actividad física  (r = −0.911)
+ENCUESTA: la población misma pide educación nutricional  →  El plan ya estaba en los datos.</a:t>
             </a:r>
           </a:p>
         </p:txBody>
@@ -17093,7 +17325,7 @@
                 </a:solidFill>
                 <a:latin typeface="Consolas"/>
               </a:rPr>
-              <a:t>DASHBOARD 06  ·  FASE 4 — LA INTERVENCIÓN</a:t>
+              <a:t>DASHBOARD  ·  EL PLAN  ·  CENTRADO EN PERSONAS</a:t>
             </a:r>
           </a:p>
         </p:txBody>
@@ -17106,7 +17338,7 @@
         </p:nvSpPr>
         <p:spPr>
           <a:xfrm>
-            <a:off x="548640" y="658368"/>
+            <a:off x="548640" y="640080"/>
             <a:ext cx="10972800" cy="411480"/>
           </a:xfrm>
           <a:prstGeom prst="rect">
@@ -17122,13 +17354,13 @@
           <a:p>
             <a:pPr algn="l"/>
             <a:r>
-              <a:rPr sz="2600" b="1" i="0">
+              <a:rPr sz="2400" b="1" i="0">
                 <a:solidFill>
                   <a:srgbClr val="1A1612"/>
                 </a:solidFill>
                 <a:latin typeface="Calibri"/>
               </a:rPr>
-              <a:t>Cinco componentes. Sobre lo que ya existe.</a:t>
+              <a:t>Cinco componentes. Diseñados desde lo que la gente nos dijo.</a:t>
             </a:r>
           </a:p>
         </p:txBody>
@@ -17141,8 +17373,8 @@
         </p:nvSpPr>
         <p:spPr>
           <a:xfrm>
-            <a:off x="548640" y="1115568"/>
-            <a:ext cx="10972800" cy="274320"/>
+            <a:off x="548640" y="1097280"/>
+            <a:ext cx="10972800" cy="292608"/>
           </a:xfrm>
           <a:prstGeom prst="rect">
             <a:avLst/>
@@ -17163,7 +17395,7 @@
                 </a:solidFill>
                 <a:latin typeface="Consolas"/>
               </a:rPr>
-              <a:t>Secundaria (12–15 años)  ·  Refuerzo a EF + Vida Saludable  ·  Sin reforma legislativa  ·  Sin presupuesto nuevo</a:t>
+              <a:t>Secundaria (12–15 años)  ·  Refuerzo a EF + Vida Saludable  ·  Sobre lo que ya existe en el NEM 2022</a:t>
             </a:r>
           </a:p>
         </p:txBody>
@@ -17177,7 +17409,7 @@
         <p:spPr>
           <a:xfrm>
             <a:off x="457200" y="1600200"/>
-            <a:ext cx="2194560" cy="685800"/>
+            <a:ext cx="2194560" cy="548640"/>
           </a:xfrm>
           <a:prstGeom prst="rect">
             <a:avLst/>
@@ -17219,8 +17451,8 @@
         </p:nvSpPr>
         <p:spPr>
           <a:xfrm>
-            <a:off x="457200" y="1664208"/>
-            <a:ext cx="2194560" cy="594360"/>
+            <a:off x="457200" y="1645920"/>
+            <a:ext cx="2194560" cy="457200"/>
           </a:xfrm>
           <a:prstGeom prst="rect">
             <a:avLst/>
@@ -17235,7 +17467,7 @@
           <a:p>
             <a:pPr algn="ctr"/>
             <a:r>
-              <a:rPr sz="3800" b="1" i="0">
+              <a:rPr sz="3200" b="1" i="0">
                 <a:solidFill>
                   <a:srgbClr val="FDF8F1"/>
                 </a:solidFill>
@@ -17254,8 +17486,8 @@
         </p:nvSpPr>
         <p:spPr>
           <a:xfrm>
-            <a:off x="457200" y="2331720"/>
-            <a:ext cx="2194560" cy="3200400"/>
+            <a:off x="457200" y="2194560"/>
+            <a:ext cx="2194560" cy="2697480"/>
           </a:xfrm>
           <a:prstGeom prst="rect">
             <a:avLst/>
@@ -17297,8 +17529,8 @@
         </p:nvSpPr>
         <p:spPr>
           <a:xfrm>
-            <a:off x="566928" y="2404872"/>
-            <a:ext cx="1965960" cy="640080"/>
+            <a:off x="566928" y="2267712"/>
+            <a:ext cx="1965960" cy="548640"/>
           </a:xfrm>
           <a:prstGeom prst="rect">
             <a:avLst/>
@@ -17333,8 +17565,8 @@
         </p:nvSpPr>
         <p:spPr>
           <a:xfrm>
-            <a:off x="566928" y="3108960"/>
-            <a:ext cx="1965960" cy="2194560"/>
+            <a:off x="566928" y="2880360"/>
+            <a:ext cx="1965960" cy="1965960"/>
           </a:xfrm>
           <a:prstGeom prst="rect">
             <a:avLst/>
@@ -17349,17 +17581,17 @@
           <a:p>
             <a:pPr algn="ctr"/>
             <a:r>
-              <a:rPr sz="1100" b="0" i="0">
+              <a:rPr sz="1000" b="0" i="0">
                 <a:solidFill>
                   <a:srgbClr val="FDF8F1"/>
                 </a:solidFill>
                 <a:latin typeface="Calibri"/>
               </a:rPr>
-              <a:t>Alphabetización
+              <a:t>Alfabetización
 aplicada:
-etiquetas, snack
-≤20 MXN, mapeo
-del entorno</a:t>
+etiquetas,
+snack ≤20 MXN,
+mapeo del entorno</a:t>
             </a:r>
           </a:p>
         </p:txBody>
@@ -17372,8 +17604,123 @@
         </p:nvSpPr>
         <p:spPr>
           <a:xfrm>
+            <a:off x="457200" y="4937760"/>
+            <a:ext cx="2194560" cy="960120"/>
+          </a:xfrm>
+          <a:prstGeom prst="rect">
+            <a:avLst/>
+          </a:prstGeom>
+          <a:solidFill>
+            <a:srgbClr val="F0E8D8"/>
+          </a:solidFill>
+          <a:ln>
+            <a:noFill/>
+          </a:ln>
+        </p:spPr>
+        <p:style>
+          <a:lnRef idx="1">
+            <a:schemeClr val="accent1"/>
+          </a:lnRef>
+          <a:fillRef idx="3">
+            <a:schemeClr val="accent1"/>
+          </a:fillRef>
+          <a:effectRef idx="2">
+            <a:schemeClr val="accent1"/>
+          </a:effectRef>
+          <a:fontRef idx="minor">
+            <a:schemeClr val="lt1"/>
+          </a:fontRef>
+        </p:style>
+        <p:txBody>
+          <a:bodyPr rtlCol="0" anchor="ctr"/>
+          <a:lstStyle/>
+          <a:p>
+            <a:pPr algn="ctr"/>
+          </a:p>
+        </p:txBody>
+      </p:sp>
+      <p:sp>
+        <p:nvSpPr>
+          <p:cNvPr id="12" name="TextBox 11"/>
+          <p:cNvSpPr txBox="1"/>
+          <p:nvPr/>
+        </p:nvSpPr>
+        <p:spPr>
+          <a:xfrm>
+            <a:off x="566928" y="4983480"/>
+            <a:ext cx="1965960" cy="201168"/>
+          </a:xfrm>
+          <a:prstGeom prst="rect">
+            <a:avLst/>
+          </a:prstGeom>
+          <a:noFill/>
+        </p:spPr>
+        <p:txBody>
+          <a:bodyPr wrap="square">
+            <a:spAutoFit/>
+          </a:bodyPr>
+          <a:lstStyle/>
+          <a:p>
+            <a:pPr algn="l"/>
+            <a:r>
+              <a:rPr sz="700" b="0" i="0">
+                <a:solidFill>
+                  <a:srgbClr val="B8332A"/>
+                </a:solidFill>
+                <a:latin typeface="Consolas"/>
+              </a:rPr>
+              <a:t>ANCLA EN DATOS</a:t>
+            </a:r>
+          </a:p>
+        </p:txBody>
+      </p:sp>
+      <p:sp>
+        <p:nvSpPr>
+          <p:cNvPr id="13" name="TextBox 12"/>
+          <p:cNvSpPr txBox="1"/>
+          <p:nvPr/>
+        </p:nvSpPr>
+        <p:spPr>
+          <a:xfrm>
+            <a:off x="566928" y="5193792"/>
+            <a:ext cx="1965960" cy="640080"/>
+          </a:xfrm>
+          <a:prstGeom prst="rect">
+            <a:avLst/>
+          </a:prstGeom>
+          <a:noFill/>
+        </p:spPr>
+        <p:txBody>
+          <a:bodyPr wrap="square">
+            <a:spAutoFit/>
+          </a:bodyPr>
+          <a:lstStyle/>
+          <a:p>
+            <a:pPr algn="l"/>
+            <a:r>
+              <a:rPr sz="900" b="0" i="1">
+                <a:solidFill>
+                  <a:srgbClr val="1A1612"/>
+                </a:solidFill>
+                <a:latin typeface="Calibri"/>
+              </a:rPr>
+              <a:t>Responde al
+predictor #1
+(actividad física)</a:t>
+            </a:r>
+          </a:p>
+        </p:txBody>
+      </p:sp>
+      <p:sp>
+        <p:nvSpPr>
+          <p:cNvPr id="14" name="Rectangle 13"/>
+          <p:cNvSpPr/>
+          <p:nvPr/>
+        </p:nvSpPr>
+        <p:spPr>
+          <a:xfrm>
             <a:off x="2788920" y="1600200"/>
-            <a:ext cx="2194560" cy="685800"/>
+            <a:ext cx="2194560" cy="548640"/>
           </a:xfrm>
           <a:prstGeom prst="rect">
             <a:avLst/>
@@ -17409,14 +17756,14 @@
       </p:sp>
       <p:sp>
         <p:nvSpPr>
-          <p:cNvPr id="12" name="TextBox 11"/>
-          <p:cNvSpPr txBox="1"/>
-          <p:nvPr/>
-        </p:nvSpPr>
-        <p:spPr>
-          <a:xfrm>
-            <a:off x="2788920" y="1664208"/>
-            <a:ext cx="2194560" cy="594360"/>
+          <p:cNvPr id="15" name="TextBox 14"/>
+          <p:cNvSpPr txBox="1"/>
+          <p:nvPr/>
+        </p:nvSpPr>
+        <p:spPr>
+          <a:xfrm>
+            <a:off x="2788920" y="1645920"/>
+            <a:ext cx="2194560" cy="457200"/>
           </a:xfrm>
           <a:prstGeom prst="rect">
             <a:avLst/>
@@ -17431,7 +17778,7 @@
           <a:p>
             <a:pPr algn="ctr"/>
             <a:r>
-              <a:rPr sz="3800" b="1" i="0">
+              <a:rPr sz="3200" b="1" i="0">
                 <a:solidFill>
                   <a:srgbClr val="FDF8F1"/>
                 </a:solidFill>
@@ -17444,14 +17791,14 @@
       </p:sp>
       <p:sp>
         <p:nvSpPr>
-          <p:cNvPr id="13" name="Rectangle 12"/>
+          <p:cNvPr id="16" name="Rectangle 15"/>
           <p:cNvSpPr/>
           <p:nvPr/>
         </p:nvSpPr>
         <p:spPr>
           <a:xfrm>
-            <a:off x="2788920" y="2331720"/>
-            <a:ext cx="2194560" cy="3200400"/>
+            <a:off x="2788920" y="2194560"/>
+            <a:ext cx="2194560" cy="2697480"/>
           </a:xfrm>
           <a:prstGeom prst="rect">
             <a:avLst/>
@@ -17487,14 +17834,14 @@
       </p:sp>
       <p:sp>
         <p:nvSpPr>
-          <p:cNvPr id="14" name="TextBox 13"/>
-          <p:cNvSpPr txBox="1"/>
-          <p:nvPr/>
-        </p:nvSpPr>
-        <p:spPr>
-          <a:xfrm>
-            <a:off x="2898648" y="2404872"/>
-            <a:ext cx="1965960" cy="640080"/>
+          <p:cNvPr id="17" name="TextBox 16"/>
+          <p:cNvSpPr txBox="1"/>
+          <p:nvPr/>
+        </p:nvSpPr>
+        <p:spPr>
+          <a:xfrm>
+            <a:off x="2898648" y="2267712"/>
+            <a:ext cx="1965960" cy="548640"/>
           </a:xfrm>
           <a:prstGeom prst="rect">
             <a:avLst/>
@@ -17523,14 +17870,14 @@
       </p:sp>
       <p:sp>
         <p:nvSpPr>
-          <p:cNvPr id="15" name="TextBox 14"/>
-          <p:cNvSpPr txBox="1"/>
-          <p:nvPr/>
-        </p:nvSpPr>
-        <p:spPr>
-          <a:xfrm>
-            <a:off x="2898648" y="3108960"/>
-            <a:ext cx="1965960" cy="2194560"/>
+          <p:cNvPr id="18" name="TextBox 17"/>
+          <p:cNvSpPr txBox="1"/>
+          <p:nvPr/>
+        </p:nvSpPr>
+        <p:spPr>
+          <a:xfrm>
+            <a:off x="2898648" y="2880360"/>
+            <a:ext cx="1965960" cy="1965960"/>
           </a:xfrm>
           <a:prstGeom prst="rect">
             <a:avLst/>
@@ -17545,30 +17892,145 @@
           <a:p>
             <a:pPr algn="ctr"/>
             <a:r>
-              <a:rPr sz="1100" b="0" i="0">
+              <a:rPr sz="1000" b="0" i="0">
                 <a:solidFill>
                   <a:srgbClr val="FDF8F1"/>
                 </a:solidFill>
                 <a:latin typeface="Calibri"/>
               </a:rPr>
-              <a:t>Citizen science
+              <a:t>Ciencia ciudadana
 30 min bisemanal
 Dataset nacional
-geolocal.</a:t>
-            </a:r>
-          </a:p>
-        </p:txBody>
-      </p:sp>
-      <p:sp>
-        <p:nvSpPr>
-          <p:cNvPr id="16" name="Rectangle 15"/>
+geolocalizado</a:t>
+            </a:r>
+          </a:p>
+        </p:txBody>
+      </p:sp>
+      <p:sp>
+        <p:nvSpPr>
+          <p:cNvPr id="19" name="Rectangle 18"/>
           <p:cNvSpPr/>
           <p:nvPr/>
         </p:nvSpPr>
         <p:spPr>
           <a:xfrm>
+            <a:off x="2788920" y="4937760"/>
+            <a:ext cx="2194560" cy="960120"/>
+          </a:xfrm>
+          <a:prstGeom prst="rect">
+            <a:avLst/>
+          </a:prstGeom>
+          <a:solidFill>
+            <a:srgbClr val="F0E8D8"/>
+          </a:solidFill>
+          <a:ln>
+            <a:noFill/>
+          </a:ln>
+        </p:spPr>
+        <p:style>
+          <a:lnRef idx="1">
+            <a:schemeClr val="accent1"/>
+          </a:lnRef>
+          <a:fillRef idx="3">
+            <a:schemeClr val="accent1"/>
+          </a:fillRef>
+          <a:effectRef idx="2">
+            <a:schemeClr val="accent1"/>
+          </a:effectRef>
+          <a:fontRef idx="minor">
+            <a:schemeClr val="lt1"/>
+          </a:fontRef>
+        </p:style>
+        <p:txBody>
+          <a:bodyPr rtlCol="0" anchor="ctr"/>
+          <a:lstStyle/>
+          <a:p>
+            <a:pPr algn="ctr"/>
+          </a:p>
+        </p:txBody>
+      </p:sp>
+      <p:sp>
+        <p:nvSpPr>
+          <p:cNvPr id="20" name="TextBox 19"/>
+          <p:cNvSpPr txBox="1"/>
+          <p:nvPr/>
+        </p:nvSpPr>
+        <p:spPr>
+          <a:xfrm>
+            <a:off x="2898648" y="4983480"/>
+            <a:ext cx="1965960" cy="201168"/>
+          </a:xfrm>
+          <a:prstGeom prst="rect">
+            <a:avLst/>
+          </a:prstGeom>
+          <a:noFill/>
+        </p:spPr>
+        <p:txBody>
+          <a:bodyPr wrap="square">
+            <a:spAutoFit/>
+          </a:bodyPr>
+          <a:lstStyle/>
+          <a:p>
+            <a:pPr algn="l"/>
+            <a:r>
+              <a:rPr sz="700" b="0" i="0">
+                <a:solidFill>
+                  <a:srgbClr val="B8332A"/>
+                </a:solidFill>
+                <a:latin typeface="Consolas"/>
+              </a:rPr>
+              <a:t>ANCLA EN DATOS</a:t>
+            </a:r>
+          </a:p>
+        </p:txBody>
+      </p:sp>
+      <p:sp>
+        <p:nvSpPr>
+          <p:cNvPr id="21" name="TextBox 20"/>
+          <p:cNvSpPr txBox="1"/>
+          <p:nvPr/>
+        </p:nvSpPr>
+        <p:spPr>
+          <a:xfrm>
+            <a:off x="2898648" y="5193792"/>
+            <a:ext cx="1965960" cy="640080"/>
+          </a:xfrm>
+          <a:prstGeom prst="rect">
+            <a:avLst/>
+          </a:prstGeom>
+          <a:noFill/>
+        </p:spPr>
+        <p:txBody>
+          <a:bodyPr wrap="square">
+            <a:spAutoFit/>
+          </a:bodyPr>
+          <a:lstStyle/>
+          <a:p>
+            <a:pPr algn="l"/>
+            <a:r>
+              <a:rPr sz="900" b="0" i="1">
+                <a:solidFill>
+                  <a:srgbClr val="1A1612"/>
+                </a:solidFill>
+                <a:latin typeface="Calibri"/>
+              </a:rPr>
+              <a:t>Responde a las
+tienditas como
+entorno obesogénico</a:t>
+            </a:r>
+          </a:p>
+        </p:txBody>
+      </p:sp>
+      <p:sp>
+        <p:nvSpPr>
+          <p:cNvPr id="22" name="Rectangle 21"/>
+          <p:cNvSpPr/>
+          <p:nvPr/>
+        </p:nvSpPr>
+        <p:spPr>
+          <a:xfrm>
             <a:off x="5120640" y="1600200"/>
-            <a:ext cx="2194560" cy="685800"/>
+            <a:ext cx="2194560" cy="548640"/>
           </a:xfrm>
           <a:prstGeom prst="rect">
             <a:avLst/>
@@ -17604,14 +18066,14 @@
       </p:sp>
       <p:sp>
         <p:nvSpPr>
-          <p:cNvPr id="17" name="TextBox 16"/>
-          <p:cNvSpPr txBox="1"/>
-          <p:nvPr/>
-        </p:nvSpPr>
-        <p:spPr>
-          <a:xfrm>
-            <a:off x="5120640" y="1664208"/>
-            <a:ext cx="2194560" cy="594360"/>
+          <p:cNvPr id="23" name="TextBox 22"/>
+          <p:cNvSpPr txBox="1"/>
+          <p:nvPr/>
+        </p:nvSpPr>
+        <p:spPr>
+          <a:xfrm>
+            <a:off x="5120640" y="1645920"/>
+            <a:ext cx="2194560" cy="457200"/>
           </a:xfrm>
           <a:prstGeom prst="rect">
             <a:avLst/>
@@ -17626,7 +18088,7 @@
           <a:p>
             <a:pPr algn="ctr"/>
             <a:r>
-              <a:rPr sz="3800" b="1" i="0">
+              <a:rPr sz="3200" b="1" i="0">
                 <a:solidFill>
                   <a:srgbClr val="FDF8F1"/>
                 </a:solidFill>
@@ -17639,14 +18101,14 @@
       </p:sp>
       <p:sp>
         <p:nvSpPr>
-          <p:cNvPr id="18" name="Rectangle 17"/>
+          <p:cNvPr id="24" name="Rectangle 23"/>
           <p:cNvSpPr/>
           <p:nvPr/>
         </p:nvSpPr>
         <p:spPr>
           <a:xfrm>
-            <a:off x="5120640" y="2331720"/>
-            <a:ext cx="2194560" cy="3200400"/>
+            <a:off x="5120640" y="2194560"/>
+            <a:ext cx="2194560" cy="2697480"/>
           </a:xfrm>
           <a:prstGeom prst="rect">
             <a:avLst/>
@@ -17682,14 +18144,14 @@
       </p:sp>
       <p:sp>
         <p:nvSpPr>
-          <p:cNvPr id="19" name="TextBox 18"/>
-          <p:cNvSpPr txBox="1"/>
-          <p:nvPr/>
-        </p:nvSpPr>
-        <p:spPr>
-          <a:xfrm>
-            <a:off x="5230368" y="2404872"/>
-            <a:ext cx="1965960" cy="640080"/>
+          <p:cNvPr id="25" name="TextBox 24"/>
+          <p:cNvSpPr txBox="1"/>
+          <p:nvPr/>
+        </p:nvSpPr>
+        <p:spPr>
+          <a:xfrm>
+            <a:off x="5230368" y="2267712"/>
+            <a:ext cx="1965960" cy="548640"/>
           </a:xfrm>
           <a:prstGeom prst="rect">
             <a:avLst/>
@@ -17718,14 +18180,14 @@
       </p:sp>
       <p:sp>
         <p:nvSpPr>
-          <p:cNvPr id="20" name="TextBox 19"/>
-          <p:cNvSpPr txBox="1"/>
-          <p:nvPr/>
-        </p:nvSpPr>
-        <p:spPr>
-          <a:xfrm>
-            <a:off x="5230368" y="3108960"/>
-            <a:ext cx="1965960" cy="2194560"/>
+          <p:cNvPr id="26" name="TextBox 25"/>
+          <p:cNvSpPr txBox="1"/>
+          <p:nvPr/>
+        </p:nvSpPr>
+        <p:spPr>
+          <a:xfrm>
+            <a:off x="5230368" y="2880360"/>
+            <a:ext cx="1965960" cy="1965960"/>
           </a:xfrm>
           <a:prstGeom prst="rect">
             <a:avLst/>
@@ -17740,7 +18202,7 @@
           <a:p>
             <a:pPr algn="ctr"/>
             <a:r>
-              <a:rPr sz="1100" b="0" i="0">
+              <a:rPr sz="1000" b="0" i="0">
                 <a:solidFill>
                   <a:srgbClr val="FDF8F1"/>
                 </a:solidFill>
@@ -17748,22 +18210,137 @@
               </a:rPr>
               <a:t>Nudges en
 tiendas socias
-Punto de
-decisión</a:t>
-            </a:r>
-          </a:p>
-        </p:txBody>
-      </p:sp>
-      <p:sp>
-        <p:nvSpPr>
-          <p:cNvPr id="21" name="Rectangle 20"/>
+Reposicionamiento
+de productos</a:t>
+            </a:r>
+          </a:p>
+        </p:txBody>
+      </p:sp>
+      <p:sp>
+        <p:nvSpPr>
+          <p:cNvPr id="27" name="Rectangle 26"/>
           <p:cNvSpPr/>
           <p:nvPr/>
         </p:nvSpPr>
         <p:spPr>
           <a:xfrm>
+            <a:off x="5120640" y="4937760"/>
+            <a:ext cx="2194560" cy="960120"/>
+          </a:xfrm>
+          <a:prstGeom prst="rect">
+            <a:avLst/>
+          </a:prstGeom>
+          <a:solidFill>
+            <a:srgbClr val="F0E8D8"/>
+          </a:solidFill>
+          <a:ln>
+            <a:noFill/>
+          </a:ln>
+        </p:spPr>
+        <p:style>
+          <a:lnRef idx="1">
+            <a:schemeClr val="accent1"/>
+          </a:lnRef>
+          <a:fillRef idx="3">
+            <a:schemeClr val="accent1"/>
+          </a:fillRef>
+          <a:effectRef idx="2">
+            <a:schemeClr val="accent1"/>
+          </a:effectRef>
+          <a:fontRef idx="minor">
+            <a:schemeClr val="lt1"/>
+          </a:fontRef>
+        </p:style>
+        <p:txBody>
+          <a:bodyPr rtlCol="0" anchor="ctr"/>
+          <a:lstStyle/>
+          <a:p>
+            <a:pPr algn="ctr"/>
+          </a:p>
+        </p:txBody>
+      </p:sp>
+      <p:sp>
+        <p:nvSpPr>
+          <p:cNvPr id="28" name="TextBox 27"/>
+          <p:cNvSpPr txBox="1"/>
+          <p:nvPr/>
+        </p:nvSpPr>
+        <p:spPr>
+          <a:xfrm>
+            <a:off x="5230368" y="4983480"/>
+            <a:ext cx="1965960" cy="201168"/>
+          </a:xfrm>
+          <a:prstGeom prst="rect">
+            <a:avLst/>
+          </a:prstGeom>
+          <a:noFill/>
+        </p:spPr>
+        <p:txBody>
+          <a:bodyPr wrap="square">
+            <a:spAutoFit/>
+          </a:bodyPr>
+          <a:lstStyle/>
+          <a:p>
+            <a:pPr algn="l"/>
+            <a:r>
+              <a:rPr sz="700" b="0" i="0">
+                <a:solidFill>
+                  <a:srgbClr val="B8332A"/>
+                </a:solidFill>
+                <a:latin typeface="Consolas"/>
+              </a:rPr>
+              <a:t>ANCLA EN DATOS</a:t>
+            </a:r>
+          </a:p>
+        </p:txBody>
+      </p:sp>
+      <p:sp>
+        <p:nvSpPr>
+          <p:cNvPr id="29" name="TextBox 28"/>
+          <p:cNvSpPr txBox="1"/>
+          <p:nvPr/>
+        </p:nvSpPr>
+        <p:spPr>
+          <a:xfrm>
+            <a:off x="5230368" y="5193792"/>
+            <a:ext cx="1965960" cy="640080"/>
+          </a:xfrm>
+          <a:prstGeom prst="rect">
+            <a:avLst/>
+          </a:prstGeom>
+          <a:noFill/>
+        </p:spPr>
+        <p:txBody>
+          <a:bodyPr wrap="square">
+            <a:spAutoFit/>
+          </a:bodyPr>
+          <a:lstStyle/>
+          <a:p>
+            <a:pPr algn="l"/>
+            <a:r>
+              <a:rPr sz="900" b="0" i="1">
+                <a:solidFill>
+                  <a:srgbClr val="1A1612"/>
+                </a:solidFill>
+                <a:latin typeface="Calibri"/>
+              </a:rPr>
+              <a:t>Responde a la
+falta de tiempo
+en el punto de venta</a:t>
+            </a:r>
+          </a:p>
+        </p:txBody>
+      </p:sp>
+      <p:sp>
+        <p:nvSpPr>
+          <p:cNvPr id="30" name="Rectangle 29"/>
+          <p:cNvSpPr/>
+          <p:nvPr/>
+        </p:nvSpPr>
+        <p:spPr>
+          <a:xfrm>
             <a:off x="7452359" y="1600200"/>
-            <a:ext cx="2194560" cy="685800"/>
+            <a:ext cx="2194560" cy="548640"/>
           </a:xfrm>
           <a:prstGeom prst="rect">
             <a:avLst/>
@@ -17799,14 +18376,14 @@
       </p:sp>
       <p:sp>
         <p:nvSpPr>
-          <p:cNvPr id="22" name="TextBox 21"/>
-          <p:cNvSpPr txBox="1"/>
-          <p:nvPr/>
-        </p:nvSpPr>
-        <p:spPr>
-          <a:xfrm>
-            <a:off x="7452359" y="1664208"/>
-            <a:ext cx="2194560" cy="594360"/>
+          <p:cNvPr id="31" name="TextBox 30"/>
+          <p:cNvSpPr txBox="1"/>
+          <p:nvPr/>
+        </p:nvSpPr>
+        <p:spPr>
+          <a:xfrm>
+            <a:off x="7452359" y="1645920"/>
+            <a:ext cx="2194560" cy="457200"/>
           </a:xfrm>
           <a:prstGeom prst="rect">
             <a:avLst/>
@@ -17821,7 +18398,7 @@
           <a:p>
             <a:pPr algn="ctr"/>
             <a:r>
-              <a:rPr sz="3800" b="1" i="0">
+              <a:rPr sz="3200" b="1" i="0">
                 <a:solidFill>
                   <a:srgbClr val="FDF8F1"/>
                 </a:solidFill>
@@ -17834,14 +18411,14 @@
       </p:sp>
       <p:sp>
         <p:nvSpPr>
-          <p:cNvPr id="23" name="Rectangle 22"/>
+          <p:cNvPr id="32" name="Rectangle 31"/>
           <p:cNvSpPr/>
           <p:nvPr/>
         </p:nvSpPr>
         <p:spPr>
           <a:xfrm>
-            <a:off x="7452359" y="2331720"/>
-            <a:ext cx="2194560" cy="3200400"/>
+            <a:off x="7452359" y="2194560"/>
+            <a:ext cx="2194560" cy="2697480"/>
           </a:xfrm>
           <a:prstGeom prst="rect">
             <a:avLst/>
@@ -17877,14 +18454,14 @@
       </p:sp>
       <p:sp>
         <p:nvSpPr>
-          <p:cNvPr id="24" name="TextBox 23"/>
-          <p:cNvSpPr txBox="1"/>
-          <p:nvPr/>
-        </p:nvSpPr>
-        <p:spPr>
-          <a:xfrm>
-            <a:off x="7562087" y="2404872"/>
-            <a:ext cx="1965960" cy="640080"/>
+          <p:cNvPr id="33" name="TextBox 32"/>
+          <p:cNvSpPr txBox="1"/>
+          <p:nvPr/>
+        </p:nvSpPr>
+        <p:spPr>
+          <a:xfrm>
+            <a:off x="7562087" y="2267712"/>
+            <a:ext cx="1965960" cy="548640"/>
           </a:xfrm>
           <a:prstGeom prst="rect">
             <a:avLst/>
@@ -17913,14 +18490,14 @@
       </p:sp>
       <p:sp>
         <p:nvSpPr>
-          <p:cNvPr id="25" name="TextBox 24"/>
-          <p:cNvSpPr txBox="1"/>
-          <p:nvPr/>
-        </p:nvSpPr>
-        <p:spPr>
-          <a:xfrm>
-            <a:off x="7562087" y="3108960"/>
-            <a:ext cx="1965960" cy="2194560"/>
+          <p:cNvPr id="34" name="TextBox 33"/>
+          <p:cNvSpPr txBox="1"/>
+          <p:nvPr/>
+        </p:nvSpPr>
+        <p:spPr>
+          <a:xfrm>
+            <a:off x="7562087" y="2880360"/>
+            <a:ext cx="1965960" cy="1965960"/>
           </a:xfrm>
           <a:prstGeom prst="rect">
             <a:avLst/>
@@ -17935,30 +18512,144 @@
           <a:p>
             <a:pPr algn="ctr"/>
             <a:r>
-              <a:rPr sz="1100" b="0" i="0">
+              <a:rPr sz="1000" b="0" i="0">
                 <a:solidFill>
                   <a:srgbClr val="FDF8F1"/>
                 </a:solidFill>
                 <a:latin typeface="Calibri"/>
               </a:rPr>
-              <a:t>8h asínc.
+              <a:t>8h asíncrona
 + 4h opcional
-Autonomía
-Fidelidad medida</a:t>
-            </a:r>
-          </a:p>
-        </p:txBody>
-      </p:sp>
-      <p:sp>
-        <p:nvSpPr>
-          <p:cNvPr id="26" name="Rectangle 25"/>
+Pedagogía de
+autonomía</a:t>
+            </a:r>
+          </a:p>
+        </p:txBody>
+      </p:sp>
+      <p:sp>
+        <p:nvSpPr>
+          <p:cNvPr id="35" name="Rectangle 34"/>
           <p:cNvSpPr/>
           <p:nvPr/>
         </p:nvSpPr>
         <p:spPr>
           <a:xfrm>
+            <a:off x="7452359" y="4937760"/>
+            <a:ext cx="2194560" cy="960120"/>
+          </a:xfrm>
+          <a:prstGeom prst="rect">
+            <a:avLst/>
+          </a:prstGeom>
+          <a:solidFill>
+            <a:srgbClr val="F0E8D8"/>
+          </a:solidFill>
+          <a:ln>
+            <a:noFill/>
+          </a:ln>
+        </p:spPr>
+        <p:style>
+          <a:lnRef idx="1">
+            <a:schemeClr val="accent1"/>
+          </a:lnRef>
+          <a:fillRef idx="3">
+            <a:schemeClr val="accent1"/>
+          </a:fillRef>
+          <a:effectRef idx="2">
+            <a:schemeClr val="accent1"/>
+          </a:effectRef>
+          <a:fontRef idx="minor">
+            <a:schemeClr val="lt1"/>
+          </a:fontRef>
+        </p:style>
+        <p:txBody>
+          <a:bodyPr rtlCol="0" anchor="ctr"/>
+          <a:lstStyle/>
+          <a:p>
+            <a:pPr algn="ctr"/>
+          </a:p>
+        </p:txBody>
+      </p:sp>
+      <p:sp>
+        <p:nvSpPr>
+          <p:cNvPr id="36" name="TextBox 35"/>
+          <p:cNvSpPr txBox="1"/>
+          <p:nvPr/>
+        </p:nvSpPr>
+        <p:spPr>
+          <a:xfrm>
+            <a:off x="7562087" y="4983480"/>
+            <a:ext cx="1965960" cy="201168"/>
+          </a:xfrm>
+          <a:prstGeom prst="rect">
+            <a:avLst/>
+          </a:prstGeom>
+          <a:noFill/>
+        </p:spPr>
+        <p:txBody>
+          <a:bodyPr wrap="square">
+            <a:spAutoFit/>
+          </a:bodyPr>
+          <a:lstStyle/>
+          <a:p>
+            <a:pPr algn="l"/>
+            <a:r>
+              <a:rPr sz="700" b="0" i="0">
+                <a:solidFill>
+                  <a:srgbClr val="B8332A"/>
+                </a:solidFill>
+                <a:latin typeface="Consolas"/>
+              </a:rPr>
+              <a:t>ANCLA EN DATOS</a:t>
+            </a:r>
+          </a:p>
+        </p:txBody>
+      </p:sp>
+      <p:sp>
+        <p:nvSpPr>
+          <p:cNvPr id="37" name="TextBox 36"/>
+          <p:cNvSpPr txBox="1"/>
+          <p:nvPr/>
+        </p:nvSpPr>
+        <p:spPr>
+          <a:xfrm>
+            <a:off x="7562087" y="5193792"/>
+            <a:ext cx="1965960" cy="640080"/>
+          </a:xfrm>
+          <a:prstGeom prst="rect">
+            <a:avLst/>
+          </a:prstGeom>
+          <a:noFill/>
+        </p:spPr>
+        <p:txBody>
+          <a:bodyPr wrap="square">
+            <a:spAutoFit/>
+          </a:bodyPr>
+          <a:lstStyle/>
+          <a:p>
+            <a:pPr algn="l"/>
+            <a:r>
+              <a:rPr sz="900" b="0" i="1">
+                <a:solidFill>
+                  <a:srgbClr val="1A1612"/>
+                </a:solidFill>
+                <a:latin typeface="Calibri"/>
+              </a:rPr>
+              <a:t>Asegura fidelidad
+de implementación</a:t>
+            </a:r>
+          </a:p>
+        </p:txBody>
+      </p:sp>
+      <p:sp>
+        <p:nvSpPr>
+          <p:cNvPr id="38" name="Rectangle 37"/>
+          <p:cNvSpPr/>
+          <p:nvPr/>
+        </p:nvSpPr>
+        <p:spPr>
+          <a:xfrm>
             <a:off x="9784080" y="1600200"/>
-            <a:ext cx="2194560" cy="685800"/>
+            <a:ext cx="2194560" cy="548640"/>
           </a:xfrm>
           <a:prstGeom prst="rect">
             <a:avLst/>
@@ -17994,14 +18685,14 @@
       </p:sp>
       <p:sp>
         <p:nvSpPr>
-          <p:cNvPr id="27" name="TextBox 26"/>
-          <p:cNvSpPr txBox="1"/>
-          <p:nvPr/>
-        </p:nvSpPr>
-        <p:spPr>
-          <a:xfrm>
-            <a:off x="9784080" y="1664208"/>
-            <a:ext cx="2194560" cy="594360"/>
+          <p:cNvPr id="39" name="TextBox 38"/>
+          <p:cNvSpPr txBox="1"/>
+          <p:nvPr/>
+        </p:nvSpPr>
+        <p:spPr>
+          <a:xfrm>
+            <a:off x="9784080" y="1645920"/>
+            <a:ext cx="2194560" cy="457200"/>
           </a:xfrm>
           <a:prstGeom prst="rect">
             <a:avLst/>
@@ -18016,7 +18707,7 @@
           <a:p>
             <a:pPr algn="ctr"/>
             <a:r>
-              <a:rPr sz="3800" b="1" i="0">
+              <a:rPr sz="3200" b="1" i="0">
                 <a:solidFill>
                   <a:srgbClr val="FDF8F1"/>
                 </a:solidFill>
@@ -18029,14 +18720,14 @@
       </p:sp>
       <p:sp>
         <p:nvSpPr>
-          <p:cNvPr id="28" name="Rectangle 27"/>
+          <p:cNvPr id="40" name="Rectangle 39"/>
           <p:cNvSpPr/>
           <p:nvPr/>
         </p:nvSpPr>
         <p:spPr>
           <a:xfrm>
-            <a:off x="9784080" y="2331720"/>
-            <a:ext cx="2194560" cy="3200400"/>
+            <a:off x="9784080" y="2194560"/>
+            <a:ext cx="2194560" cy="2697480"/>
           </a:xfrm>
           <a:prstGeom prst="rect">
             <a:avLst/>
@@ -18072,14 +18763,14 @@
       </p:sp>
       <p:sp>
         <p:nvSpPr>
-          <p:cNvPr id="29" name="TextBox 28"/>
-          <p:cNvSpPr txBox="1"/>
-          <p:nvPr/>
-        </p:nvSpPr>
-        <p:spPr>
-          <a:xfrm>
-            <a:off x="9893807" y="2404872"/>
-            <a:ext cx="1965960" cy="640080"/>
+          <p:cNvPr id="41" name="TextBox 40"/>
+          <p:cNvSpPr txBox="1"/>
+          <p:nvPr/>
+        </p:nvSpPr>
+        <p:spPr>
+          <a:xfrm>
+            <a:off x="9893807" y="2267712"/>
+            <a:ext cx="1965960" cy="548640"/>
           </a:xfrm>
           <a:prstGeom prst="rect">
             <a:avLst/>
@@ -18108,14 +18799,14 @@
       </p:sp>
       <p:sp>
         <p:nvSpPr>
-          <p:cNvPr id="30" name="TextBox 29"/>
-          <p:cNvSpPr txBox="1"/>
-          <p:nvPr/>
-        </p:nvSpPr>
-        <p:spPr>
-          <a:xfrm>
-            <a:off x="9893807" y="3108960"/>
-            <a:ext cx="1965960" cy="2194560"/>
+          <p:cNvPr id="42" name="TextBox 41"/>
+          <p:cNvSpPr txBox="1"/>
+          <p:nvPr/>
+        </p:nvSpPr>
+        <p:spPr>
+          <a:xfrm>
+            <a:off x="9893807" y="2880360"/>
+            <a:ext cx="1965960" cy="1965960"/>
           </a:xfrm>
           <a:prstGeom prst="rect">
             <a:avLst/>
@@ -18130,7 +18821,7 @@
           <a:p>
             <a:pPr algn="ctr"/>
             <a:r>
-              <a:rPr sz="1100" b="0" i="0">
+              <a:rPr sz="1000" b="0" i="0">
                 <a:solidFill>
                   <a:srgbClr val="FDF8F1"/>
                 </a:solidFill>
@@ -18146,14 +18837,14 @@
       </p:sp>
       <p:sp>
         <p:nvSpPr>
-          <p:cNvPr id="31" name="Rectangle 30"/>
+          <p:cNvPr id="43" name="Rectangle 42"/>
           <p:cNvSpPr/>
           <p:nvPr/>
         </p:nvSpPr>
         <p:spPr>
           <a:xfrm>
-            <a:off x="457200" y="5669280"/>
-            <a:ext cx="11338560" cy="411480"/>
+            <a:off x="9784080" y="4937760"/>
+            <a:ext cx="2194560" cy="960120"/>
           </a:xfrm>
           <a:prstGeom prst="rect">
             <a:avLst/>
@@ -18189,49 +18880,86 @@
       </p:sp>
       <p:sp>
         <p:nvSpPr>
-          <p:cNvPr id="32" name="TextBox 31"/>
-          <p:cNvSpPr txBox="1"/>
-          <p:nvPr/>
-        </p:nvSpPr>
-        <p:spPr>
-          <a:xfrm>
-            <a:off x="640080" y="5742432"/>
-            <a:ext cx="10972800" cy="274320"/>
-          </a:xfrm>
-          <a:prstGeom prst="rect">
-            <a:avLst/>
-          </a:prstGeom>
-          <a:noFill/>
-        </p:spPr>
-        <p:txBody>
-          <a:bodyPr wrap="square">
-            <a:spAutoFit/>
-          </a:bodyPr>
-          <a:lstStyle/>
-          <a:p>
-            <a:pPr algn="ctr"/>
-            <a:r>
-              <a:rPr sz="1000" b="0" i="0">
+          <p:cNvPr id="44" name="TextBox 43"/>
+          <p:cNvSpPr txBox="1"/>
+          <p:nvPr/>
+        </p:nvSpPr>
+        <p:spPr>
+          <a:xfrm>
+            <a:off x="9893807" y="4983480"/>
+            <a:ext cx="1965960" cy="201168"/>
+          </a:xfrm>
+          <a:prstGeom prst="rect">
+            <a:avLst/>
+          </a:prstGeom>
+          <a:noFill/>
+        </p:spPr>
+        <p:txBody>
+          <a:bodyPr wrap="square">
+            <a:spAutoFit/>
+          </a:bodyPr>
+          <a:lstStyle/>
+          <a:p>
+            <a:pPr algn="l"/>
+            <a:r>
+              <a:rPr sz="700" b="0" i="0">
+                <a:solidFill>
+                  <a:srgbClr val="B8332A"/>
+                </a:solidFill>
+                <a:latin typeface="Consolas"/>
+              </a:rPr>
+              <a:t>ANCLA EN DATOS</a:t>
+            </a:r>
+          </a:p>
+        </p:txBody>
+      </p:sp>
+      <p:sp>
+        <p:nvSpPr>
+          <p:cNvPr id="45" name="TextBox 44"/>
+          <p:cNvSpPr txBox="1"/>
+          <p:nvPr/>
+        </p:nvSpPr>
+        <p:spPr>
+          <a:xfrm>
+            <a:off x="9893807" y="5193792"/>
+            <a:ext cx="1965960" cy="640080"/>
+          </a:xfrm>
+          <a:prstGeom prst="rect">
+            <a:avLst/>
+          </a:prstGeom>
+          <a:noFill/>
+        </p:spPr>
+        <p:txBody>
+          <a:bodyPr wrap="square">
+            <a:spAutoFit/>
+          </a:bodyPr>
+          <a:lstStyle/>
+          <a:p>
+            <a:pPr algn="l"/>
+            <a:r>
+              <a:rPr sz="900" b="0" i="1">
                 <a:solidFill>
                   <a:srgbClr val="1A1612"/>
                 </a:solidFill>
                 <a:latin typeface="Calibri"/>
               </a:rPr>
-              <a:t>Marco teórico: Modelo Socioecológico  ·  Teoría de Autodeterminación (SDT)  ·  Economía conductual (System 1)  ·  Revisiones Cochrane</a:t>
-            </a:r>
-          </a:p>
-        </p:txBody>
-      </p:sp>
-      <p:sp>
-        <p:nvSpPr>
-          <p:cNvPr id="33" name="Rectangle 32"/>
+              <a:t>Responde a la
+barrera #1 de la
+encuesta</a:t>
+            </a:r>
+          </a:p>
+        </p:txBody>
+      </p:sp>
+      <p:sp>
+        <p:nvSpPr>
+          <p:cNvPr id="46" name="Rectangle 45"/>
           <p:cNvSpPr/>
           <p:nvPr/>
         </p:nvSpPr>
         <p:spPr>
           <a:xfrm>
-            <a:off x="457200" y="6126480"/>
-            <a:ext cx="11338560" cy="365760"/>
+            <a:off x="457200" y="5989320"/>
+            <a:ext cx="11338560" cy="411480"/>
           </a:xfrm>
           <a:prstGeom prst="rect">
             <a:avLst/>
@@ -18267,14 +18995,14 @@
       </p:sp>
       <p:sp>
         <p:nvSpPr>
-          <p:cNvPr id="34" name="TextBox 33"/>
-          <p:cNvSpPr txBox="1"/>
-          <p:nvPr/>
-        </p:nvSpPr>
-        <p:spPr>
-          <a:xfrm>
-            <a:off x="640080" y="6172200"/>
-            <a:ext cx="3200400" cy="274320"/>
+          <p:cNvPr id="47" name="TextBox 46"/>
+          <p:cNvSpPr txBox="1"/>
+          <p:nvPr/>
+        </p:nvSpPr>
+        <p:spPr>
+          <a:xfrm>
+            <a:off x="640080" y="6053328"/>
+            <a:ext cx="10972800" cy="274320"/>
           </a:xfrm>
           <a:prstGeom prst="rect">
             <a:avLst/>
@@ -18295,77 +19023,7 @@
                 </a:solidFill>
                 <a:latin typeface="Consolas"/>
               </a:rPr>
-              <a:t>MXN 12,000/escuela/año</a:t>
-            </a:r>
-          </a:p>
-        </p:txBody>
-      </p:sp>
-      <p:sp>
-        <p:nvSpPr>
-          <p:cNvPr id="35" name="TextBox 34"/>
-          <p:cNvSpPr txBox="1"/>
-          <p:nvPr/>
-        </p:nvSpPr>
-        <p:spPr>
-          <a:xfrm>
-            <a:off x="4114800" y="6172200"/>
-            <a:ext cx="3200400" cy="274320"/>
-          </a:xfrm>
-          <a:prstGeom prst="rect">
-            <a:avLst/>
-          </a:prstGeom>
-          <a:noFill/>
-        </p:spPr>
-        <p:txBody>
-          <a:bodyPr wrap="square">
-            <a:spAutoFit/>
-          </a:bodyPr>
-          <a:lstStyle/>
-          <a:p>
-            <a:pPr algn="l"/>
-            <a:r>
-              <a:rPr sz="1100" b="0" i="0">
-                <a:solidFill>
-                  <a:srgbClr val="B8862A"/>
-                </a:solidFill>
-                <a:latin typeface="Consolas"/>
-              </a:rPr>
-              <a:t>MXN 420M escala nacional</a:t>
-            </a:r>
-          </a:p>
-        </p:txBody>
-      </p:sp>
-      <p:sp>
-        <p:nvSpPr>
-          <p:cNvPr id="36" name="TextBox 35"/>
-          <p:cNvSpPr txBox="1"/>
-          <p:nvPr/>
-        </p:nvSpPr>
-        <p:spPr>
-          <a:xfrm>
-            <a:off x="8229600" y="6172200"/>
-            <a:ext cx="3657600" cy="274320"/>
-          </a:xfrm>
-          <a:prstGeom prst="rect">
-            <a:avLst/>
-          </a:prstGeom>
-          <a:noFill/>
-        </p:spPr>
-        <p:txBody>
-          <a:bodyPr wrap="square">
-            <a:spAutoFit/>
-          </a:bodyPr>
-          <a:lstStyle/>
-          <a:p>
-            <a:pPr algn="l"/>
-            <a:r>
-              <a:rPr sz="1100" b="0" i="0">
-                <a:solidFill>
-                  <a:srgbClr val="B8332A"/>
-                </a:solidFill>
-                <a:latin typeface="Consolas"/>
-              </a:rPr>
-              <a:t>&lt; 0.1% presupuesto SEP</a:t>
+              <a:t>Costo: MXN 12,000/escuela/año  ·  Nacional: MXN 420M  ·  &lt; 0.1% presupuesto SEP  ·  Sin reforma legislativa</a:t>
             </a:r>
           </a:p>
         </p:txBody>
